--- a/Lastde复现汇报-算法部分.pptx
+++ b/Lastde复现汇报-算法部分.pptx
@@ -5,7 +5,7 @@
     <p:sldMasterId id="2147483648" r:id="rId1"/>
   </p:sldMasterIdLst>
   <p:notesMasterIdLst>
-    <p:notesMasterId r:id="rId32"/>
+    <p:notesMasterId r:id="rId33"/>
   </p:notesMasterIdLst>
   <p:sldIdLst>
     <p:sldId id="256" r:id="rId2"/>
@@ -25,19 +25,20 @@
     <p:sldId id="268" r:id="rId16"/>
     <p:sldId id="269" r:id="rId17"/>
     <p:sldId id="270" r:id="rId18"/>
-    <p:sldId id="271" r:id="rId19"/>
-    <p:sldId id="272" r:id="rId20"/>
-    <p:sldId id="273" r:id="rId21"/>
-    <p:sldId id="274" r:id="rId22"/>
-    <p:sldId id="275" r:id="rId23"/>
-    <p:sldId id="276" r:id="rId24"/>
-    <p:sldId id="277" r:id="rId25"/>
-    <p:sldId id="278" r:id="rId26"/>
-    <p:sldId id="279" r:id="rId27"/>
-    <p:sldId id="280" r:id="rId28"/>
-    <p:sldId id="281" r:id="rId29"/>
-    <p:sldId id="282" r:id="rId30"/>
-    <p:sldId id="283" r:id="rId31"/>
+    <p:sldId id="287" r:id="rId19"/>
+    <p:sldId id="271" r:id="rId20"/>
+    <p:sldId id="272" r:id="rId21"/>
+    <p:sldId id="273" r:id="rId22"/>
+    <p:sldId id="274" r:id="rId23"/>
+    <p:sldId id="275" r:id="rId24"/>
+    <p:sldId id="276" r:id="rId25"/>
+    <p:sldId id="277" r:id="rId26"/>
+    <p:sldId id="278" r:id="rId27"/>
+    <p:sldId id="279" r:id="rId28"/>
+    <p:sldId id="280" r:id="rId29"/>
+    <p:sldId id="281" r:id="rId30"/>
+    <p:sldId id="282" r:id="rId31"/>
+    <p:sldId id="283" r:id="rId32"/>
   </p:sldIdLst>
   <p:sldSz cx="12192000" cy="6858000"/>
   <p:notesSz cx="6858000" cy="9144000"/>
@@ -1241,7 +1242,12 @@
             <p:ph type="sldImg" idx="2"/>
           </p:nvPr>
         </p:nvSpPr>
-        <p:spPr/>
+        <p:spPr>
+          <a:xfrm>
+            <a:off x="381000" y="685800"/>
+            <a:ext cx="6096000" cy="3429000"/>
+          </a:xfrm>
+        </p:spPr>
       </p:sp>
       <p:sp>
         <p:nvSpPr>
@@ -1381,7 +1387,12 @@
             <p:ph type="sldImg" idx="2"/>
           </p:nvPr>
         </p:nvSpPr>
-        <p:spPr/>
+        <p:spPr>
+          <a:xfrm>
+            <a:off x="381000" y="685800"/>
+            <a:ext cx="6096000" cy="3429000"/>
+          </a:xfrm>
+        </p:spPr>
       </p:sp>
       <p:sp>
         <p:nvSpPr>
@@ -5724,7 +5735,7 @@
         <p:spPr>
           <a:xfrm>
             <a:off x="548640" y="292608"/>
-            <a:ext cx="10972800" cy="548640"/>
+            <a:ext cx="10972800" cy="492443"/>
           </a:xfrm>
           <a:prstGeom prst="rect">
             <a:avLst/>
@@ -5739,7 +5750,7 @@
           <a:p>
             <a:pPr algn="l"/>
             <a:r>
-              <a:rPr sz="2600" b="1">
+              <a:rPr sz="2600" b="1" dirty="0" err="1">
                 <a:solidFill>
                   <a:srgbClr val="1F3864"/>
                 </a:solidFill>
@@ -5747,8 +5758,16 @@
                 <a:ea typeface="微软雅黑" panose="020B0503020204020204" charset="-122"/>
                 <a:cs typeface="微软雅黑" panose="020B0503020204020204" charset="-122"/>
               </a:rPr>
-              <a:t>三个公式，对应三段代码</a:t>
-            </a:r>
+              <a:t>三个公式</a:t>
+            </a:r>
+            <a:endParaRPr sz="2600" b="1" dirty="0">
+              <a:solidFill>
+                <a:srgbClr val="1F3864"/>
+              </a:solidFill>
+              <a:latin typeface="微软雅黑" panose="020B0503020204020204" charset="-122"/>
+              <a:ea typeface="微软雅黑" panose="020B0503020204020204" charset="-122"/>
+              <a:cs typeface="微软雅黑" panose="020B0503020204020204" charset="-122"/>
+            </a:endParaRPr>
           </a:p>
         </p:txBody>
       </p:sp>
@@ -6415,7 +6434,7 @@
         <p:spPr>
           <a:xfrm>
             <a:off x="548640" y="292608"/>
-            <a:ext cx="10972800" cy="548640"/>
+            <a:ext cx="10972800" cy="492443"/>
           </a:xfrm>
           <a:prstGeom prst="rect">
             <a:avLst/>
@@ -6430,7 +6449,7 @@
           <a:p>
             <a:pPr algn="l"/>
             <a:r>
-              <a:rPr sz="2600" b="1">
+              <a:rPr sz="2600" b="1" dirty="0">
                 <a:solidFill>
                   <a:srgbClr val="1F3864"/>
                 </a:solidFill>
@@ -6438,8 +6457,27 @@
                 <a:ea typeface="微软雅黑" panose="020B0503020204020204" charset="-122"/>
                 <a:cs typeface="微软雅黑" panose="020B0503020204020204" charset="-122"/>
               </a:rPr>
-              <a:t>手算一遍：DE 到底在算什么</a:t>
-            </a:r>
+              <a:t>DE </a:t>
+            </a:r>
+            <a:r>
+              <a:rPr sz="2600" b="1" dirty="0" err="1">
+                <a:solidFill>
+                  <a:srgbClr val="1F3864"/>
+                </a:solidFill>
+                <a:latin typeface="微软雅黑" panose="020B0503020204020204" charset="-122"/>
+                <a:ea typeface="微软雅黑" panose="020B0503020204020204" charset="-122"/>
+                <a:cs typeface="微软雅黑" panose="020B0503020204020204" charset="-122"/>
+              </a:rPr>
+              <a:t>到底在算什么</a:t>
+            </a:r>
+            <a:endParaRPr sz="2600" b="1" dirty="0">
+              <a:solidFill>
+                <a:srgbClr val="1F3864"/>
+              </a:solidFill>
+              <a:latin typeface="微软雅黑" panose="020B0503020204020204" charset="-122"/>
+              <a:ea typeface="微软雅黑" panose="020B0503020204020204" charset="-122"/>
+              <a:cs typeface="微软雅黑" panose="020B0503020204020204" charset="-122"/>
+            </a:endParaRPr>
           </a:p>
         </p:txBody>
       </p:sp>
@@ -8284,14 +8322,14 @@
           <p:nvPr>
             <p:extLst>
               <p:ext uri="{D42A27DB-BD31-4B8C-83A1-F6EECF244321}">
-                <p14:modId xmlns:p14="http://schemas.microsoft.com/office/powerpoint/2010/main" val="2612832497"/>
+                <p14:modId xmlns:p14="http://schemas.microsoft.com/office/powerpoint/2010/main" val="4031157659"/>
               </p:ext>
             </p:extLst>
           </p:nvPr>
         </p:nvGraphicFramePr>
         <p:xfrm>
           <a:off x="914400" y="1645920"/>
-          <a:ext cx="9966960" cy="2514600"/>
+          <a:ext cx="9966960" cy="2011680"/>
         </p:xfrm>
         <a:graphic>
           <a:graphicData uri="http://schemas.openxmlformats.org/drawingml/2006/table">
@@ -8493,6 +8531,28 @@
                     <a:lstStyle/>
                     <a:p>
                       <a:pPr algn="l"/>
+                      <a:r>
+                        <a:rPr sz="1400" b="0" dirty="0">
+                          <a:solidFill>
+                            <a:srgbClr val="595959"/>
+                          </a:solidFill>
+                          <a:latin typeface="微软雅黑" panose="020B0503020204020204" charset="-122"/>
+                          <a:ea typeface="微软雅黑" panose="020B0503020204020204" charset="-122"/>
+                          <a:cs typeface="微软雅黑" panose="020B0503020204020204" charset="-122"/>
+                        </a:rPr>
+                        <a:t>Fast-</a:t>
+                      </a:r>
+                      <a:r>
+                        <a:rPr sz="1400" b="0" dirty="0" err="1">
+                          <a:solidFill>
+                            <a:srgbClr val="595959"/>
+                          </a:solidFill>
+                          <a:latin typeface="微软雅黑" panose="020B0503020204020204" charset="-122"/>
+                          <a:ea typeface="微软雅黑" panose="020B0503020204020204" charset="-122"/>
+                          <a:cs typeface="微软雅黑" panose="020B0503020204020204" charset="-122"/>
+                        </a:rPr>
+                        <a:t>DetectGPT</a:t>
+                      </a:r>
                       <a:endParaRPr sz="1400" b="0" dirty="0">
                         <a:solidFill>
                           <a:srgbClr val="595959"/>
@@ -8501,82 +8561,6 @@
                         <a:ea typeface="微软雅黑" panose="020B0503020204020204" charset="-122"/>
                         <a:cs typeface="微软雅黑" panose="020B0503020204020204" charset="-122"/>
                       </a:endParaRPr>
-                    </a:p>
-                  </a:txBody>
-                  <a:tcPr marL="73152" marR="73152" anchor="ctr">
-                    <a:solidFill>
-                      <a:srgbClr val="FBE5D6"/>
-                    </a:solidFill>
-                  </a:tcPr>
-                </a:tc>
-                <a:tc>
-                  <a:txBody>
-                    <a:bodyPr/>
-                    <a:lstStyle/>
-                    <a:p>
-                      <a:pPr algn="ctr"/>
-                      <a:endParaRPr sz="1400" b="0" dirty="0">
-                        <a:solidFill>
-                          <a:srgbClr val="595959"/>
-                        </a:solidFill>
-                        <a:latin typeface="微软雅黑" panose="020B0503020204020204" charset="-122"/>
-                        <a:ea typeface="微软雅黑" panose="020B0503020204020204" charset="-122"/>
-                        <a:cs typeface="微软雅黑" panose="020B0503020204020204" charset="-122"/>
-                      </a:endParaRPr>
-                    </a:p>
-                  </a:txBody>
-                  <a:tcPr marL="73152" marR="73152" anchor="ctr">
-                    <a:solidFill>
-                      <a:srgbClr val="FBE5D6"/>
-                    </a:solidFill>
-                  </a:tcPr>
-                </a:tc>
-                <a:tc>
-                  <a:txBody>
-                    <a:bodyPr/>
-                    <a:lstStyle/>
-                    <a:p>
-                      <a:pPr algn="ctr"/>
-                      <a:endParaRPr sz="1400" b="0" dirty="0">
-                        <a:solidFill>
-                          <a:srgbClr val="595959"/>
-                        </a:solidFill>
-                        <a:latin typeface="微软雅黑" panose="020B0503020204020204" charset="-122"/>
-                        <a:ea typeface="微软雅黑" panose="020B0503020204020204" charset="-122"/>
-                        <a:cs typeface="微软雅黑" panose="020B0503020204020204" charset="-122"/>
-                      </a:endParaRPr>
-                    </a:p>
-                  </a:txBody>
-                  <a:tcPr marL="73152" marR="73152" anchor="ctr">
-                    <a:solidFill>
-                      <a:srgbClr val="FBE5D6"/>
-                    </a:solidFill>
-                  </a:tcPr>
-                </a:tc>
-                <a:extLst>
-                  <a:ext uri="{0D108BD9-81ED-4DB2-BD59-A6C34878D82A}">
-                    <a16:rowId xmlns:a16="http://schemas.microsoft.com/office/drawing/2014/main" val="10002"/>
-                  </a:ext>
-                </a:extLst>
-              </a:tr>
-              <a:tr h="502920">
-                <a:tc>
-                  <a:txBody>
-                    <a:bodyPr/>
-                    <a:lstStyle/>
-                    <a:p>
-                      <a:pPr algn="l"/>
-                      <a:r>
-                        <a:rPr sz="1400" b="0">
-                          <a:solidFill>
-                            <a:srgbClr val="595959"/>
-                          </a:solidFill>
-                          <a:latin typeface="微软雅黑" panose="020B0503020204020204" charset="-122"/>
-                          <a:ea typeface="微软雅黑" panose="020B0503020204020204" charset="-122"/>
-                          <a:cs typeface="微软雅黑" panose="020B0503020204020204" charset="-122"/>
-                        </a:rPr>
-                        <a:t>Fast-DetectGPT</a:t>
-                      </a:r>
                     </a:p>
                   </a:txBody>
                   <a:tcPr marL="73152" marR="73152" anchor="ctr">
@@ -11351,6 +11335,425 @@
 </file>
 
 <file path=ppt/slides/slide18.xml><?xml version="1.0" encoding="utf-8"?>
+<p:sld xmlns:a="http://schemas.openxmlformats.org/drawingml/2006/main" xmlns:r="http://schemas.openxmlformats.org/officeDocument/2006/relationships" xmlns:p="http://schemas.openxmlformats.org/presentationml/2006/main">
+  <p:cSld>
+    <p:spTree>
+      <p:nvGrpSpPr>
+        <p:cNvPr id="1" name=""/>
+        <p:cNvGrpSpPr/>
+        <p:nvPr/>
+      </p:nvGrpSpPr>
+      <p:grpSpPr>
+        <a:xfrm>
+          <a:off x="0" y="0"/>
+          <a:ext cx="0" cy="0"/>
+          <a:chOff x="0" y="0"/>
+          <a:chExt cx="0" cy="0"/>
+        </a:xfrm>
+      </p:grpSpPr>
+      <p:sp>
+        <p:nvSpPr>
+          <p:cNvPr id="2" name="文本框 1"/>
+          <p:cNvSpPr txBox="1"/>
+          <p:nvPr/>
+        </p:nvSpPr>
+        <p:spPr>
+          <a:xfrm>
+            <a:off x="359410" y="153035"/>
+            <a:ext cx="6096000" cy="5754370"/>
+          </a:xfrm>
+          <a:prstGeom prst="rect">
+            <a:avLst/>
+          </a:prstGeom>
+          <a:noFill/>
+        </p:spPr>
+        <p:txBody>
+          <a:bodyPr wrap="square" rtlCol="0" anchor="t">
+            <a:spAutoFit/>
+          </a:bodyPr>
+          <a:lstStyle/>
+          <a:p>
+            <a:pPr algn="l"/>
+            <a:r>
+              <a:rPr sz="1600" b="1">
+                <a:solidFill>
+                  <a:srgbClr val="1F3864"/>
+                </a:solidFill>
+                <a:latin typeface="微软雅黑" panose="020B0503020204020204" charset="-122"/>
+                <a:ea typeface="微软雅黑" panose="020B0503020204020204" charset="-122"/>
+                <a:cs typeface="微软雅黑" panose="020B0503020204020204" charset="-122"/>
+                <a:sym typeface="+mn-ea"/>
+              </a:rPr>
+              <a:t>代理模型规模</a:t>
+            </a:r>
+          </a:p>
+          <a:p>
+            <a:pPr algn="l"/>
+            <a:r>
+              <a:rPr sz="1600">
+                <a:solidFill>
+                  <a:srgbClr val="7F7F7F"/>
+                </a:solidFill>
+                <a:latin typeface="Consolas" panose="020B0609020204030204"/>
+                <a:ea typeface="Consolas" panose="020B0609020204030204"/>
+                <a:cs typeface="Consolas" panose="020B0609020204030204"/>
+                <a:sym typeface="+mn-ea"/>
+              </a:rPr>
+              <a:t>distilgpt2</a:t>
+            </a:r>
+            <a:r>
+              <a:rPr lang="en-US" sz="1600" b="1">
+                <a:solidFill>
+                  <a:srgbClr val="1F3864"/>
+                </a:solidFill>
+                <a:latin typeface="微软雅黑" panose="020B0503020204020204" charset="-122"/>
+                <a:ea typeface="微软雅黑" panose="020B0503020204020204" charset="-122"/>
+                <a:cs typeface="微软雅黑" panose="020B0503020204020204" charset="-122"/>
+                <a:sym typeface="+mn-ea"/>
+              </a:rPr>
+              <a:t>:</a:t>
+            </a:r>
+          </a:p>
+          <a:p>
+            <a:pPr algn="l"/>
+            <a:endParaRPr lang="en-US" sz="1600" b="1">
+              <a:solidFill>
+                <a:srgbClr val="1F3864"/>
+              </a:solidFill>
+              <a:latin typeface="微软雅黑" panose="020B0503020204020204" charset="-122"/>
+              <a:ea typeface="微软雅黑" panose="020B0503020204020204" charset="-122"/>
+              <a:cs typeface="微软雅黑" panose="020B0503020204020204" charset="-122"/>
+              <a:sym typeface="+mn-ea"/>
+            </a:endParaRPr>
+          </a:p>
+          <a:p>
+            <a:pPr algn="l"/>
+            <a:endParaRPr lang="en-US" sz="1600" b="1">
+              <a:solidFill>
+                <a:srgbClr val="1F3864"/>
+              </a:solidFill>
+              <a:latin typeface="微软雅黑" panose="020B0503020204020204" charset="-122"/>
+              <a:ea typeface="微软雅黑" panose="020B0503020204020204" charset="-122"/>
+              <a:cs typeface="微软雅黑" panose="020B0503020204020204" charset="-122"/>
+              <a:sym typeface="+mn-ea"/>
+            </a:endParaRPr>
+          </a:p>
+          <a:p>
+            <a:pPr algn="l"/>
+            <a:endParaRPr lang="en-US" sz="1600" b="1">
+              <a:solidFill>
+                <a:srgbClr val="1F3864"/>
+              </a:solidFill>
+              <a:latin typeface="微软雅黑" panose="020B0503020204020204" charset="-122"/>
+              <a:ea typeface="微软雅黑" panose="020B0503020204020204" charset="-122"/>
+              <a:cs typeface="微软雅黑" panose="020B0503020204020204" charset="-122"/>
+              <a:sym typeface="+mn-ea"/>
+            </a:endParaRPr>
+          </a:p>
+          <a:p>
+            <a:pPr algn="l"/>
+            <a:endParaRPr lang="en-US" sz="1600" b="1">
+              <a:solidFill>
+                <a:srgbClr val="1F3864"/>
+              </a:solidFill>
+              <a:latin typeface="微软雅黑" panose="020B0503020204020204" charset="-122"/>
+              <a:ea typeface="微软雅黑" panose="020B0503020204020204" charset="-122"/>
+              <a:cs typeface="微软雅黑" panose="020B0503020204020204" charset="-122"/>
+              <a:sym typeface="+mn-ea"/>
+            </a:endParaRPr>
+          </a:p>
+          <a:p>
+            <a:pPr algn="l"/>
+            <a:endParaRPr lang="en-US" sz="1600" b="1">
+              <a:solidFill>
+                <a:srgbClr val="1F3864"/>
+              </a:solidFill>
+              <a:latin typeface="微软雅黑" panose="020B0503020204020204" charset="-122"/>
+              <a:ea typeface="微软雅黑" panose="020B0503020204020204" charset="-122"/>
+              <a:cs typeface="微软雅黑" panose="020B0503020204020204" charset="-122"/>
+              <a:sym typeface="+mn-ea"/>
+            </a:endParaRPr>
+          </a:p>
+          <a:p>
+            <a:pPr algn="l"/>
+            <a:endParaRPr lang="en-US" sz="1600" b="1">
+              <a:solidFill>
+                <a:srgbClr val="1F3864"/>
+              </a:solidFill>
+              <a:latin typeface="微软雅黑" panose="020B0503020204020204" charset="-122"/>
+              <a:ea typeface="微软雅黑" panose="020B0503020204020204" charset="-122"/>
+              <a:cs typeface="微软雅黑" panose="020B0503020204020204" charset="-122"/>
+              <a:sym typeface="+mn-ea"/>
+            </a:endParaRPr>
+          </a:p>
+          <a:p>
+            <a:pPr algn="l"/>
+            <a:endParaRPr lang="en-US" sz="1600" b="1">
+              <a:solidFill>
+                <a:srgbClr val="1F3864"/>
+              </a:solidFill>
+              <a:latin typeface="微软雅黑" panose="020B0503020204020204" charset="-122"/>
+              <a:ea typeface="微软雅黑" panose="020B0503020204020204" charset="-122"/>
+              <a:cs typeface="微软雅黑" panose="020B0503020204020204" charset="-122"/>
+              <a:sym typeface="+mn-ea"/>
+            </a:endParaRPr>
+          </a:p>
+          <a:p>
+            <a:pPr algn="l"/>
+            <a:endParaRPr lang="en-US" sz="1600" b="1">
+              <a:solidFill>
+                <a:srgbClr val="1F3864"/>
+              </a:solidFill>
+              <a:latin typeface="微软雅黑" panose="020B0503020204020204" charset="-122"/>
+              <a:ea typeface="微软雅黑" panose="020B0503020204020204" charset="-122"/>
+              <a:cs typeface="微软雅黑" panose="020B0503020204020204" charset="-122"/>
+              <a:sym typeface="+mn-ea"/>
+            </a:endParaRPr>
+          </a:p>
+          <a:p>
+            <a:pPr algn="l"/>
+            <a:endParaRPr lang="en-US" sz="1600" b="1">
+              <a:solidFill>
+                <a:srgbClr val="1F3864"/>
+              </a:solidFill>
+              <a:latin typeface="微软雅黑" panose="020B0503020204020204" charset="-122"/>
+              <a:ea typeface="微软雅黑" panose="020B0503020204020204" charset="-122"/>
+              <a:cs typeface="微软雅黑" panose="020B0503020204020204" charset="-122"/>
+              <a:sym typeface="+mn-ea"/>
+            </a:endParaRPr>
+          </a:p>
+          <a:p>
+            <a:pPr algn="l"/>
+            <a:r>
+              <a:rPr lang="en-US" sz="1600" b="1">
+                <a:solidFill>
+                  <a:srgbClr val="1F3864"/>
+                </a:solidFill>
+                <a:latin typeface="微软雅黑" panose="020B0503020204020204" charset="-122"/>
+                <a:ea typeface="微软雅黑" panose="020B0503020204020204" charset="-122"/>
+                <a:cs typeface="微软雅黑" panose="020B0503020204020204" charset="-122"/>
+                <a:sym typeface="+mn-ea"/>
+              </a:rPr>
+              <a:t>gpt2:</a:t>
+            </a:r>
+          </a:p>
+          <a:p>
+            <a:pPr algn="l"/>
+            <a:endParaRPr lang="en-US" sz="1600" b="1">
+              <a:solidFill>
+                <a:srgbClr val="1F3864"/>
+              </a:solidFill>
+              <a:latin typeface="微软雅黑" panose="020B0503020204020204" charset="-122"/>
+              <a:ea typeface="微软雅黑" panose="020B0503020204020204" charset="-122"/>
+              <a:cs typeface="微软雅黑" panose="020B0503020204020204" charset="-122"/>
+              <a:sym typeface="+mn-ea"/>
+            </a:endParaRPr>
+          </a:p>
+          <a:p>
+            <a:pPr algn="l"/>
+            <a:endParaRPr lang="en-US" sz="1600" b="1">
+              <a:solidFill>
+                <a:srgbClr val="1F3864"/>
+              </a:solidFill>
+              <a:latin typeface="微软雅黑" panose="020B0503020204020204" charset="-122"/>
+              <a:ea typeface="微软雅黑" panose="020B0503020204020204" charset="-122"/>
+              <a:cs typeface="微软雅黑" panose="020B0503020204020204" charset="-122"/>
+              <a:sym typeface="+mn-ea"/>
+            </a:endParaRPr>
+          </a:p>
+          <a:p>
+            <a:pPr algn="l"/>
+            <a:endParaRPr lang="en-US" sz="1600" b="1">
+              <a:solidFill>
+                <a:srgbClr val="1F3864"/>
+              </a:solidFill>
+              <a:latin typeface="微软雅黑" panose="020B0503020204020204" charset="-122"/>
+              <a:ea typeface="微软雅黑" panose="020B0503020204020204" charset="-122"/>
+              <a:cs typeface="微软雅黑" panose="020B0503020204020204" charset="-122"/>
+              <a:sym typeface="+mn-ea"/>
+            </a:endParaRPr>
+          </a:p>
+          <a:p>
+            <a:pPr algn="l"/>
+            <a:endParaRPr lang="en-US" sz="1600" b="1">
+              <a:solidFill>
+                <a:srgbClr val="1F3864"/>
+              </a:solidFill>
+              <a:latin typeface="微软雅黑" panose="020B0503020204020204" charset="-122"/>
+              <a:ea typeface="微软雅黑" panose="020B0503020204020204" charset="-122"/>
+              <a:cs typeface="微软雅黑" panose="020B0503020204020204" charset="-122"/>
+              <a:sym typeface="+mn-ea"/>
+            </a:endParaRPr>
+          </a:p>
+          <a:p>
+            <a:pPr algn="l"/>
+            <a:endParaRPr lang="en-US" sz="1600" b="1">
+              <a:solidFill>
+                <a:srgbClr val="1F3864"/>
+              </a:solidFill>
+              <a:latin typeface="微软雅黑" panose="020B0503020204020204" charset="-122"/>
+              <a:ea typeface="微软雅黑" panose="020B0503020204020204" charset="-122"/>
+              <a:cs typeface="微软雅黑" panose="020B0503020204020204" charset="-122"/>
+              <a:sym typeface="+mn-ea"/>
+            </a:endParaRPr>
+          </a:p>
+          <a:p>
+            <a:pPr algn="l"/>
+            <a:endParaRPr lang="en-US" sz="1600" b="1">
+              <a:solidFill>
+                <a:srgbClr val="1F3864"/>
+              </a:solidFill>
+              <a:latin typeface="微软雅黑" panose="020B0503020204020204" charset="-122"/>
+              <a:ea typeface="微软雅黑" panose="020B0503020204020204" charset="-122"/>
+              <a:cs typeface="微软雅黑" panose="020B0503020204020204" charset="-122"/>
+              <a:sym typeface="+mn-ea"/>
+            </a:endParaRPr>
+          </a:p>
+          <a:p>
+            <a:pPr algn="l"/>
+            <a:endParaRPr lang="en-US" sz="1600" b="1">
+              <a:solidFill>
+                <a:srgbClr val="1F3864"/>
+              </a:solidFill>
+              <a:latin typeface="微软雅黑" panose="020B0503020204020204" charset="-122"/>
+              <a:ea typeface="微软雅黑" panose="020B0503020204020204" charset="-122"/>
+              <a:cs typeface="微软雅黑" panose="020B0503020204020204" charset="-122"/>
+              <a:sym typeface="+mn-ea"/>
+            </a:endParaRPr>
+          </a:p>
+          <a:p>
+            <a:pPr algn="l"/>
+            <a:endParaRPr lang="en-US" sz="1600" b="1">
+              <a:solidFill>
+                <a:srgbClr val="1F3864"/>
+              </a:solidFill>
+              <a:latin typeface="微软雅黑" panose="020B0503020204020204" charset="-122"/>
+              <a:ea typeface="微软雅黑" panose="020B0503020204020204" charset="-122"/>
+              <a:cs typeface="微软雅黑" panose="020B0503020204020204" charset="-122"/>
+              <a:sym typeface="+mn-ea"/>
+            </a:endParaRPr>
+          </a:p>
+          <a:p>
+            <a:pPr algn="l"/>
+            <a:r>
+              <a:rPr lang="en-US" sz="1600" b="1">
+                <a:solidFill>
+                  <a:srgbClr val="1F3864"/>
+                </a:solidFill>
+                <a:latin typeface="微软雅黑" panose="020B0503020204020204" charset="-122"/>
+                <a:ea typeface="微软雅黑" panose="020B0503020204020204" charset="-122"/>
+                <a:cs typeface="微软雅黑" panose="020B0503020204020204" charset="-122"/>
+                <a:sym typeface="+mn-ea"/>
+              </a:rPr>
+              <a:t>gpt2medium</a:t>
+            </a:r>
+          </a:p>
+          <a:p>
+            <a:pPr algn="l"/>
+            <a:br>
+              <a:rPr sz="1600" b="1">
+                <a:solidFill>
+                  <a:srgbClr val="1F3864"/>
+                </a:solidFill>
+                <a:latin typeface="微软雅黑" panose="020B0503020204020204" charset="-122"/>
+                <a:ea typeface="微软雅黑" panose="020B0503020204020204" charset="-122"/>
+                <a:cs typeface="微软雅黑" panose="020B0503020204020204" charset="-122"/>
+                <a:sym typeface="+mn-ea"/>
+              </a:rPr>
+            </a:br>
+            <a:endParaRPr lang="zh-CN" altLang="en-US" sz="1600" b="1">
+              <a:solidFill>
+                <a:srgbClr val="1F3864"/>
+              </a:solidFill>
+              <a:latin typeface="微软雅黑" panose="020B0503020204020204" charset="-122"/>
+              <a:ea typeface="微软雅黑" panose="020B0503020204020204" charset="-122"/>
+              <a:cs typeface="微软雅黑" panose="020B0503020204020204" charset="-122"/>
+              <a:sym typeface="+mn-ea"/>
+            </a:endParaRPr>
+          </a:p>
+        </p:txBody>
+      </p:sp>
+      <p:pic>
+        <p:nvPicPr>
+          <p:cNvPr id="3" name="图片 2"/>
+          <p:cNvPicPr>
+            <a:picLocks noChangeAspect="1"/>
+          </p:cNvPicPr>
+          <p:nvPr/>
+        </p:nvPicPr>
+        <p:blipFill>
+          <a:blip r:embed="rId2"/>
+          <a:stretch>
+            <a:fillRect/>
+          </a:stretch>
+        </p:blipFill>
+        <p:spPr>
+          <a:xfrm>
+            <a:off x="359410" y="758825"/>
+            <a:ext cx="4591050" cy="1990725"/>
+          </a:xfrm>
+          <a:prstGeom prst="rect">
+            <a:avLst/>
+          </a:prstGeom>
+        </p:spPr>
+      </p:pic>
+      <p:pic>
+        <p:nvPicPr>
+          <p:cNvPr id="14" name="图片 13"/>
+          <p:cNvPicPr>
+            <a:picLocks noChangeAspect="1"/>
+          </p:cNvPicPr>
+          <p:nvPr/>
+        </p:nvPicPr>
+        <p:blipFill>
+          <a:blip r:embed="rId3"/>
+          <a:stretch>
+            <a:fillRect/>
+          </a:stretch>
+        </p:blipFill>
+        <p:spPr>
+          <a:xfrm>
+            <a:off x="372745" y="3429000"/>
+            <a:ext cx="5052695" cy="1504315"/>
+          </a:xfrm>
+          <a:prstGeom prst="rect">
+            <a:avLst/>
+          </a:prstGeom>
+        </p:spPr>
+      </p:pic>
+      <p:pic>
+        <p:nvPicPr>
+          <p:cNvPr id="4" name="图片 3"/>
+          <p:cNvPicPr>
+            <a:picLocks noChangeAspect="1"/>
+          </p:cNvPicPr>
+          <p:nvPr/>
+        </p:nvPicPr>
+        <p:blipFill>
+          <a:blip r:embed="rId4"/>
+          <a:stretch>
+            <a:fillRect/>
+          </a:stretch>
+        </p:blipFill>
+        <p:spPr>
+          <a:xfrm>
+            <a:off x="295910" y="5307965"/>
+            <a:ext cx="3141980" cy="1528445"/>
+          </a:xfrm>
+          <a:prstGeom prst="rect">
+            <a:avLst/>
+          </a:prstGeom>
+        </p:spPr>
+      </p:pic>
+    </p:spTree>
+  </p:cSld>
+  <p:clrMapOvr>
+    <a:masterClrMapping/>
+  </p:clrMapOvr>
+</p:sld>
+</file>
+
+<file path=ppt/slides/slide19.xml><?xml version="1.0" encoding="utf-8"?>
 <p:sld xmlns:a="http://schemas.openxmlformats.org/drawingml/2006/main" xmlns:r="http://schemas.openxmlformats.org/officeDocument/2006/relationships" xmlns:p="http://schemas.openxmlformats.org/presentationml/2006/main">
   <p:cSld>
     <p:spTree>
@@ -12349,7 +12752,1135 @@
 </p:sld>
 </file>
 
-<file path=ppt/slides/slide19.xml><?xml version="1.0" encoding="utf-8"?>
+<file path=ppt/slides/slide2.xml><?xml version="1.0" encoding="utf-8"?>
+<p:sld xmlns:a="http://schemas.openxmlformats.org/drawingml/2006/main" xmlns:r="http://schemas.openxmlformats.org/officeDocument/2006/relationships" xmlns:p="http://schemas.openxmlformats.org/presentationml/2006/main">
+  <p:cSld>
+    <p:spTree>
+      <p:nvGrpSpPr>
+        <p:cNvPr id="1" name=""/>
+        <p:cNvGrpSpPr/>
+        <p:nvPr/>
+      </p:nvGrpSpPr>
+      <p:grpSpPr>
+        <a:xfrm>
+          <a:off x="0" y="0"/>
+          <a:ext cx="0" cy="0"/>
+          <a:chOff x="0" y="0"/>
+          <a:chExt cx="0" cy="0"/>
+        </a:xfrm>
+      </p:grpSpPr>
+      <p:sp>
+        <p:nvSpPr>
+          <p:cNvPr id="2" name="Rectangle 1"/>
+          <p:cNvSpPr/>
+          <p:nvPr/>
+        </p:nvSpPr>
+        <p:spPr>
+          <a:xfrm>
+            <a:off x="0" y="0"/>
+            <a:ext cx="12191695" cy="82296"/>
+          </a:xfrm>
+          <a:prstGeom prst="rect">
+            <a:avLst/>
+          </a:prstGeom>
+          <a:solidFill>
+            <a:srgbClr val="1F3864"/>
+          </a:solidFill>
+          <a:ln>
+            <a:noFill/>
+          </a:ln>
+        </p:spPr>
+        <p:style>
+          <a:lnRef idx="1">
+            <a:schemeClr val="accent1"/>
+          </a:lnRef>
+          <a:fillRef idx="3">
+            <a:schemeClr val="accent1"/>
+          </a:fillRef>
+          <a:effectRef idx="2">
+            <a:schemeClr val="accent1"/>
+          </a:effectRef>
+          <a:fontRef idx="minor">
+            <a:schemeClr val="lt1"/>
+          </a:fontRef>
+        </p:style>
+        <p:txBody>
+          <a:bodyPr rtlCol="0" anchor="ctr"/>
+          <a:lstStyle/>
+          <a:p>
+            <a:pPr algn="ctr"/>
+            <a:endParaRPr/>
+          </a:p>
+        </p:txBody>
+      </p:sp>
+      <p:sp>
+        <p:nvSpPr>
+          <p:cNvPr id="3" name="TextBox 2"/>
+          <p:cNvSpPr txBox="1"/>
+          <p:nvPr/>
+        </p:nvSpPr>
+        <p:spPr>
+          <a:xfrm>
+            <a:off x="548640" y="292608"/>
+            <a:ext cx="10972800" cy="548640"/>
+          </a:xfrm>
+          <a:prstGeom prst="rect">
+            <a:avLst/>
+          </a:prstGeom>
+          <a:noFill/>
+        </p:spPr>
+        <p:txBody>
+          <a:bodyPr wrap="square" lIns="0" rIns="0" anchor="t">
+            <a:spAutoFit/>
+          </a:bodyPr>
+          <a:lstStyle/>
+          <a:p>
+            <a:pPr algn="l"/>
+            <a:r>
+              <a:rPr sz="2600" b="1">
+                <a:solidFill>
+                  <a:srgbClr val="1F3864"/>
+                </a:solidFill>
+                <a:latin typeface="微软雅黑" panose="020B0503020204020204" charset="-122"/>
+                <a:ea typeface="微软雅黑" panose="020B0503020204020204" charset="-122"/>
+                <a:cs typeface="微软雅黑" panose="020B0503020204020204" charset="-122"/>
+              </a:rPr>
+              <a:t>汇报路线</a:t>
+            </a:r>
+          </a:p>
+        </p:txBody>
+      </p:sp>
+      <p:sp>
+        <p:nvSpPr>
+          <p:cNvPr id="5" name="TextBox 4"/>
+          <p:cNvSpPr txBox="1"/>
+          <p:nvPr/>
+        </p:nvSpPr>
+        <p:spPr>
+          <a:xfrm>
+            <a:off x="548640" y="6473952"/>
+            <a:ext cx="5486400" cy="274320"/>
+          </a:xfrm>
+          <a:prstGeom prst="rect">
+            <a:avLst/>
+          </a:prstGeom>
+          <a:noFill/>
+        </p:spPr>
+        <p:txBody>
+          <a:bodyPr wrap="square" lIns="0" rIns="0" anchor="t">
+            <a:spAutoFit/>
+          </a:bodyPr>
+          <a:lstStyle/>
+          <a:p>
+            <a:pPr algn="l"/>
+            <a:r>
+              <a:rPr sz="900" b="0">
+                <a:solidFill>
+                  <a:srgbClr val="7F7F7F"/>
+                </a:solidFill>
+                <a:latin typeface="微软雅黑" panose="020B0503020204020204" charset="-122"/>
+                <a:ea typeface="微软雅黑" panose="020B0503020204020204" charset="-122"/>
+                <a:cs typeface="微软雅黑" panose="020B0503020204020204" charset="-122"/>
+              </a:rPr>
+              <a:t>Lastde 复现  ·  AI for Software Engineering</a:t>
+            </a:r>
+          </a:p>
+        </p:txBody>
+      </p:sp>
+      <p:sp>
+        <p:nvSpPr>
+          <p:cNvPr id="6" name="TextBox 5"/>
+          <p:cNvSpPr txBox="1"/>
+          <p:nvPr/>
+        </p:nvSpPr>
+        <p:spPr>
+          <a:xfrm>
+            <a:off x="11155680" y="6473952"/>
+            <a:ext cx="548640" cy="274320"/>
+          </a:xfrm>
+          <a:prstGeom prst="rect">
+            <a:avLst/>
+          </a:prstGeom>
+          <a:noFill/>
+        </p:spPr>
+        <p:txBody>
+          <a:bodyPr wrap="square" lIns="0" rIns="0" anchor="t">
+            <a:spAutoFit/>
+          </a:bodyPr>
+          <a:lstStyle/>
+          <a:p>
+            <a:pPr algn="r"/>
+            <a:r>
+              <a:rPr sz="900" b="0">
+                <a:solidFill>
+                  <a:srgbClr val="7F7F7F"/>
+                </a:solidFill>
+                <a:latin typeface="微软雅黑" panose="020B0503020204020204" charset="-122"/>
+                <a:ea typeface="微软雅黑" panose="020B0503020204020204" charset="-122"/>
+                <a:cs typeface="微软雅黑" panose="020B0503020204020204" charset="-122"/>
+              </a:rPr>
+              <a:t>2</a:t>
+            </a:r>
+          </a:p>
+        </p:txBody>
+      </p:sp>
+      <p:sp>
+        <p:nvSpPr>
+          <p:cNvPr id="7" name="Rounded Rectangle 6"/>
+          <p:cNvSpPr/>
+          <p:nvPr/>
+        </p:nvSpPr>
+        <p:spPr>
+          <a:xfrm>
+            <a:off x="822960" y="1463040"/>
+            <a:ext cx="822960" cy="640080"/>
+          </a:xfrm>
+          <a:prstGeom prst="roundRect">
+            <a:avLst>
+              <a:gd name="adj" fmla="val 8000"/>
+            </a:avLst>
+          </a:prstGeom>
+          <a:solidFill>
+            <a:srgbClr val="DEEBF7"/>
+          </a:solidFill>
+          <a:ln>
+            <a:noFill/>
+          </a:ln>
+          <a:effectLst/>
+        </p:spPr>
+        <p:style>
+          <a:lnRef idx="1">
+            <a:schemeClr val="accent1"/>
+          </a:lnRef>
+          <a:fillRef idx="3">
+            <a:schemeClr val="accent1"/>
+          </a:fillRef>
+          <a:effectRef idx="2">
+            <a:schemeClr val="accent1"/>
+          </a:effectRef>
+          <a:fontRef idx="minor">
+            <a:schemeClr val="lt1"/>
+          </a:fontRef>
+        </p:style>
+        <p:txBody>
+          <a:bodyPr rtlCol="0" anchor="ctr"/>
+          <a:lstStyle/>
+          <a:p>
+            <a:pPr algn="ctr"/>
+            <a:endParaRPr/>
+          </a:p>
+        </p:txBody>
+      </p:sp>
+      <p:sp>
+        <p:nvSpPr>
+          <p:cNvPr id="8" name="TextBox 7"/>
+          <p:cNvSpPr txBox="1"/>
+          <p:nvPr/>
+        </p:nvSpPr>
+        <p:spPr>
+          <a:xfrm>
+            <a:off x="822960" y="1572768"/>
+            <a:ext cx="822960" cy="411480"/>
+          </a:xfrm>
+          <a:prstGeom prst="rect">
+            <a:avLst/>
+          </a:prstGeom>
+          <a:noFill/>
+        </p:spPr>
+        <p:txBody>
+          <a:bodyPr wrap="square" lIns="0" rIns="0" anchor="t">
+            <a:spAutoFit/>
+          </a:bodyPr>
+          <a:lstStyle/>
+          <a:p>
+            <a:pPr algn="ctr"/>
+            <a:r>
+              <a:rPr sz="1800" b="1">
+                <a:solidFill>
+                  <a:srgbClr val="2E75B6"/>
+                </a:solidFill>
+                <a:latin typeface="微软雅黑" panose="020B0503020204020204" charset="-122"/>
+                <a:ea typeface="微软雅黑" panose="020B0503020204020204" charset="-122"/>
+                <a:cs typeface="微软雅黑" panose="020B0503020204020204" charset="-122"/>
+              </a:rPr>
+              <a:t>01</a:t>
+            </a:r>
+          </a:p>
+        </p:txBody>
+      </p:sp>
+      <p:sp>
+        <p:nvSpPr>
+          <p:cNvPr id="9" name="TextBox 8"/>
+          <p:cNvSpPr txBox="1"/>
+          <p:nvPr/>
+        </p:nvSpPr>
+        <p:spPr>
+          <a:xfrm>
+            <a:off x="1874519" y="1481328"/>
+            <a:ext cx="2926080" cy="365760"/>
+          </a:xfrm>
+          <a:prstGeom prst="rect">
+            <a:avLst/>
+          </a:prstGeom>
+          <a:noFill/>
+        </p:spPr>
+        <p:txBody>
+          <a:bodyPr wrap="square" lIns="0" rIns="0" anchor="t">
+            <a:spAutoFit/>
+          </a:bodyPr>
+          <a:lstStyle/>
+          <a:p>
+            <a:pPr algn="l"/>
+            <a:r>
+              <a:rPr sz="1700" b="1">
+                <a:solidFill>
+                  <a:srgbClr val="1F3864"/>
+                </a:solidFill>
+                <a:latin typeface="微软雅黑" panose="020B0503020204020204" charset="-122"/>
+                <a:ea typeface="微软雅黑" panose="020B0503020204020204" charset="-122"/>
+                <a:cs typeface="微软雅黑" panose="020B0503020204020204" charset="-122"/>
+              </a:rPr>
+              <a:t>问题与洞察</a:t>
+            </a:r>
+          </a:p>
+        </p:txBody>
+      </p:sp>
+      <p:sp>
+        <p:nvSpPr>
+          <p:cNvPr id="10" name="TextBox 9"/>
+          <p:cNvSpPr txBox="1"/>
+          <p:nvPr/>
+        </p:nvSpPr>
+        <p:spPr>
+          <a:xfrm>
+            <a:off x="4663440" y="1536192"/>
+            <a:ext cx="6583680" cy="365760"/>
+          </a:xfrm>
+          <a:prstGeom prst="rect">
+            <a:avLst/>
+          </a:prstGeom>
+          <a:noFill/>
+        </p:spPr>
+        <p:txBody>
+          <a:bodyPr wrap="square" lIns="0" rIns="0" anchor="t">
+            <a:spAutoFit/>
+          </a:bodyPr>
+          <a:lstStyle/>
+          <a:p>
+            <a:pPr algn="l"/>
+            <a:r>
+              <a:rPr sz="1300" b="0">
+                <a:solidFill>
+                  <a:srgbClr val="595959"/>
+                </a:solidFill>
+                <a:latin typeface="微软雅黑" panose="020B0503020204020204" charset="-122"/>
+                <a:ea typeface="微软雅黑" panose="020B0503020204020204" charset="-122"/>
+                <a:cs typeface="微软雅黑" panose="020B0503020204020204" charset="-122"/>
+              </a:rPr>
+              <a:t>AI 文本为什么能被检测</a:t>
+            </a:r>
+          </a:p>
+        </p:txBody>
+      </p:sp>
+      <p:sp>
+        <p:nvSpPr>
+          <p:cNvPr id="11" name="Rounded Rectangle 10"/>
+          <p:cNvSpPr/>
+          <p:nvPr/>
+        </p:nvSpPr>
+        <p:spPr>
+          <a:xfrm>
+            <a:off x="822960" y="2240280"/>
+            <a:ext cx="822960" cy="640080"/>
+          </a:xfrm>
+          <a:prstGeom prst="roundRect">
+            <a:avLst>
+              <a:gd name="adj" fmla="val 8000"/>
+            </a:avLst>
+          </a:prstGeom>
+          <a:solidFill>
+            <a:srgbClr val="DEEBF7"/>
+          </a:solidFill>
+          <a:ln>
+            <a:noFill/>
+          </a:ln>
+          <a:effectLst/>
+        </p:spPr>
+        <p:style>
+          <a:lnRef idx="1">
+            <a:schemeClr val="accent1"/>
+          </a:lnRef>
+          <a:fillRef idx="3">
+            <a:schemeClr val="accent1"/>
+          </a:fillRef>
+          <a:effectRef idx="2">
+            <a:schemeClr val="accent1"/>
+          </a:effectRef>
+          <a:fontRef idx="minor">
+            <a:schemeClr val="lt1"/>
+          </a:fontRef>
+        </p:style>
+        <p:txBody>
+          <a:bodyPr rtlCol="0" anchor="ctr"/>
+          <a:lstStyle/>
+          <a:p>
+            <a:pPr algn="ctr"/>
+            <a:endParaRPr/>
+          </a:p>
+        </p:txBody>
+      </p:sp>
+      <p:sp>
+        <p:nvSpPr>
+          <p:cNvPr id="12" name="TextBox 11"/>
+          <p:cNvSpPr txBox="1"/>
+          <p:nvPr/>
+        </p:nvSpPr>
+        <p:spPr>
+          <a:xfrm>
+            <a:off x="822960" y="2350008"/>
+            <a:ext cx="822960" cy="411480"/>
+          </a:xfrm>
+          <a:prstGeom prst="rect">
+            <a:avLst/>
+          </a:prstGeom>
+          <a:noFill/>
+        </p:spPr>
+        <p:txBody>
+          <a:bodyPr wrap="square" lIns="0" rIns="0" anchor="t">
+            <a:spAutoFit/>
+          </a:bodyPr>
+          <a:lstStyle/>
+          <a:p>
+            <a:pPr algn="ctr"/>
+            <a:r>
+              <a:rPr sz="1800" b="1">
+                <a:solidFill>
+                  <a:srgbClr val="2E75B6"/>
+                </a:solidFill>
+                <a:latin typeface="微软雅黑" panose="020B0503020204020204" charset="-122"/>
+                <a:ea typeface="微软雅黑" panose="020B0503020204020204" charset="-122"/>
+                <a:cs typeface="微软雅黑" panose="020B0503020204020204" charset="-122"/>
+              </a:rPr>
+              <a:t>02</a:t>
+            </a:r>
+          </a:p>
+        </p:txBody>
+      </p:sp>
+      <p:sp>
+        <p:nvSpPr>
+          <p:cNvPr id="13" name="TextBox 12"/>
+          <p:cNvSpPr txBox="1"/>
+          <p:nvPr/>
+        </p:nvSpPr>
+        <p:spPr>
+          <a:xfrm>
+            <a:off x="1874519" y="2258568"/>
+            <a:ext cx="2926080" cy="365760"/>
+          </a:xfrm>
+          <a:prstGeom prst="rect">
+            <a:avLst/>
+          </a:prstGeom>
+          <a:noFill/>
+        </p:spPr>
+        <p:txBody>
+          <a:bodyPr wrap="square" lIns="0" rIns="0" anchor="t">
+            <a:spAutoFit/>
+          </a:bodyPr>
+          <a:lstStyle/>
+          <a:p>
+            <a:pPr algn="l"/>
+            <a:r>
+              <a:rPr sz="1700" b="1">
+                <a:solidFill>
+                  <a:srgbClr val="1F3864"/>
+                </a:solidFill>
+                <a:latin typeface="微软雅黑" panose="020B0503020204020204" charset="-122"/>
+                <a:ea typeface="微软雅黑" panose="020B0503020204020204" charset="-122"/>
+                <a:cs typeface="微软雅黑" panose="020B0503020204020204" charset="-122"/>
+              </a:rPr>
+              <a:t>原理</a:t>
+            </a:r>
+          </a:p>
+        </p:txBody>
+      </p:sp>
+      <p:sp>
+        <p:nvSpPr>
+          <p:cNvPr id="14" name="TextBox 13"/>
+          <p:cNvSpPr txBox="1"/>
+          <p:nvPr/>
+        </p:nvSpPr>
+        <p:spPr>
+          <a:xfrm>
+            <a:off x="4663440" y="2313432"/>
+            <a:ext cx="6583680" cy="365760"/>
+          </a:xfrm>
+          <a:prstGeom prst="rect">
+            <a:avLst/>
+          </a:prstGeom>
+          <a:noFill/>
+        </p:spPr>
+        <p:txBody>
+          <a:bodyPr wrap="square" lIns="0" rIns="0" anchor="t">
+            <a:spAutoFit/>
+          </a:bodyPr>
+          <a:lstStyle/>
+          <a:p>
+            <a:pPr algn="l"/>
+            <a:r>
+              <a:rPr sz="1300" b="0">
+                <a:solidFill>
+                  <a:srgbClr val="595959"/>
+                </a:solidFill>
+                <a:latin typeface="微软雅黑" panose="020B0503020204020204" charset="-122"/>
+                <a:ea typeface="微软雅黑" panose="020B0503020204020204" charset="-122"/>
+                <a:cs typeface="微软雅黑" panose="020B0503020204020204" charset="-122"/>
+              </a:rPr>
+              <a:t>一个 token 的概率是怎么算的</a:t>
+            </a:r>
+          </a:p>
+        </p:txBody>
+      </p:sp>
+      <p:sp>
+        <p:nvSpPr>
+          <p:cNvPr id="15" name="Rounded Rectangle 14"/>
+          <p:cNvSpPr/>
+          <p:nvPr/>
+        </p:nvSpPr>
+        <p:spPr>
+          <a:xfrm>
+            <a:off x="822960" y="3017520"/>
+            <a:ext cx="822960" cy="640080"/>
+          </a:xfrm>
+          <a:prstGeom prst="roundRect">
+            <a:avLst>
+              <a:gd name="adj" fmla="val 8000"/>
+            </a:avLst>
+          </a:prstGeom>
+          <a:solidFill>
+            <a:srgbClr val="DEEBF7"/>
+          </a:solidFill>
+          <a:ln>
+            <a:noFill/>
+          </a:ln>
+          <a:effectLst/>
+        </p:spPr>
+        <p:style>
+          <a:lnRef idx="1">
+            <a:schemeClr val="accent1"/>
+          </a:lnRef>
+          <a:fillRef idx="3">
+            <a:schemeClr val="accent1"/>
+          </a:fillRef>
+          <a:effectRef idx="2">
+            <a:schemeClr val="accent1"/>
+          </a:effectRef>
+          <a:fontRef idx="minor">
+            <a:schemeClr val="lt1"/>
+          </a:fontRef>
+        </p:style>
+        <p:txBody>
+          <a:bodyPr rtlCol="0" anchor="ctr"/>
+          <a:lstStyle/>
+          <a:p>
+            <a:pPr algn="ctr"/>
+            <a:endParaRPr/>
+          </a:p>
+        </p:txBody>
+      </p:sp>
+      <p:sp>
+        <p:nvSpPr>
+          <p:cNvPr id="16" name="TextBox 15"/>
+          <p:cNvSpPr txBox="1"/>
+          <p:nvPr/>
+        </p:nvSpPr>
+        <p:spPr>
+          <a:xfrm>
+            <a:off x="822960" y="3127248"/>
+            <a:ext cx="822960" cy="411480"/>
+          </a:xfrm>
+          <a:prstGeom prst="rect">
+            <a:avLst/>
+          </a:prstGeom>
+          <a:noFill/>
+        </p:spPr>
+        <p:txBody>
+          <a:bodyPr wrap="square" lIns="0" rIns="0" anchor="t">
+            <a:spAutoFit/>
+          </a:bodyPr>
+          <a:lstStyle/>
+          <a:p>
+            <a:pPr algn="ctr"/>
+            <a:r>
+              <a:rPr sz="1800" b="1">
+                <a:solidFill>
+                  <a:srgbClr val="2E75B6"/>
+                </a:solidFill>
+                <a:latin typeface="微软雅黑" panose="020B0503020204020204" charset="-122"/>
+                <a:ea typeface="微软雅黑" panose="020B0503020204020204" charset="-122"/>
+                <a:cs typeface="微软雅黑" panose="020B0503020204020204" charset="-122"/>
+              </a:rPr>
+              <a:t>03</a:t>
+            </a:r>
+          </a:p>
+        </p:txBody>
+      </p:sp>
+      <p:sp>
+        <p:nvSpPr>
+          <p:cNvPr id="17" name="TextBox 16"/>
+          <p:cNvSpPr txBox="1"/>
+          <p:nvPr/>
+        </p:nvSpPr>
+        <p:spPr>
+          <a:xfrm>
+            <a:off x="1874519" y="3035808"/>
+            <a:ext cx="2926080" cy="365760"/>
+          </a:xfrm>
+          <a:prstGeom prst="rect">
+            <a:avLst/>
+          </a:prstGeom>
+          <a:noFill/>
+        </p:spPr>
+        <p:txBody>
+          <a:bodyPr wrap="square" lIns="0" rIns="0" anchor="t">
+            <a:spAutoFit/>
+          </a:bodyPr>
+          <a:lstStyle/>
+          <a:p>
+            <a:pPr algn="l"/>
+            <a:r>
+              <a:rPr sz="1700" b="1">
+                <a:solidFill>
+                  <a:srgbClr val="1F3864"/>
+                </a:solidFill>
+                <a:latin typeface="微软雅黑" panose="020B0503020204020204" charset="-122"/>
+                <a:ea typeface="微软雅黑" panose="020B0503020204020204" charset="-122"/>
+                <a:cs typeface="微软雅黑" panose="020B0503020204020204" charset="-122"/>
+              </a:rPr>
+              <a:t>方法</a:t>
+            </a:r>
+          </a:p>
+        </p:txBody>
+      </p:sp>
+      <p:sp>
+        <p:nvSpPr>
+          <p:cNvPr id="18" name="TextBox 17"/>
+          <p:cNvSpPr txBox="1"/>
+          <p:nvPr/>
+        </p:nvSpPr>
+        <p:spPr>
+          <a:xfrm>
+            <a:off x="4663440" y="3090672"/>
+            <a:ext cx="6583680" cy="365760"/>
+          </a:xfrm>
+          <a:prstGeom prst="rect">
+            <a:avLst/>
+          </a:prstGeom>
+          <a:noFill/>
+        </p:spPr>
+        <p:txBody>
+          <a:bodyPr wrap="square" lIns="0" rIns="0" anchor="t">
+            <a:spAutoFit/>
+          </a:bodyPr>
+          <a:lstStyle/>
+          <a:p>
+            <a:pPr algn="l"/>
+            <a:r>
+              <a:rPr sz="1300" b="0">
+                <a:solidFill>
+                  <a:srgbClr val="595959"/>
+                </a:solidFill>
+                <a:latin typeface="微软雅黑" panose="020B0503020204020204" charset="-122"/>
+                <a:ea typeface="微软雅黑" panose="020B0503020204020204" charset="-122"/>
+                <a:cs typeface="微软雅黑" panose="020B0503020204020204" charset="-122"/>
+              </a:rPr>
+              <a:t>五步流水线 + 一个公式</a:t>
+            </a:r>
+          </a:p>
+        </p:txBody>
+      </p:sp>
+      <p:sp>
+        <p:nvSpPr>
+          <p:cNvPr id="19" name="Rounded Rectangle 18"/>
+          <p:cNvSpPr/>
+          <p:nvPr/>
+        </p:nvSpPr>
+        <p:spPr>
+          <a:xfrm>
+            <a:off x="822960" y="3794760"/>
+            <a:ext cx="822960" cy="640080"/>
+          </a:xfrm>
+          <a:prstGeom prst="roundRect">
+            <a:avLst>
+              <a:gd name="adj" fmla="val 8000"/>
+            </a:avLst>
+          </a:prstGeom>
+          <a:solidFill>
+            <a:srgbClr val="DEEBF7"/>
+          </a:solidFill>
+          <a:ln>
+            <a:noFill/>
+          </a:ln>
+          <a:effectLst/>
+        </p:spPr>
+        <p:style>
+          <a:lnRef idx="1">
+            <a:schemeClr val="accent1"/>
+          </a:lnRef>
+          <a:fillRef idx="3">
+            <a:schemeClr val="accent1"/>
+          </a:fillRef>
+          <a:effectRef idx="2">
+            <a:schemeClr val="accent1"/>
+          </a:effectRef>
+          <a:fontRef idx="minor">
+            <a:schemeClr val="lt1"/>
+          </a:fontRef>
+        </p:style>
+        <p:txBody>
+          <a:bodyPr rtlCol="0" anchor="ctr"/>
+          <a:lstStyle/>
+          <a:p>
+            <a:pPr algn="ctr"/>
+            <a:endParaRPr/>
+          </a:p>
+        </p:txBody>
+      </p:sp>
+      <p:sp>
+        <p:nvSpPr>
+          <p:cNvPr id="20" name="TextBox 19"/>
+          <p:cNvSpPr txBox="1"/>
+          <p:nvPr/>
+        </p:nvSpPr>
+        <p:spPr>
+          <a:xfrm>
+            <a:off x="822960" y="3904488"/>
+            <a:ext cx="822960" cy="411480"/>
+          </a:xfrm>
+          <a:prstGeom prst="rect">
+            <a:avLst/>
+          </a:prstGeom>
+          <a:noFill/>
+        </p:spPr>
+        <p:txBody>
+          <a:bodyPr wrap="square" lIns="0" rIns="0" anchor="t">
+            <a:spAutoFit/>
+          </a:bodyPr>
+          <a:lstStyle/>
+          <a:p>
+            <a:pPr algn="ctr"/>
+            <a:r>
+              <a:rPr sz="1800" b="1">
+                <a:solidFill>
+                  <a:srgbClr val="2E75B6"/>
+                </a:solidFill>
+                <a:latin typeface="微软雅黑" panose="020B0503020204020204" charset="-122"/>
+                <a:ea typeface="微软雅黑" panose="020B0503020204020204" charset="-122"/>
+                <a:cs typeface="微软雅黑" panose="020B0503020204020204" charset="-122"/>
+              </a:rPr>
+              <a:t>04</a:t>
+            </a:r>
+          </a:p>
+        </p:txBody>
+      </p:sp>
+      <p:sp>
+        <p:nvSpPr>
+          <p:cNvPr id="21" name="TextBox 20"/>
+          <p:cNvSpPr txBox="1"/>
+          <p:nvPr/>
+        </p:nvSpPr>
+        <p:spPr>
+          <a:xfrm>
+            <a:off x="1874519" y="3813048"/>
+            <a:ext cx="2926080" cy="365760"/>
+          </a:xfrm>
+          <a:prstGeom prst="rect">
+            <a:avLst/>
+          </a:prstGeom>
+          <a:noFill/>
+        </p:spPr>
+        <p:txBody>
+          <a:bodyPr wrap="square" lIns="0" rIns="0" anchor="t">
+            <a:spAutoFit/>
+          </a:bodyPr>
+          <a:lstStyle/>
+          <a:p>
+            <a:pPr algn="l"/>
+            <a:r>
+              <a:rPr sz="1700" b="1">
+                <a:solidFill>
+                  <a:srgbClr val="1F3864"/>
+                </a:solidFill>
+                <a:latin typeface="微软雅黑" panose="020B0503020204020204" charset="-122"/>
+                <a:ea typeface="微软雅黑" panose="020B0503020204020204" charset="-122"/>
+                <a:cs typeface="微软雅黑" panose="020B0503020204020204" charset="-122"/>
+              </a:rPr>
+              <a:t>我们的复现</a:t>
+            </a:r>
+          </a:p>
+        </p:txBody>
+      </p:sp>
+      <p:sp>
+        <p:nvSpPr>
+          <p:cNvPr id="22" name="TextBox 21"/>
+          <p:cNvSpPr txBox="1"/>
+          <p:nvPr/>
+        </p:nvSpPr>
+        <p:spPr>
+          <a:xfrm>
+            <a:off x="4663440" y="3867912"/>
+            <a:ext cx="6583680" cy="365760"/>
+          </a:xfrm>
+          <a:prstGeom prst="rect">
+            <a:avLst/>
+          </a:prstGeom>
+          <a:noFill/>
+        </p:spPr>
+        <p:txBody>
+          <a:bodyPr wrap="square" lIns="0" rIns="0" anchor="t">
+            <a:spAutoFit/>
+          </a:bodyPr>
+          <a:lstStyle/>
+          <a:p>
+            <a:pPr algn="l"/>
+            <a:r>
+              <a:rPr sz="1300" b="0">
+                <a:solidFill>
+                  <a:srgbClr val="595959"/>
+                </a:solidFill>
+                <a:latin typeface="微软雅黑" panose="020B0503020204020204" charset="-122"/>
+                <a:ea typeface="微软雅黑" panose="020B0503020204020204" charset="-122"/>
+                <a:cs typeface="微软雅黑" panose="020B0503020204020204" charset="-122"/>
+              </a:rPr>
+              <a:t>主结果、消融、鲁棒性</a:t>
+            </a:r>
+          </a:p>
+        </p:txBody>
+      </p:sp>
+      <p:sp>
+        <p:nvSpPr>
+          <p:cNvPr id="23" name="Rounded Rectangle 22"/>
+          <p:cNvSpPr/>
+          <p:nvPr/>
+        </p:nvSpPr>
+        <p:spPr>
+          <a:xfrm>
+            <a:off x="822960" y="4572000"/>
+            <a:ext cx="822960" cy="640080"/>
+          </a:xfrm>
+          <a:prstGeom prst="roundRect">
+            <a:avLst>
+              <a:gd name="adj" fmla="val 8000"/>
+            </a:avLst>
+          </a:prstGeom>
+          <a:solidFill>
+            <a:srgbClr val="DEEBF7"/>
+          </a:solidFill>
+          <a:ln>
+            <a:noFill/>
+          </a:ln>
+          <a:effectLst/>
+        </p:spPr>
+        <p:style>
+          <a:lnRef idx="1">
+            <a:schemeClr val="accent1"/>
+          </a:lnRef>
+          <a:fillRef idx="3">
+            <a:schemeClr val="accent1"/>
+          </a:fillRef>
+          <a:effectRef idx="2">
+            <a:schemeClr val="accent1"/>
+          </a:effectRef>
+          <a:fontRef idx="minor">
+            <a:schemeClr val="lt1"/>
+          </a:fontRef>
+        </p:style>
+        <p:txBody>
+          <a:bodyPr rtlCol="0" anchor="ctr"/>
+          <a:lstStyle/>
+          <a:p>
+            <a:pPr algn="ctr"/>
+            <a:endParaRPr/>
+          </a:p>
+        </p:txBody>
+      </p:sp>
+      <p:sp>
+        <p:nvSpPr>
+          <p:cNvPr id="24" name="TextBox 23"/>
+          <p:cNvSpPr txBox="1"/>
+          <p:nvPr/>
+        </p:nvSpPr>
+        <p:spPr>
+          <a:xfrm>
+            <a:off x="822960" y="4681728"/>
+            <a:ext cx="822960" cy="411480"/>
+          </a:xfrm>
+          <a:prstGeom prst="rect">
+            <a:avLst/>
+          </a:prstGeom>
+          <a:noFill/>
+        </p:spPr>
+        <p:txBody>
+          <a:bodyPr wrap="square" lIns="0" rIns="0" anchor="t">
+            <a:spAutoFit/>
+          </a:bodyPr>
+          <a:lstStyle/>
+          <a:p>
+            <a:pPr algn="ctr"/>
+            <a:r>
+              <a:rPr sz="1800" b="1">
+                <a:solidFill>
+                  <a:srgbClr val="2E75B6"/>
+                </a:solidFill>
+                <a:latin typeface="微软雅黑" panose="020B0503020204020204" charset="-122"/>
+                <a:ea typeface="微软雅黑" panose="020B0503020204020204" charset="-122"/>
+                <a:cs typeface="微软雅黑" panose="020B0503020204020204" charset="-122"/>
+              </a:rPr>
+              <a:t>05</a:t>
+            </a:r>
+          </a:p>
+        </p:txBody>
+      </p:sp>
+      <p:sp>
+        <p:nvSpPr>
+          <p:cNvPr id="25" name="TextBox 24"/>
+          <p:cNvSpPr txBox="1"/>
+          <p:nvPr/>
+        </p:nvSpPr>
+        <p:spPr>
+          <a:xfrm>
+            <a:off x="1874519" y="4590288"/>
+            <a:ext cx="2926080" cy="365760"/>
+          </a:xfrm>
+          <a:prstGeom prst="rect">
+            <a:avLst/>
+          </a:prstGeom>
+          <a:noFill/>
+        </p:spPr>
+        <p:txBody>
+          <a:bodyPr wrap="square" lIns="0" rIns="0" anchor="t">
+            <a:spAutoFit/>
+          </a:bodyPr>
+          <a:lstStyle/>
+          <a:p>
+            <a:pPr algn="l"/>
+            <a:r>
+              <a:rPr sz="1700" b="1">
+                <a:solidFill>
+                  <a:srgbClr val="1F3864"/>
+                </a:solidFill>
+                <a:latin typeface="微软雅黑" panose="020B0503020204020204" charset="-122"/>
+                <a:ea typeface="微软雅黑" panose="020B0503020204020204" charset="-122"/>
+                <a:cs typeface="微软雅黑" panose="020B0503020204020204" charset="-122"/>
+              </a:rPr>
+              <a:t>发现</a:t>
+            </a:r>
+          </a:p>
+        </p:txBody>
+      </p:sp>
+      <p:sp>
+        <p:nvSpPr>
+          <p:cNvPr id="26" name="TextBox 25"/>
+          <p:cNvSpPr txBox="1"/>
+          <p:nvPr/>
+        </p:nvSpPr>
+        <p:spPr>
+          <a:xfrm>
+            <a:off x="4663440" y="4645152"/>
+            <a:ext cx="6583680" cy="365760"/>
+          </a:xfrm>
+          <a:prstGeom prst="rect">
+            <a:avLst/>
+          </a:prstGeom>
+          <a:noFill/>
+        </p:spPr>
+        <p:txBody>
+          <a:bodyPr wrap="square" lIns="0" rIns="0" anchor="t">
+            <a:spAutoFit/>
+          </a:bodyPr>
+          <a:lstStyle/>
+          <a:p>
+            <a:pPr algn="l"/>
+            <a:r>
+              <a:rPr sz="1300" b="0">
+                <a:solidFill>
+                  <a:srgbClr val="595959"/>
+                </a:solidFill>
+                <a:latin typeface="微软雅黑" panose="020B0503020204020204" charset="-122"/>
+                <a:ea typeface="微软雅黑" panose="020B0503020204020204" charset="-122"/>
+                <a:cs typeface="微软雅黑" panose="020B0503020204020204" charset="-122"/>
+              </a:rPr>
+              <a:t>MDE 方向反转</a:t>
+            </a:r>
+          </a:p>
+        </p:txBody>
+      </p:sp>
+      <p:sp>
+        <p:nvSpPr>
+          <p:cNvPr id="27" name="Rounded Rectangle 26"/>
+          <p:cNvSpPr/>
+          <p:nvPr/>
+        </p:nvSpPr>
+        <p:spPr>
+          <a:xfrm>
+            <a:off x="822960" y="5349240"/>
+            <a:ext cx="822960" cy="640080"/>
+          </a:xfrm>
+          <a:prstGeom prst="roundRect">
+            <a:avLst>
+              <a:gd name="adj" fmla="val 8000"/>
+            </a:avLst>
+          </a:prstGeom>
+          <a:solidFill>
+            <a:srgbClr val="DEEBF7"/>
+          </a:solidFill>
+          <a:ln>
+            <a:noFill/>
+          </a:ln>
+          <a:effectLst/>
+        </p:spPr>
+        <p:style>
+          <a:lnRef idx="1">
+            <a:schemeClr val="accent1"/>
+          </a:lnRef>
+          <a:fillRef idx="3">
+            <a:schemeClr val="accent1"/>
+          </a:fillRef>
+          <a:effectRef idx="2">
+            <a:schemeClr val="accent1"/>
+          </a:effectRef>
+          <a:fontRef idx="minor">
+            <a:schemeClr val="lt1"/>
+          </a:fontRef>
+        </p:style>
+        <p:txBody>
+          <a:bodyPr rtlCol="0" anchor="ctr"/>
+          <a:lstStyle/>
+          <a:p>
+            <a:pPr algn="ctr"/>
+            <a:endParaRPr/>
+          </a:p>
+        </p:txBody>
+      </p:sp>
+      <p:sp>
+        <p:nvSpPr>
+          <p:cNvPr id="28" name="TextBox 27"/>
+          <p:cNvSpPr txBox="1"/>
+          <p:nvPr/>
+        </p:nvSpPr>
+        <p:spPr>
+          <a:xfrm>
+            <a:off x="822960" y="5458968"/>
+            <a:ext cx="822960" cy="411480"/>
+          </a:xfrm>
+          <a:prstGeom prst="rect">
+            <a:avLst/>
+          </a:prstGeom>
+          <a:noFill/>
+        </p:spPr>
+        <p:txBody>
+          <a:bodyPr wrap="square" lIns="0" rIns="0" anchor="t">
+            <a:spAutoFit/>
+          </a:bodyPr>
+          <a:lstStyle/>
+          <a:p>
+            <a:pPr algn="ctr"/>
+            <a:r>
+              <a:rPr sz="1800" b="1">
+                <a:solidFill>
+                  <a:srgbClr val="2E75B6"/>
+                </a:solidFill>
+                <a:latin typeface="微软雅黑" panose="020B0503020204020204" charset="-122"/>
+                <a:ea typeface="微软雅黑" panose="020B0503020204020204" charset="-122"/>
+                <a:cs typeface="微软雅黑" panose="020B0503020204020204" charset="-122"/>
+              </a:rPr>
+              <a:t>06</a:t>
+            </a:r>
+          </a:p>
+        </p:txBody>
+      </p:sp>
+      <p:sp>
+        <p:nvSpPr>
+          <p:cNvPr id="29" name="TextBox 28"/>
+          <p:cNvSpPr txBox="1"/>
+          <p:nvPr/>
+        </p:nvSpPr>
+        <p:spPr>
+          <a:xfrm>
+            <a:off x="1874519" y="5367527"/>
+            <a:ext cx="2926080" cy="365760"/>
+          </a:xfrm>
+          <a:prstGeom prst="rect">
+            <a:avLst/>
+          </a:prstGeom>
+          <a:noFill/>
+        </p:spPr>
+        <p:txBody>
+          <a:bodyPr wrap="square" lIns="0" rIns="0" anchor="t">
+            <a:spAutoFit/>
+          </a:bodyPr>
+          <a:lstStyle/>
+          <a:p>
+            <a:pPr algn="l"/>
+            <a:r>
+              <a:rPr sz="1700" b="1">
+                <a:solidFill>
+                  <a:srgbClr val="1F3864"/>
+                </a:solidFill>
+                <a:latin typeface="微软雅黑" panose="020B0503020204020204" charset="-122"/>
+                <a:ea typeface="微软雅黑" panose="020B0503020204020204" charset="-122"/>
+                <a:cs typeface="微软雅黑" panose="020B0503020204020204" charset="-122"/>
+              </a:rPr>
+              <a:t>改进</a:t>
+            </a:r>
+          </a:p>
+        </p:txBody>
+      </p:sp>
+      <p:sp>
+        <p:nvSpPr>
+          <p:cNvPr id="30" name="TextBox 29"/>
+          <p:cNvSpPr txBox="1"/>
+          <p:nvPr/>
+        </p:nvSpPr>
+        <p:spPr>
+          <a:xfrm>
+            <a:off x="4663440" y="5422392"/>
+            <a:ext cx="6583680" cy="365760"/>
+          </a:xfrm>
+          <a:prstGeom prst="rect">
+            <a:avLst/>
+          </a:prstGeom>
+          <a:noFill/>
+        </p:spPr>
+        <p:txBody>
+          <a:bodyPr wrap="square" lIns="0" rIns="0" anchor="t">
+            <a:spAutoFit/>
+          </a:bodyPr>
+          <a:lstStyle/>
+          <a:p>
+            <a:pPr algn="l"/>
+            <a:r>
+              <a:rPr sz="1300" b="0">
+                <a:solidFill>
+                  <a:srgbClr val="595959"/>
+                </a:solidFill>
+                <a:latin typeface="微软雅黑" panose="020B0503020204020204" charset="-122"/>
+                <a:ea typeface="微软雅黑" panose="020B0503020204020204" charset="-122"/>
+                <a:cs typeface="微软雅黑" panose="020B0503020204020204" charset="-122"/>
+              </a:rPr>
+              <a:t>加权融合 + 长度校准</a:t>
+            </a:r>
+          </a:p>
+        </p:txBody>
+      </p:sp>
+    </p:spTree>
+  </p:cSld>
+  <p:clrMapOvr>
+    <a:masterClrMapping/>
+  </p:clrMapOvr>
+</p:sld>
+</file>
+
+<file path=ppt/slides/slide20.xml><?xml version="1.0" encoding="utf-8"?>
 <p:sld xmlns:a="http://schemas.openxmlformats.org/drawingml/2006/main" xmlns:r="http://schemas.openxmlformats.org/officeDocument/2006/relationships" xmlns:p="http://schemas.openxmlformats.org/presentationml/2006/main">
   <p:cSld>
     <p:spTree>
@@ -13241,7 +14772,7 @@
 </p:sld>
 </file>
 
-<file path=ppt/slides/slide2.xml><?xml version="1.0" encoding="utf-8"?>
+<file path=ppt/slides/slide21.xml><?xml version="1.0" encoding="utf-8"?>
 <p:sld xmlns:a="http://schemas.openxmlformats.org/drawingml/2006/main" xmlns:r="http://schemas.openxmlformats.org/officeDocument/2006/relationships" xmlns:p="http://schemas.openxmlformats.org/presentationml/2006/main">
   <p:cSld>
     <p:spTree>
@@ -13334,21 +14865,21 @@
                 <a:ea typeface="微软雅黑" panose="020B0503020204020204" charset="-122"/>
                 <a:cs typeface="微软雅黑" panose="020B0503020204020204" charset="-122"/>
               </a:rPr>
-              <a:t>汇报路线</a:t>
-            </a:r>
-          </a:p>
-        </p:txBody>
-      </p:sp>
-      <p:sp>
-        <p:nvSpPr>
-          <p:cNvPr id="5" name="TextBox 4"/>
+              <a:t>复现中的异常：MDE 方向反了</a:t>
+            </a:r>
+          </a:p>
+        </p:txBody>
+      </p:sp>
+      <p:sp>
+        <p:nvSpPr>
+          <p:cNvPr id="4" name="TextBox 3"/>
           <p:cNvSpPr txBox="1"/>
           <p:nvPr/>
         </p:nvSpPr>
         <p:spPr>
           <a:xfrm>
-            <a:off x="548640" y="6473952"/>
-            <a:ext cx="5486400" cy="274320"/>
+            <a:off x="548640" y="868680"/>
+            <a:ext cx="10972800" cy="365760"/>
           </a:xfrm>
           <a:prstGeom prst="rect">
             <a:avLst/>
@@ -13363,7 +14894,7 @@
           <a:p>
             <a:pPr algn="l"/>
             <a:r>
-              <a:rPr sz="900" b="0">
+              <a:rPr sz="1300" b="0">
                 <a:solidFill>
                   <a:srgbClr val="7F7F7F"/>
                 </a:solidFill>
@@ -13371,21 +14902,21 @@
                 <a:ea typeface="微软雅黑" panose="020B0503020204020204" charset="-122"/>
                 <a:cs typeface="微软雅黑" panose="020B0503020204020204" charset="-122"/>
               </a:rPr>
-              <a:t>Lastde 复现  ·  AI for Software Engineering</a:t>
-            </a:r>
-          </a:p>
-        </p:txBody>
-      </p:sp>
-      <p:sp>
-        <p:nvSpPr>
-          <p:cNvPr id="6" name="TextBox 5"/>
+              <a:t>论文说人写得更“毛躁”，我们的数据却相反</a:t>
+            </a:r>
+          </a:p>
+        </p:txBody>
+      </p:sp>
+      <p:sp>
+        <p:nvSpPr>
+          <p:cNvPr id="5" name="TextBox 4"/>
           <p:cNvSpPr txBox="1"/>
           <p:nvPr/>
         </p:nvSpPr>
         <p:spPr>
           <a:xfrm>
-            <a:off x="11155680" y="6473952"/>
-            <a:ext cx="548640" cy="274320"/>
+            <a:off x="548640" y="6473952"/>
+            <a:ext cx="5486400" cy="274320"/>
           </a:xfrm>
           <a:prstGeom prst="rect">
             <a:avLst/>
@@ -13398,6 +14929,43 @@
           </a:bodyPr>
           <a:lstStyle/>
           <a:p>
+            <a:pPr algn="l"/>
+            <a:r>
+              <a:rPr sz="900" b="0">
+                <a:solidFill>
+                  <a:srgbClr val="7F7F7F"/>
+                </a:solidFill>
+                <a:latin typeface="微软雅黑" panose="020B0503020204020204" charset="-122"/>
+                <a:ea typeface="微软雅黑" panose="020B0503020204020204" charset="-122"/>
+                <a:cs typeface="微软雅黑" panose="020B0503020204020204" charset="-122"/>
+              </a:rPr>
+              <a:t>Lastde 复现  ·  AI for Software Engineering</a:t>
+            </a:r>
+          </a:p>
+        </p:txBody>
+      </p:sp>
+      <p:sp>
+        <p:nvSpPr>
+          <p:cNvPr id="6" name="TextBox 5"/>
+          <p:cNvSpPr txBox="1"/>
+          <p:nvPr/>
+        </p:nvSpPr>
+        <p:spPr>
+          <a:xfrm>
+            <a:off x="11155680" y="6473952"/>
+            <a:ext cx="548640" cy="274320"/>
+          </a:xfrm>
+          <a:prstGeom prst="rect">
+            <a:avLst/>
+          </a:prstGeom>
+          <a:noFill/>
+        </p:spPr>
+        <p:txBody>
+          <a:bodyPr wrap="square" lIns="0" rIns="0" anchor="t">
+            <a:spAutoFit/>
+          </a:bodyPr>
+          <a:lstStyle/>
+          <a:p>
             <a:pPr algn="r"/>
             <a:r>
               <a:rPr sz="900" b="0">
@@ -13408,7 +14976,7 @@
                 <a:ea typeface="微软雅黑" panose="020B0503020204020204" charset="-122"/>
                 <a:cs typeface="微软雅黑" panose="020B0503020204020204" charset="-122"/>
               </a:rPr>
-              <a:t>2</a:t>
+              <a:t>18</a:t>
             </a:r>
           </a:p>
         </p:txBody>
@@ -13421,8 +14989,8 @@
         </p:nvSpPr>
         <p:spPr>
           <a:xfrm>
-            <a:off x="822960" y="1463040"/>
-            <a:ext cx="822960" cy="640080"/>
+            <a:off x="548640" y="1554480"/>
+            <a:ext cx="3566160" cy="3566160"/>
           </a:xfrm>
           <a:prstGeom prst="roundRect">
             <a:avLst>
@@ -13430,7 +14998,7 @@
             </a:avLst>
           </a:prstGeom>
           <a:solidFill>
-            <a:srgbClr val="DEEBF7"/>
+            <a:srgbClr val="FBE5D6"/>
           </a:solidFill>
           <a:ln>
             <a:noFill/>
@@ -13468,8 +15036,8 @@
         </p:nvSpPr>
         <p:spPr>
           <a:xfrm>
-            <a:off x="822960" y="1572768"/>
-            <a:ext cx="822960" cy="411480"/>
+            <a:off x="777240" y="1664208"/>
+            <a:ext cx="3108960" cy="365760"/>
           </a:xfrm>
           <a:prstGeom prst="rect">
             <a:avLst/>
@@ -13482,17 +15050,17 @@
           </a:bodyPr>
           <a:lstStyle/>
           <a:p>
-            <a:pPr algn="ctr"/>
-            <a:r>
-              <a:rPr sz="1800" b="1">
-                <a:solidFill>
-                  <a:srgbClr val="2E75B6"/>
-                </a:solidFill>
-                <a:latin typeface="微软雅黑" panose="020B0503020204020204" charset="-122"/>
-                <a:ea typeface="微软雅黑" panose="020B0503020204020204" charset="-122"/>
-                <a:cs typeface="微软雅黑" panose="020B0503020204020204" charset="-122"/>
-              </a:rPr>
-              <a:t>01</a:t>
+            <a:pPr algn="l"/>
+            <a:r>
+              <a:rPr sz="1400" b="1">
+                <a:solidFill>
+                  <a:srgbClr val="C55A11"/>
+                </a:solidFill>
+                <a:latin typeface="微软雅黑" panose="020B0503020204020204" charset="-122"/>
+                <a:ea typeface="微软雅黑" panose="020B0503020204020204" charset="-122"/>
+                <a:cs typeface="微软雅黑" panose="020B0503020204020204" charset="-122"/>
+              </a:rPr>
+              <a:t>什么叫“反转”</a:t>
             </a:r>
           </a:p>
         </p:txBody>
@@ -13505,8 +15073,8 @@
         </p:nvSpPr>
         <p:spPr>
           <a:xfrm>
-            <a:off x="1874519" y="1481328"/>
-            <a:ext cx="2926080" cy="365760"/>
+            <a:off x="777240" y="2103120"/>
+            <a:ext cx="3108960" cy="2743200"/>
           </a:xfrm>
           <a:prstGeom prst="rect">
             <a:avLst/>
@@ -13514,51 +15082,29 @@
           <a:noFill/>
         </p:spPr>
         <p:txBody>
-          <a:bodyPr wrap="square" lIns="0" rIns="0" anchor="t">
+          <a:bodyPr wrap="square" lIns="0">
             <a:spAutoFit/>
           </a:bodyPr>
           <a:lstStyle/>
           <a:p>
-            <a:pPr algn="l"/>
-            <a:r>
-              <a:rPr sz="1700" b="1">
-                <a:solidFill>
-                  <a:srgbClr val="1F3864"/>
-                </a:solidFill>
-                <a:latin typeface="微软雅黑" panose="020B0503020204020204" charset="-122"/>
-                <a:ea typeface="微软雅黑" panose="020B0503020204020204" charset="-122"/>
-                <a:cs typeface="微软雅黑" panose="020B0503020204020204" charset="-122"/>
-              </a:rPr>
-              <a:t>问题与洞察</a:t>
-            </a:r>
-          </a:p>
-        </p:txBody>
-      </p:sp>
-      <p:sp>
-        <p:nvSpPr>
-          <p:cNvPr id="10" name="TextBox 9"/>
-          <p:cNvSpPr txBox="1"/>
-          <p:nvPr/>
-        </p:nvSpPr>
-        <p:spPr>
-          <a:xfrm>
-            <a:off x="4663440" y="1536192"/>
-            <a:ext cx="6583680" cy="365760"/>
-          </a:xfrm>
-          <a:prstGeom prst="rect">
-            <a:avLst/>
-          </a:prstGeom>
-          <a:noFill/>
-        </p:spPr>
-        <p:txBody>
-          <a:bodyPr wrap="square" lIns="0" rIns="0" anchor="t">
-            <a:spAutoFit/>
-          </a:bodyPr>
-          <a:lstStyle/>
-          <a:p>
-            <a:pPr algn="l"/>
-            <a:r>
-              <a:rPr sz="1300" b="0">
+            <a:pPr>
+              <a:spcAft>
+                <a:spcPts val="600"/>
+              </a:spcAft>
+            </a:pPr>
+            <a:r>
+              <a:rPr sz="800" b="1">
+                <a:solidFill>
+                  <a:srgbClr val="C55A11"/>
+                </a:solidFill>
+                <a:latin typeface="微软雅黑" panose="020B0503020204020204" charset="-122"/>
+                <a:ea typeface="微软雅黑" panose="020B0503020204020204" charset="-122"/>
+                <a:cs typeface="微软雅黑" panose="020B0503020204020204" charset="-122"/>
+              </a:rPr>
+              <a:t>● </a:t>
+            </a:r>
+            <a:r>
+              <a:rPr sz="1100" b="0">
                 <a:solidFill>
                   <a:srgbClr val="595959"/>
                 </a:solidFill>
@@ -13566,21 +15112,108 @@
                 <a:ea typeface="微软雅黑" panose="020B0503020204020204" charset="-122"/>
                 <a:cs typeface="微软雅黑" panose="020B0503020204020204" charset="-122"/>
               </a:rPr>
-              <a:t>AI 文本为什么能被检测</a:t>
-            </a:r>
-          </a:p>
-        </p:txBody>
-      </p:sp>
-      <p:sp>
-        <p:nvSpPr>
-          <p:cNvPr id="11" name="Rounded Rectangle 10"/>
+              <a:t>论文：人类 MDE &gt; AI</a:t>
+            </a:r>
+          </a:p>
+          <a:p>
+            <a:pPr>
+              <a:spcAft>
+                <a:spcPts val="600"/>
+              </a:spcAft>
+            </a:pPr>
+            <a:r>
+              <a:rPr sz="800" b="1">
+                <a:solidFill>
+                  <a:srgbClr val="C55A11"/>
+                </a:solidFill>
+                <a:latin typeface="微软雅黑" panose="020B0503020204020204" charset="-122"/>
+                <a:ea typeface="微软雅黑" panose="020B0503020204020204" charset="-122"/>
+                <a:cs typeface="微软雅黑" panose="020B0503020204020204" charset="-122"/>
+              </a:rPr>
+              <a:t>● </a:t>
+            </a:r>
+            <a:r>
+              <a:rPr sz="1100" b="0">
+                <a:solidFill>
+                  <a:srgbClr val="595959"/>
+                </a:solidFill>
+                <a:latin typeface="微软雅黑" panose="020B0503020204020204" charset="-122"/>
+                <a:ea typeface="微软雅黑" panose="020B0503020204020204" charset="-122"/>
+                <a:cs typeface="微软雅黑" panose="020B0503020204020204" charset="-122"/>
+              </a:rPr>
+              <a:t>我们：人类 0.0736</a:t>
+            </a:r>
+          </a:p>
+          <a:p>
+            <a:pPr>
+              <a:spcAft>
+                <a:spcPts val="600"/>
+              </a:spcAft>
+            </a:pPr>
+            <a:r>
+              <a:rPr sz="800" b="1">
+                <a:solidFill>
+                  <a:srgbClr val="C55A11"/>
+                </a:solidFill>
+                <a:latin typeface="微软雅黑" panose="020B0503020204020204" charset="-122"/>
+                <a:ea typeface="微软雅黑" panose="020B0503020204020204" charset="-122"/>
+                <a:cs typeface="微软雅黑" panose="020B0503020204020204" charset="-122"/>
+              </a:rPr>
+              <a:t>● </a:t>
+            </a:r>
+            <a:r>
+              <a:rPr sz="1100" b="0">
+                <a:solidFill>
+                  <a:srgbClr val="595959"/>
+                </a:solidFill>
+                <a:latin typeface="微软雅黑" panose="020B0503020204020204" charset="-122"/>
+                <a:ea typeface="微软雅黑" panose="020B0503020204020204" charset="-122"/>
+                <a:cs typeface="微软雅黑" panose="020B0503020204020204" charset="-122"/>
+              </a:rPr>
+              <a:t>　　　AI　 0.0754</a:t>
+            </a:r>
+          </a:p>
+          <a:p>
+            <a:pPr>
+              <a:spcAft>
+                <a:spcPts val="600"/>
+              </a:spcAft>
+            </a:pPr>
+            <a:r>
+              <a:rPr sz="800" b="1">
+                <a:solidFill>
+                  <a:srgbClr val="C55A11"/>
+                </a:solidFill>
+                <a:latin typeface="微软雅黑" panose="020B0503020204020204" charset="-122"/>
+                <a:ea typeface="微软雅黑" panose="020B0503020204020204" charset="-122"/>
+                <a:cs typeface="微软雅黑" panose="020B0503020204020204" charset="-122"/>
+              </a:rPr>
+              <a:t>● </a:t>
+            </a:r>
+            <a:r>
+              <a:rPr sz="1100" b="0">
+                <a:solidFill>
+                  <a:srgbClr val="595959"/>
+                </a:solidFill>
+                <a:latin typeface="微软雅黑" panose="020B0503020204020204" charset="-122"/>
+                <a:ea typeface="微软雅黑" panose="020B0503020204020204" charset="-122"/>
+                <a:cs typeface="微软雅黑" panose="020B0503020204020204" charset="-122"/>
+              </a:rPr>
+              <a:t>差 0.0018，很小</a:t>
+            </a:r>
+          </a:p>
+        </p:txBody>
+      </p:sp>
+      <p:sp>
+        <p:nvSpPr>
+          <p:cNvPr id="10" name="Rounded Rectangle 9"/>
           <p:cNvSpPr/>
           <p:nvPr/>
         </p:nvSpPr>
         <p:spPr>
           <a:xfrm>
-            <a:off x="822960" y="2240280"/>
-            <a:ext cx="822960" cy="640080"/>
+            <a:off x="4251960" y="1554480"/>
+            <a:ext cx="3566160" cy="3566160"/>
           </a:xfrm>
           <a:prstGeom prst="roundRect">
             <a:avLst>
@@ -13620,14 +15253,14 @@
       </p:sp>
       <p:sp>
         <p:nvSpPr>
-          <p:cNvPr id="12" name="TextBox 11"/>
+          <p:cNvPr id="11" name="TextBox 10"/>
           <p:cNvSpPr txBox="1"/>
           <p:nvPr/>
         </p:nvSpPr>
         <p:spPr>
           <a:xfrm>
-            <a:off x="822960" y="2350008"/>
-            <a:ext cx="822960" cy="411480"/>
+            <a:off x="4480560" y="1664208"/>
+            <a:ext cx="3108960" cy="365760"/>
           </a:xfrm>
           <a:prstGeom prst="rect">
             <a:avLst/>
@@ -13640,9 +15273,9 @@
           </a:bodyPr>
           <a:lstStyle/>
           <a:p>
-            <a:pPr algn="ctr"/>
-            <a:r>
-              <a:rPr sz="1800" b="1">
+            <a:pPr algn="l"/>
+            <a:r>
+              <a:rPr sz="1400" b="1">
                 <a:solidFill>
                   <a:srgbClr val="2E75B6"/>
                 </a:solidFill>
@@ -13650,21 +15283,21 @@
                 <a:ea typeface="微软雅黑" panose="020B0503020204020204" charset="-122"/>
                 <a:cs typeface="微软雅黑" panose="020B0503020204020204" charset="-122"/>
               </a:rPr>
-              <a:t>02</a:t>
-            </a:r>
-          </a:p>
-        </p:txBody>
-      </p:sp>
-      <p:sp>
-        <p:nvSpPr>
-          <p:cNvPr id="13" name="TextBox 12"/>
+              <a:t>为什么与论文相悖</a:t>
+            </a:r>
+          </a:p>
+        </p:txBody>
+      </p:sp>
+      <p:sp>
+        <p:nvSpPr>
+          <p:cNvPr id="12" name="TextBox 11"/>
           <p:cNvSpPr txBox="1"/>
           <p:nvPr/>
         </p:nvSpPr>
         <p:spPr>
           <a:xfrm>
-            <a:off x="1874519" y="2258568"/>
-            <a:ext cx="2926080" cy="365760"/>
+            <a:off x="4480560" y="2103120"/>
+            <a:ext cx="3108960" cy="2743200"/>
           </a:xfrm>
           <a:prstGeom prst="rect">
             <a:avLst/>
@@ -13672,51 +15305,29 @@
           <a:noFill/>
         </p:spPr>
         <p:txBody>
-          <a:bodyPr wrap="square" lIns="0" rIns="0" anchor="t">
+          <a:bodyPr wrap="square" lIns="0">
             <a:spAutoFit/>
           </a:bodyPr>
           <a:lstStyle/>
           <a:p>
-            <a:pPr algn="l"/>
-            <a:r>
-              <a:rPr sz="1700" b="1">
-                <a:solidFill>
-                  <a:srgbClr val="1F3864"/>
-                </a:solidFill>
-                <a:latin typeface="微软雅黑" panose="020B0503020204020204" charset="-122"/>
-                <a:ea typeface="微软雅黑" panose="020B0503020204020204" charset="-122"/>
-                <a:cs typeface="微软雅黑" panose="020B0503020204020204" charset="-122"/>
-              </a:rPr>
-              <a:t>原理</a:t>
-            </a:r>
-          </a:p>
-        </p:txBody>
-      </p:sp>
-      <p:sp>
-        <p:nvSpPr>
-          <p:cNvPr id="14" name="TextBox 13"/>
-          <p:cNvSpPr txBox="1"/>
-          <p:nvPr/>
-        </p:nvSpPr>
-        <p:spPr>
-          <a:xfrm>
-            <a:off x="4663440" y="2313432"/>
-            <a:ext cx="6583680" cy="365760"/>
-          </a:xfrm>
-          <a:prstGeom prst="rect">
-            <a:avLst/>
-          </a:prstGeom>
-          <a:noFill/>
-        </p:spPr>
-        <p:txBody>
-          <a:bodyPr wrap="square" lIns="0" rIns="0" anchor="t">
-            <a:spAutoFit/>
-          </a:bodyPr>
-          <a:lstStyle/>
-          <a:p>
-            <a:pPr algn="l"/>
-            <a:r>
-              <a:rPr sz="1300" b="0">
+            <a:pPr>
+              <a:spcAft>
+                <a:spcPts val="600"/>
+              </a:spcAft>
+            </a:pPr>
+            <a:r>
+              <a:rPr sz="800" b="1">
+                <a:solidFill>
+                  <a:srgbClr val="2E75B6"/>
+                </a:solidFill>
+                <a:latin typeface="微软雅黑" panose="020B0503020204020204" charset="-122"/>
+                <a:ea typeface="微软雅黑" panose="020B0503020204020204" charset="-122"/>
+                <a:cs typeface="微软雅黑" panose="020B0503020204020204" charset="-122"/>
+              </a:rPr>
+              <a:t>● </a:t>
+            </a:r>
+            <a:r>
+              <a:rPr sz="1100" b="0">
                 <a:solidFill>
                   <a:srgbClr val="595959"/>
                 </a:solidFill>
@@ -13724,21 +15335,79 @@
                 <a:ea typeface="微软雅黑" panose="020B0503020204020204" charset="-122"/>
                 <a:cs typeface="微软雅黑" panose="020B0503020204020204" charset="-122"/>
               </a:rPr>
-              <a:t>一个 token 的概率是怎么算的</a:t>
-            </a:r>
-          </a:p>
-        </p:txBody>
-      </p:sp>
-      <p:sp>
-        <p:nvSpPr>
-          <p:cNvPr id="15" name="Rounded Rectangle 14"/>
+              <a:t>方向反了，MDE 从“人类信号”变成“AI 信号”</a:t>
+            </a:r>
+          </a:p>
+          <a:p>
+            <a:pPr>
+              <a:spcAft>
+                <a:spcPts val="600"/>
+              </a:spcAft>
+            </a:pPr>
+            <a:r>
+              <a:rPr sz="800" b="1">
+                <a:solidFill>
+                  <a:srgbClr val="2E75B6"/>
+                </a:solidFill>
+                <a:latin typeface="微软雅黑" panose="020B0503020204020204" charset="-122"/>
+                <a:ea typeface="微软雅黑" panose="020B0503020204020204" charset="-122"/>
+                <a:cs typeface="微软雅黑" panose="020B0503020204020204" charset="-122"/>
+              </a:rPr>
+              <a:t>● </a:t>
+            </a:r>
+            <a:r>
+              <a:rPr sz="1100" b="0">
+                <a:solidFill>
+                  <a:srgbClr val="595959"/>
+                </a:solidFill>
+                <a:latin typeface="微软雅黑" panose="020B0503020204020204" charset="-122"/>
+                <a:ea typeface="微软雅黑" panose="020B0503020204020204" charset="-122"/>
+                <a:cs typeface="微软雅黑" panose="020B0503020204020204" charset="-122"/>
+              </a:rPr>
+              <a:t>按论文方向用：AUROC 0.4096</a:t>
+            </a:r>
+          </a:p>
+          <a:p>
+            <a:pPr>
+              <a:spcAft>
+                <a:spcPts val="600"/>
+              </a:spcAft>
+            </a:pPr>
+            <a:r>
+              <a:rPr sz="800" b="1">
+                <a:solidFill>
+                  <a:srgbClr val="2E75B6"/>
+                </a:solidFill>
+                <a:latin typeface="微软雅黑" panose="020B0503020204020204" charset="-122"/>
+                <a:ea typeface="微软雅黑" panose="020B0503020204020204" charset="-122"/>
+                <a:cs typeface="微软雅黑" panose="020B0503020204020204" charset="-122"/>
+              </a:rPr>
+              <a:t>● </a:t>
+            </a:r>
+            <a:r>
+              <a:rPr sz="1100" b="0">
+                <a:solidFill>
+                  <a:srgbClr val="595959"/>
+                </a:solidFill>
+                <a:latin typeface="微软雅黑" panose="020B0503020204020204" charset="-122"/>
+                <a:ea typeface="微软雅黑" panose="020B0503020204020204" charset="-122"/>
+                <a:cs typeface="微软雅黑" panose="020B0503020204020204" charset="-122"/>
+              </a:rPr>
+              <a:t>反着用：0.5904，也不高</a:t>
+            </a:r>
+          </a:p>
+        </p:txBody>
+      </p:sp>
+      <p:sp>
+        <p:nvSpPr>
+          <p:cNvPr id="13" name="Rounded Rectangle 12"/>
           <p:cNvSpPr/>
           <p:nvPr/>
         </p:nvSpPr>
         <p:spPr>
           <a:xfrm>
-            <a:off x="822960" y="3017520"/>
-            <a:ext cx="822960" cy="640080"/>
+            <a:off x="7955279" y="1554480"/>
+            <a:ext cx="3657600" cy="3566160"/>
           </a:xfrm>
           <a:prstGeom prst="roundRect">
             <a:avLst>
@@ -13746,7 +15415,7 @@
             </a:avLst>
           </a:prstGeom>
           <a:solidFill>
-            <a:srgbClr val="DEEBF7"/>
+            <a:srgbClr val="F2F2F2"/>
           </a:solidFill>
           <a:ln>
             <a:noFill/>
@@ -13778,14 +15447,14 @@
       </p:sp>
       <p:sp>
         <p:nvSpPr>
-          <p:cNvPr id="16" name="TextBox 15"/>
+          <p:cNvPr id="14" name="TextBox 13"/>
           <p:cNvSpPr txBox="1"/>
           <p:nvPr/>
         </p:nvSpPr>
         <p:spPr>
           <a:xfrm>
-            <a:off x="822960" y="3127248"/>
-            <a:ext cx="822960" cy="411480"/>
+            <a:off x="8183879" y="1664208"/>
+            <a:ext cx="3200400" cy="365760"/>
           </a:xfrm>
           <a:prstGeom prst="rect">
             <a:avLst/>
@@ -13798,31 +15467,31 @@
           </a:bodyPr>
           <a:lstStyle/>
           <a:p>
-            <a:pPr algn="ctr"/>
-            <a:r>
-              <a:rPr sz="1800" b="1">
-                <a:solidFill>
-                  <a:srgbClr val="2E75B6"/>
-                </a:solidFill>
-                <a:latin typeface="微软雅黑" panose="020B0503020204020204" charset="-122"/>
-                <a:ea typeface="微软雅黑" panose="020B0503020204020204" charset="-122"/>
-                <a:cs typeface="微软雅黑" panose="020B0503020204020204" charset="-122"/>
-              </a:rPr>
-              <a:t>03</a:t>
-            </a:r>
-          </a:p>
-        </p:txBody>
-      </p:sp>
-      <p:sp>
-        <p:nvSpPr>
-          <p:cNvPr id="17" name="TextBox 16"/>
+            <a:pPr algn="l"/>
+            <a:r>
+              <a:rPr sz="1400" b="1">
+                <a:solidFill>
+                  <a:srgbClr val="1F3864"/>
+                </a:solidFill>
+                <a:latin typeface="微软雅黑" panose="020B0503020204020204" charset="-122"/>
+                <a:ea typeface="微软雅黑" panose="020B0503020204020204" charset="-122"/>
+                <a:cs typeface="微软雅黑" panose="020B0503020204020204" charset="-122"/>
+              </a:rPr>
+              <a:t>排查过程（五步）</a:t>
+            </a:r>
+          </a:p>
+        </p:txBody>
+      </p:sp>
+      <p:sp>
+        <p:nvSpPr>
+          <p:cNvPr id="15" name="TextBox 14"/>
           <p:cNvSpPr txBox="1"/>
           <p:nvPr/>
         </p:nvSpPr>
         <p:spPr>
           <a:xfrm>
-            <a:off x="1874519" y="3035808"/>
-            <a:ext cx="2926080" cy="365760"/>
+            <a:off x="8183879" y="2103120"/>
+            <a:ext cx="3200400" cy="2743200"/>
           </a:xfrm>
           <a:prstGeom prst="rect">
             <a:avLst/>
@@ -13837,44 +15506,32 @@
           <a:p>
             <a:pPr algn="l"/>
             <a:r>
-              <a:rPr sz="1700" b="1">
-                <a:solidFill>
-                  <a:srgbClr val="1F3864"/>
-                </a:solidFill>
-                <a:latin typeface="微软雅黑" panose="020B0503020204020204" charset="-122"/>
-                <a:ea typeface="微软雅黑" panose="020B0503020204020204" charset="-122"/>
-                <a:cs typeface="微软雅黑" panose="020B0503020204020204" charset="-122"/>
-              </a:rPr>
-              <a:t>方法</a:t>
-            </a:r>
-          </a:p>
-        </p:txBody>
-      </p:sp>
-      <p:sp>
-        <p:nvSpPr>
-          <p:cNvPr id="18" name="TextBox 17"/>
-          <p:cNvSpPr txBox="1"/>
-          <p:nvPr/>
-        </p:nvSpPr>
-        <p:spPr>
-          <a:xfrm>
-            <a:off x="4663440" y="3090672"/>
-            <a:ext cx="6583680" cy="365760"/>
-          </a:xfrm>
-          <a:prstGeom prst="rect">
-            <a:avLst/>
-          </a:prstGeom>
-          <a:noFill/>
-        </p:spPr>
-        <p:txBody>
-          <a:bodyPr wrap="square" lIns="0" rIns="0" anchor="t">
-            <a:spAutoFit/>
-          </a:bodyPr>
-          <a:lstStyle/>
+              <a:rPr sz="1000" b="0">
+                <a:solidFill>
+                  <a:srgbClr val="595959"/>
+                </a:solidFill>
+                <a:latin typeface="微软雅黑" panose="020B0503020204020204" charset="-122"/>
+                <a:ea typeface="微软雅黑" panose="020B0503020204020204" charset="-122"/>
+                <a:cs typeface="微软雅黑" panose="020B0503020204020204" charset="-122"/>
+              </a:rPr>
+              <a:t>① 差 0.0018，先问是否噪声</a:t>
+            </a:r>
+          </a:p>
           <a:p>
             <a:pPr algn="l"/>
-            <a:r>
-              <a:rPr sz="1300" b="0">
+            <a:endParaRPr sz="1000" b="0">
+              <a:solidFill>
+                <a:srgbClr val="595959"/>
+              </a:solidFill>
+              <a:latin typeface="微软雅黑" panose="020B0503020204020204" charset="-122"/>
+              <a:ea typeface="微软雅黑" panose="020B0503020204020204" charset="-122"/>
+              <a:cs typeface="微软雅黑" panose="020B0503020204020204" charset="-122"/>
+            </a:endParaRPr>
+          </a:p>
+          <a:p>
+            <a:pPr algn="l"/>
+            <a:r>
+              <a:rPr sz="1000" b="0">
                 <a:solidFill>
                   <a:srgbClr val="595959"/>
                 </a:solidFill>
@@ -13882,21 +15539,96 @@
                 <a:ea typeface="微软雅黑" panose="020B0503020204020204" charset="-122"/>
                 <a:cs typeface="微软雅黑" panose="020B0503020204020204" charset="-122"/>
               </a:rPr>
-              <a:t>五步流水线 + 一个公式</a:t>
-            </a:r>
-          </a:p>
-        </p:txBody>
-      </p:sp>
-      <p:sp>
-        <p:nvSpPr>
-          <p:cNvPr id="19" name="Rounded Rectangle 18"/>
+              <a:t>② bootstrap：区间不含 0，显著但小</a:t>
+            </a:r>
+          </a:p>
+          <a:p>
+            <a:pPr algn="l"/>
+            <a:endParaRPr sz="1000" b="0">
+              <a:solidFill>
+                <a:srgbClr val="595959"/>
+              </a:solidFill>
+              <a:latin typeface="微软雅黑" panose="020B0503020204020204" charset="-122"/>
+              <a:ea typeface="微软雅黑" panose="020B0503020204020204" charset="-122"/>
+              <a:cs typeface="微软雅黑" panose="020B0503020204020204" charset="-122"/>
+            </a:endParaRPr>
+          </a:p>
+          <a:p>
+            <a:pPr algn="l"/>
+            <a:r>
+              <a:rPr sz="1000" b="0">
+                <a:solidFill>
+                  <a:srgbClr val="595959"/>
+                </a:solidFill>
+                <a:latin typeface="微软雅黑" panose="020B0503020204020204" charset="-122"/>
+                <a:ea typeface="微软雅黑" panose="020B0503020204020204" charset="-122"/>
+                <a:cs typeface="微软雅黑" panose="020B0503020204020204" charset="-122"/>
+              </a:rPr>
+              <a:t>③ 换三个代理都反 → 不是容量</a:t>
+            </a:r>
+          </a:p>
+          <a:p>
+            <a:pPr algn="l"/>
+            <a:endParaRPr sz="1000" b="0">
+              <a:solidFill>
+                <a:srgbClr val="595959"/>
+              </a:solidFill>
+              <a:latin typeface="微软雅黑" panose="020B0503020204020204" charset="-122"/>
+              <a:ea typeface="微软雅黑" panose="020B0503020204020204" charset="-122"/>
+              <a:cs typeface="微软雅黑" panose="020B0503020204020204" charset="-122"/>
+            </a:endParaRPr>
+          </a:p>
+          <a:p>
+            <a:pPr algn="l"/>
+            <a:r>
+              <a:rPr sz="1000" b="0">
+                <a:solidFill>
+                  <a:srgbClr val="595959"/>
+                </a:solidFill>
+                <a:latin typeface="微软雅黑" panose="020B0503020204020204" charset="-122"/>
+                <a:ea typeface="微软雅黑" panose="020B0503020204020204" charset="-122"/>
+                <a:cs typeface="微软雅黑" panose="020B0503020204020204" charset="-122"/>
+              </a:rPr>
+              <a:t>④ 同长度截断 → 不是长度</a:t>
+            </a:r>
+          </a:p>
+          <a:p>
+            <a:pPr algn="l"/>
+            <a:endParaRPr sz="1000" b="0">
+              <a:solidFill>
+                <a:srgbClr val="595959"/>
+              </a:solidFill>
+              <a:latin typeface="微软雅黑" panose="020B0503020204020204" charset="-122"/>
+              <a:ea typeface="微软雅黑" panose="020B0503020204020204" charset="-122"/>
+              <a:cs typeface="微软雅黑" panose="020B0503020204020204" charset="-122"/>
+            </a:endParaRPr>
+          </a:p>
+          <a:p>
+            <a:pPr algn="l"/>
+            <a:r>
+              <a:rPr sz="1000" b="0">
+                <a:solidFill>
+                  <a:srgbClr val="595959"/>
+                </a:solidFill>
+                <a:latin typeface="微软雅黑" panose="020B0503020204020204" charset="-122"/>
+                <a:ea typeface="微软雅黑" panose="020B0503020204020204" charset="-122"/>
+                <a:cs typeface="微软雅黑" panose="020B0503020204020204" charset="-122"/>
+              </a:rPr>
+              <a:t>⑤ 推测：源/代理同家族</a:t>
+            </a:r>
+          </a:p>
+        </p:txBody>
+      </p:sp>
+      <p:sp>
+        <p:nvSpPr>
+          <p:cNvPr id="16" name="Rounded Rectangle 15"/>
           <p:cNvSpPr/>
           <p:nvPr/>
         </p:nvSpPr>
         <p:spPr>
           <a:xfrm>
-            <a:off x="822960" y="3794760"/>
-            <a:ext cx="822960" cy="640080"/>
+            <a:off x="548640" y="5349240"/>
+            <a:ext cx="11064240" cy="777240"/>
           </a:xfrm>
           <a:prstGeom prst="roundRect">
             <a:avLst>
@@ -13904,7 +15636,7 @@
             </a:avLst>
           </a:prstGeom>
           <a:solidFill>
-            <a:srgbClr val="DEEBF7"/>
+            <a:srgbClr val="1F3864"/>
           </a:solidFill>
           <a:ln>
             <a:noFill/>
@@ -13936,14 +15668,14 @@
       </p:sp>
       <p:sp>
         <p:nvSpPr>
-          <p:cNvPr id="20" name="TextBox 19"/>
+          <p:cNvPr id="17" name="TextBox 16"/>
           <p:cNvSpPr txBox="1"/>
           <p:nvPr/>
         </p:nvSpPr>
         <p:spPr>
           <a:xfrm>
-            <a:off x="822960" y="3904488"/>
-            <a:ext cx="822960" cy="411480"/>
+            <a:off x="777240" y="5458968"/>
+            <a:ext cx="10607040" cy="548640"/>
           </a:xfrm>
           <a:prstGeom prst="rect">
             <a:avLst/>
@@ -13958,405 +15690,15 @@
           <a:p>
             <a:pPr algn="ctr"/>
             <a:r>
-              <a:rPr sz="1800" b="1">
-                <a:solidFill>
-                  <a:srgbClr val="2E75B6"/>
-                </a:solidFill>
-                <a:latin typeface="微软雅黑" panose="020B0503020204020204" charset="-122"/>
-                <a:ea typeface="微软雅黑" panose="020B0503020204020204" charset="-122"/>
-                <a:cs typeface="微软雅黑" panose="020B0503020204020204" charset="-122"/>
-              </a:rPr>
-              <a:t>04</a:t>
-            </a:r>
-          </a:p>
-        </p:txBody>
-      </p:sp>
-      <p:sp>
-        <p:nvSpPr>
-          <p:cNvPr id="21" name="TextBox 20"/>
-          <p:cNvSpPr txBox="1"/>
-          <p:nvPr/>
-        </p:nvSpPr>
-        <p:spPr>
-          <a:xfrm>
-            <a:off x="1874519" y="3813048"/>
-            <a:ext cx="2926080" cy="365760"/>
-          </a:xfrm>
-          <a:prstGeom prst="rect">
-            <a:avLst/>
-          </a:prstGeom>
-          <a:noFill/>
-        </p:spPr>
-        <p:txBody>
-          <a:bodyPr wrap="square" lIns="0" rIns="0" anchor="t">
-            <a:spAutoFit/>
-          </a:bodyPr>
-          <a:lstStyle/>
-          <a:p>
-            <a:pPr algn="l"/>
-            <a:r>
-              <a:rPr sz="1700" b="1">
-                <a:solidFill>
-                  <a:srgbClr val="1F3864"/>
-                </a:solidFill>
-                <a:latin typeface="微软雅黑" panose="020B0503020204020204" charset="-122"/>
-                <a:ea typeface="微软雅黑" panose="020B0503020204020204" charset="-122"/>
-                <a:cs typeface="微软雅黑" panose="020B0503020204020204" charset="-122"/>
-              </a:rPr>
-              <a:t>我们的复现</a:t>
-            </a:r>
-          </a:p>
-        </p:txBody>
-      </p:sp>
-      <p:sp>
-        <p:nvSpPr>
-          <p:cNvPr id="22" name="TextBox 21"/>
-          <p:cNvSpPr txBox="1"/>
-          <p:nvPr/>
-        </p:nvSpPr>
-        <p:spPr>
-          <a:xfrm>
-            <a:off x="4663440" y="3867912"/>
-            <a:ext cx="6583680" cy="365760"/>
-          </a:xfrm>
-          <a:prstGeom prst="rect">
-            <a:avLst/>
-          </a:prstGeom>
-          <a:noFill/>
-        </p:spPr>
-        <p:txBody>
-          <a:bodyPr wrap="square" lIns="0" rIns="0" anchor="t">
-            <a:spAutoFit/>
-          </a:bodyPr>
-          <a:lstStyle/>
-          <a:p>
-            <a:pPr algn="l"/>
-            <a:r>
-              <a:rPr sz="1300" b="0">
-                <a:solidFill>
-                  <a:srgbClr val="595959"/>
-                </a:solidFill>
-                <a:latin typeface="微软雅黑" panose="020B0503020204020204" charset="-122"/>
-                <a:ea typeface="微软雅黑" panose="020B0503020204020204" charset="-122"/>
-                <a:cs typeface="微软雅黑" panose="020B0503020204020204" charset="-122"/>
-              </a:rPr>
-              <a:t>主结果、消融、鲁棒性</a:t>
-            </a:r>
-          </a:p>
-        </p:txBody>
-      </p:sp>
-      <p:sp>
-        <p:nvSpPr>
-          <p:cNvPr id="23" name="Rounded Rectangle 22"/>
-          <p:cNvSpPr/>
-          <p:nvPr/>
-        </p:nvSpPr>
-        <p:spPr>
-          <a:xfrm>
-            <a:off x="822960" y="4572000"/>
-            <a:ext cx="822960" cy="640080"/>
-          </a:xfrm>
-          <a:prstGeom prst="roundRect">
-            <a:avLst>
-              <a:gd name="adj" fmla="val 8000"/>
-            </a:avLst>
-          </a:prstGeom>
-          <a:solidFill>
-            <a:srgbClr val="DEEBF7"/>
-          </a:solidFill>
-          <a:ln>
-            <a:noFill/>
-          </a:ln>
-          <a:effectLst/>
-        </p:spPr>
-        <p:style>
-          <a:lnRef idx="1">
-            <a:schemeClr val="accent1"/>
-          </a:lnRef>
-          <a:fillRef idx="3">
-            <a:schemeClr val="accent1"/>
-          </a:fillRef>
-          <a:effectRef idx="2">
-            <a:schemeClr val="accent1"/>
-          </a:effectRef>
-          <a:fontRef idx="minor">
-            <a:schemeClr val="lt1"/>
-          </a:fontRef>
-        </p:style>
-        <p:txBody>
-          <a:bodyPr rtlCol="0" anchor="ctr"/>
-          <a:lstStyle/>
-          <a:p>
-            <a:pPr algn="ctr"/>
-            <a:endParaRPr/>
-          </a:p>
-        </p:txBody>
-      </p:sp>
-      <p:sp>
-        <p:nvSpPr>
-          <p:cNvPr id="24" name="TextBox 23"/>
-          <p:cNvSpPr txBox="1"/>
-          <p:nvPr/>
-        </p:nvSpPr>
-        <p:spPr>
-          <a:xfrm>
-            <a:off x="822960" y="4681728"/>
-            <a:ext cx="822960" cy="411480"/>
-          </a:xfrm>
-          <a:prstGeom prst="rect">
-            <a:avLst/>
-          </a:prstGeom>
-          <a:noFill/>
-        </p:spPr>
-        <p:txBody>
-          <a:bodyPr wrap="square" lIns="0" rIns="0" anchor="t">
-            <a:spAutoFit/>
-          </a:bodyPr>
-          <a:lstStyle/>
-          <a:p>
-            <a:pPr algn="ctr"/>
-            <a:r>
-              <a:rPr sz="1800" b="1">
-                <a:solidFill>
-                  <a:srgbClr val="2E75B6"/>
-                </a:solidFill>
-                <a:latin typeface="微软雅黑" panose="020B0503020204020204" charset="-122"/>
-                <a:ea typeface="微软雅黑" panose="020B0503020204020204" charset="-122"/>
-                <a:cs typeface="微软雅黑" panose="020B0503020204020204" charset="-122"/>
-              </a:rPr>
-              <a:t>05</a:t>
-            </a:r>
-          </a:p>
-        </p:txBody>
-      </p:sp>
-      <p:sp>
-        <p:nvSpPr>
-          <p:cNvPr id="25" name="TextBox 24"/>
-          <p:cNvSpPr txBox="1"/>
-          <p:nvPr/>
-        </p:nvSpPr>
-        <p:spPr>
-          <a:xfrm>
-            <a:off x="1874519" y="4590288"/>
-            <a:ext cx="2926080" cy="365760"/>
-          </a:xfrm>
-          <a:prstGeom prst="rect">
-            <a:avLst/>
-          </a:prstGeom>
-          <a:noFill/>
-        </p:spPr>
-        <p:txBody>
-          <a:bodyPr wrap="square" lIns="0" rIns="0" anchor="t">
-            <a:spAutoFit/>
-          </a:bodyPr>
-          <a:lstStyle/>
-          <a:p>
-            <a:pPr algn="l"/>
-            <a:r>
-              <a:rPr sz="1700" b="1">
-                <a:solidFill>
-                  <a:srgbClr val="1F3864"/>
-                </a:solidFill>
-                <a:latin typeface="微软雅黑" panose="020B0503020204020204" charset="-122"/>
-                <a:ea typeface="微软雅黑" panose="020B0503020204020204" charset="-122"/>
-                <a:cs typeface="微软雅黑" panose="020B0503020204020204" charset="-122"/>
-              </a:rPr>
-              <a:t>发现</a:t>
-            </a:r>
-          </a:p>
-        </p:txBody>
-      </p:sp>
-      <p:sp>
-        <p:nvSpPr>
-          <p:cNvPr id="26" name="TextBox 25"/>
-          <p:cNvSpPr txBox="1"/>
-          <p:nvPr/>
-        </p:nvSpPr>
-        <p:spPr>
-          <a:xfrm>
-            <a:off x="4663440" y="4645152"/>
-            <a:ext cx="6583680" cy="365760"/>
-          </a:xfrm>
-          <a:prstGeom prst="rect">
-            <a:avLst/>
-          </a:prstGeom>
-          <a:noFill/>
-        </p:spPr>
-        <p:txBody>
-          <a:bodyPr wrap="square" lIns="0" rIns="0" anchor="t">
-            <a:spAutoFit/>
-          </a:bodyPr>
-          <a:lstStyle/>
-          <a:p>
-            <a:pPr algn="l"/>
-            <a:r>
-              <a:rPr sz="1300" b="0">
-                <a:solidFill>
-                  <a:srgbClr val="595959"/>
-                </a:solidFill>
-                <a:latin typeface="微软雅黑" panose="020B0503020204020204" charset="-122"/>
-                <a:ea typeface="微软雅黑" panose="020B0503020204020204" charset="-122"/>
-                <a:cs typeface="微软雅黑" panose="020B0503020204020204" charset="-122"/>
-              </a:rPr>
-              <a:t>MDE 方向反转</a:t>
-            </a:r>
-          </a:p>
-        </p:txBody>
-      </p:sp>
-      <p:sp>
-        <p:nvSpPr>
-          <p:cNvPr id="27" name="Rounded Rectangle 26"/>
-          <p:cNvSpPr/>
-          <p:nvPr/>
-        </p:nvSpPr>
-        <p:spPr>
-          <a:xfrm>
-            <a:off x="822960" y="5349240"/>
-            <a:ext cx="822960" cy="640080"/>
-          </a:xfrm>
-          <a:prstGeom prst="roundRect">
-            <a:avLst>
-              <a:gd name="adj" fmla="val 8000"/>
-            </a:avLst>
-          </a:prstGeom>
-          <a:solidFill>
-            <a:srgbClr val="DEEBF7"/>
-          </a:solidFill>
-          <a:ln>
-            <a:noFill/>
-          </a:ln>
-          <a:effectLst/>
-        </p:spPr>
-        <p:style>
-          <a:lnRef idx="1">
-            <a:schemeClr val="accent1"/>
-          </a:lnRef>
-          <a:fillRef idx="3">
-            <a:schemeClr val="accent1"/>
-          </a:fillRef>
-          <a:effectRef idx="2">
-            <a:schemeClr val="accent1"/>
-          </a:effectRef>
-          <a:fontRef idx="minor">
-            <a:schemeClr val="lt1"/>
-          </a:fontRef>
-        </p:style>
-        <p:txBody>
-          <a:bodyPr rtlCol="0" anchor="ctr"/>
-          <a:lstStyle/>
-          <a:p>
-            <a:pPr algn="ctr"/>
-            <a:endParaRPr/>
-          </a:p>
-        </p:txBody>
-      </p:sp>
-      <p:sp>
-        <p:nvSpPr>
-          <p:cNvPr id="28" name="TextBox 27"/>
-          <p:cNvSpPr txBox="1"/>
-          <p:nvPr/>
-        </p:nvSpPr>
-        <p:spPr>
-          <a:xfrm>
-            <a:off x="822960" y="5458968"/>
-            <a:ext cx="822960" cy="411480"/>
-          </a:xfrm>
-          <a:prstGeom prst="rect">
-            <a:avLst/>
-          </a:prstGeom>
-          <a:noFill/>
-        </p:spPr>
-        <p:txBody>
-          <a:bodyPr wrap="square" lIns="0" rIns="0" anchor="t">
-            <a:spAutoFit/>
-          </a:bodyPr>
-          <a:lstStyle/>
-          <a:p>
-            <a:pPr algn="ctr"/>
-            <a:r>
-              <a:rPr sz="1800" b="1">
-                <a:solidFill>
-                  <a:srgbClr val="2E75B6"/>
-                </a:solidFill>
-                <a:latin typeface="微软雅黑" panose="020B0503020204020204" charset="-122"/>
-                <a:ea typeface="微软雅黑" panose="020B0503020204020204" charset="-122"/>
-                <a:cs typeface="微软雅黑" panose="020B0503020204020204" charset="-122"/>
-              </a:rPr>
-              <a:t>06</a:t>
-            </a:r>
-          </a:p>
-        </p:txBody>
-      </p:sp>
-      <p:sp>
-        <p:nvSpPr>
-          <p:cNvPr id="29" name="TextBox 28"/>
-          <p:cNvSpPr txBox="1"/>
-          <p:nvPr/>
-        </p:nvSpPr>
-        <p:spPr>
-          <a:xfrm>
-            <a:off x="1874519" y="5367527"/>
-            <a:ext cx="2926080" cy="365760"/>
-          </a:xfrm>
-          <a:prstGeom prst="rect">
-            <a:avLst/>
-          </a:prstGeom>
-          <a:noFill/>
-        </p:spPr>
-        <p:txBody>
-          <a:bodyPr wrap="square" lIns="0" rIns="0" anchor="t">
-            <a:spAutoFit/>
-          </a:bodyPr>
-          <a:lstStyle/>
-          <a:p>
-            <a:pPr algn="l"/>
-            <a:r>
-              <a:rPr sz="1700" b="1">
-                <a:solidFill>
-                  <a:srgbClr val="1F3864"/>
-                </a:solidFill>
-                <a:latin typeface="微软雅黑" panose="020B0503020204020204" charset="-122"/>
-                <a:ea typeface="微软雅黑" panose="020B0503020204020204" charset="-122"/>
-                <a:cs typeface="微软雅黑" panose="020B0503020204020204" charset="-122"/>
-              </a:rPr>
-              <a:t>改进</a:t>
-            </a:r>
-          </a:p>
-        </p:txBody>
-      </p:sp>
-      <p:sp>
-        <p:nvSpPr>
-          <p:cNvPr id="30" name="TextBox 29"/>
-          <p:cNvSpPr txBox="1"/>
-          <p:nvPr/>
-        </p:nvSpPr>
-        <p:spPr>
-          <a:xfrm>
-            <a:off x="4663440" y="5422392"/>
-            <a:ext cx="6583680" cy="365760"/>
-          </a:xfrm>
-          <a:prstGeom prst="rect">
-            <a:avLst/>
-          </a:prstGeom>
-          <a:noFill/>
-        </p:spPr>
-        <p:txBody>
-          <a:bodyPr wrap="square" lIns="0" rIns="0" anchor="t">
-            <a:spAutoFit/>
-          </a:bodyPr>
-          <a:lstStyle/>
-          <a:p>
-            <a:pPr algn="l"/>
-            <a:r>
-              <a:rPr sz="1300" b="0">
-                <a:solidFill>
-                  <a:srgbClr val="595959"/>
-                </a:solidFill>
-                <a:latin typeface="微软雅黑" panose="020B0503020204020204" charset="-122"/>
-                <a:ea typeface="微软雅黑" panose="020B0503020204020204" charset="-122"/>
-                <a:cs typeface="微软雅黑" panose="020B0503020204020204" charset="-122"/>
-              </a:rPr>
-              <a:t>加权融合 + 长度校准</a:t>
+              <a:rPr sz="1300" b="1">
+                <a:solidFill>
+                  <a:srgbClr val="FFFFFF"/>
+                </a:solidFill>
+                <a:latin typeface="微软雅黑" panose="020B0503020204020204" charset="-122"/>
+                <a:ea typeface="微软雅黑" panose="020B0503020204020204" charset="-122"/>
+                <a:cs typeface="微软雅黑" panose="020B0503020204020204" charset="-122"/>
+              </a:rPr>
+              <a:t>方向不确定，所以改进不假设方向，改用加权融合。</a:t>
             </a:r>
           </a:p>
         </p:txBody>
@@ -14369,946 +15711,7 @@
 </p:sld>
 </file>
 
-<file path=ppt/slides/slide20.xml><?xml version="1.0" encoding="utf-8"?>
-<p:sld xmlns:a="http://schemas.openxmlformats.org/drawingml/2006/main" xmlns:r="http://schemas.openxmlformats.org/officeDocument/2006/relationships" xmlns:p="http://schemas.openxmlformats.org/presentationml/2006/main">
-  <p:cSld>
-    <p:spTree>
-      <p:nvGrpSpPr>
-        <p:cNvPr id="1" name=""/>
-        <p:cNvGrpSpPr/>
-        <p:nvPr/>
-      </p:nvGrpSpPr>
-      <p:grpSpPr>
-        <a:xfrm>
-          <a:off x="0" y="0"/>
-          <a:ext cx="0" cy="0"/>
-          <a:chOff x="0" y="0"/>
-          <a:chExt cx="0" cy="0"/>
-        </a:xfrm>
-      </p:grpSpPr>
-      <p:sp>
-        <p:nvSpPr>
-          <p:cNvPr id="2" name="Rectangle 1"/>
-          <p:cNvSpPr/>
-          <p:nvPr/>
-        </p:nvSpPr>
-        <p:spPr>
-          <a:xfrm>
-            <a:off x="0" y="0"/>
-            <a:ext cx="12191695" cy="82296"/>
-          </a:xfrm>
-          <a:prstGeom prst="rect">
-            <a:avLst/>
-          </a:prstGeom>
-          <a:solidFill>
-            <a:srgbClr val="1F3864"/>
-          </a:solidFill>
-          <a:ln>
-            <a:noFill/>
-          </a:ln>
-        </p:spPr>
-        <p:style>
-          <a:lnRef idx="1">
-            <a:schemeClr val="accent1"/>
-          </a:lnRef>
-          <a:fillRef idx="3">
-            <a:schemeClr val="accent1"/>
-          </a:fillRef>
-          <a:effectRef idx="2">
-            <a:schemeClr val="accent1"/>
-          </a:effectRef>
-          <a:fontRef idx="minor">
-            <a:schemeClr val="lt1"/>
-          </a:fontRef>
-        </p:style>
-        <p:txBody>
-          <a:bodyPr rtlCol="0" anchor="ctr"/>
-          <a:lstStyle/>
-          <a:p>
-            <a:pPr algn="ctr"/>
-            <a:endParaRPr/>
-          </a:p>
-        </p:txBody>
-      </p:sp>
-      <p:sp>
-        <p:nvSpPr>
-          <p:cNvPr id="3" name="TextBox 2"/>
-          <p:cNvSpPr txBox="1"/>
-          <p:nvPr/>
-        </p:nvSpPr>
-        <p:spPr>
-          <a:xfrm>
-            <a:off x="548640" y="292608"/>
-            <a:ext cx="10972800" cy="548640"/>
-          </a:xfrm>
-          <a:prstGeom prst="rect">
-            <a:avLst/>
-          </a:prstGeom>
-          <a:noFill/>
-        </p:spPr>
-        <p:txBody>
-          <a:bodyPr wrap="square" lIns="0" rIns="0" anchor="t">
-            <a:spAutoFit/>
-          </a:bodyPr>
-          <a:lstStyle/>
-          <a:p>
-            <a:pPr algn="l"/>
-            <a:r>
-              <a:rPr sz="2600" b="1">
-                <a:solidFill>
-                  <a:srgbClr val="1F3864"/>
-                </a:solidFill>
-                <a:latin typeface="微软雅黑" panose="020B0503020204020204" charset="-122"/>
-                <a:ea typeface="微软雅黑" panose="020B0503020204020204" charset="-122"/>
-                <a:cs typeface="微软雅黑" panose="020B0503020204020204" charset="-122"/>
-              </a:rPr>
-              <a:t>复现中的异常：MDE 方向反了</a:t>
-            </a:r>
-          </a:p>
-        </p:txBody>
-      </p:sp>
-      <p:sp>
-        <p:nvSpPr>
-          <p:cNvPr id="4" name="TextBox 3"/>
-          <p:cNvSpPr txBox="1"/>
-          <p:nvPr/>
-        </p:nvSpPr>
-        <p:spPr>
-          <a:xfrm>
-            <a:off x="548640" y="868680"/>
-            <a:ext cx="10972800" cy="365760"/>
-          </a:xfrm>
-          <a:prstGeom prst="rect">
-            <a:avLst/>
-          </a:prstGeom>
-          <a:noFill/>
-        </p:spPr>
-        <p:txBody>
-          <a:bodyPr wrap="square" lIns="0" rIns="0" anchor="t">
-            <a:spAutoFit/>
-          </a:bodyPr>
-          <a:lstStyle/>
-          <a:p>
-            <a:pPr algn="l"/>
-            <a:r>
-              <a:rPr sz="1300" b="0">
-                <a:solidFill>
-                  <a:srgbClr val="7F7F7F"/>
-                </a:solidFill>
-                <a:latin typeface="微软雅黑" panose="020B0503020204020204" charset="-122"/>
-                <a:ea typeface="微软雅黑" panose="020B0503020204020204" charset="-122"/>
-                <a:cs typeface="微软雅黑" panose="020B0503020204020204" charset="-122"/>
-              </a:rPr>
-              <a:t>论文说人写得更“毛躁”，我们的数据却相反</a:t>
-            </a:r>
-          </a:p>
-        </p:txBody>
-      </p:sp>
-      <p:sp>
-        <p:nvSpPr>
-          <p:cNvPr id="5" name="TextBox 4"/>
-          <p:cNvSpPr txBox="1"/>
-          <p:nvPr/>
-        </p:nvSpPr>
-        <p:spPr>
-          <a:xfrm>
-            <a:off x="548640" y="6473952"/>
-            <a:ext cx="5486400" cy="274320"/>
-          </a:xfrm>
-          <a:prstGeom prst="rect">
-            <a:avLst/>
-          </a:prstGeom>
-          <a:noFill/>
-        </p:spPr>
-        <p:txBody>
-          <a:bodyPr wrap="square" lIns="0" rIns="0" anchor="t">
-            <a:spAutoFit/>
-          </a:bodyPr>
-          <a:lstStyle/>
-          <a:p>
-            <a:pPr algn="l"/>
-            <a:r>
-              <a:rPr sz="900" b="0">
-                <a:solidFill>
-                  <a:srgbClr val="7F7F7F"/>
-                </a:solidFill>
-                <a:latin typeface="微软雅黑" panose="020B0503020204020204" charset="-122"/>
-                <a:ea typeface="微软雅黑" panose="020B0503020204020204" charset="-122"/>
-                <a:cs typeface="微软雅黑" panose="020B0503020204020204" charset="-122"/>
-              </a:rPr>
-              <a:t>Lastde 复现  ·  AI for Software Engineering</a:t>
-            </a:r>
-          </a:p>
-        </p:txBody>
-      </p:sp>
-      <p:sp>
-        <p:nvSpPr>
-          <p:cNvPr id="6" name="TextBox 5"/>
-          <p:cNvSpPr txBox="1"/>
-          <p:nvPr/>
-        </p:nvSpPr>
-        <p:spPr>
-          <a:xfrm>
-            <a:off x="11155680" y="6473952"/>
-            <a:ext cx="548640" cy="274320"/>
-          </a:xfrm>
-          <a:prstGeom prst="rect">
-            <a:avLst/>
-          </a:prstGeom>
-          <a:noFill/>
-        </p:spPr>
-        <p:txBody>
-          <a:bodyPr wrap="square" lIns="0" rIns="0" anchor="t">
-            <a:spAutoFit/>
-          </a:bodyPr>
-          <a:lstStyle/>
-          <a:p>
-            <a:pPr algn="r"/>
-            <a:r>
-              <a:rPr sz="900" b="0">
-                <a:solidFill>
-                  <a:srgbClr val="7F7F7F"/>
-                </a:solidFill>
-                <a:latin typeface="微软雅黑" panose="020B0503020204020204" charset="-122"/>
-                <a:ea typeface="微软雅黑" panose="020B0503020204020204" charset="-122"/>
-                <a:cs typeface="微软雅黑" panose="020B0503020204020204" charset="-122"/>
-              </a:rPr>
-              <a:t>18</a:t>
-            </a:r>
-          </a:p>
-        </p:txBody>
-      </p:sp>
-      <p:sp>
-        <p:nvSpPr>
-          <p:cNvPr id="7" name="Rounded Rectangle 6"/>
-          <p:cNvSpPr/>
-          <p:nvPr/>
-        </p:nvSpPr>
-        <p:spPr>
-          <a:xfrm>
-            <a:off x="548640" y="1554480"/>
-            <a:ext cx="3566160" cy="3566160"/>
-          </a:xfrm>
-          <a:prstGeom prst="roundRect">
-            <a:avLst>
-              <a:gd name="adj" fmla="val 8000"/>
-            </a:avLst>
-          </a:prstGeom>
-          <a:solidFill>
-            <a:srgbClr val="FBE5D6"/>
-          </a:solidFill>
-          <a:ln>
-            <a:noFill/>
-          </a:ln>
-          <a:effectLst/>
-        </p:spPr>
-        <p:style>
-          <a:lnRef idx="1">
-            <a:schemeClr val="accent1"/>
-          </a:lnRef>
-          <a:fillRef idx="3">
-            <a:schemeClr val="accent1"/>
-          </a:fillRef>
-          <a:effectRef idx="2">
-            <a:schemeClr val="accent1"/>
-          </a:effectRef>
-          <a:fontRef idx="minor">
-            <a:schemeClr val="lt1"/>
-          </a:fontRef>
-        </p:style>
-        <p:txBody>
-          <a:bodyPr rtlCol="0" anchor="ctr"/>
-          <a:lstStyle/>
-          <a:p>
-            <a:pPr algn="ctr"/>
-            <a:endParaRPr/>
-          </a:p>
-        </p:txBody>
-      </p:sp>
-      <p:sp>
-        <p:nvSpPr>
-          <p:cNvPr id="8" name="TextBox 7"/>
-          <p:cNvSpPr txBox="1"/>
-          <p:nvPr/>
-        </p:nvSpPr>
-        <p:spPr>
-          <a:xfrm>
-            <a:off x="777240" y="1664208"/>
-            <a:ext cx="3108960" cy="365760"/>
-          </a:xfrm>
-          <a:prstGeom prst="rect">
-            <a:avLst/>
-          </a:prstGeom>
-          <a:noFill/>
-        </p:spPr>
-        <p:txBody>
-          <a:bodyPr wrap="square" lIns="0" rIns="0" anchor="t">
-            <a:spAutoFit/>
-          </a:bodyPr>
-          <a:lstStyle/>
-          <a:p>
-            <a:pPr algn="l"/>
-            <a:r>
-              <a:rPr sz="1400" b="1">
-                <a:solidFill>
-                  <a:srgbClr val="C55A11"/>
-                </a:solidFill>
-                <a:latin typeface="微软雅黑" panose="020B0503020204020204" charset="-122"/>
-                <a:ea typeface="微软雅黑" panose="020B0503020204020204" charset="-122"/>
-                <a:cs typeface="微软雅黑" panose="020B0503020204020204" charset="-122"/>
-              </a:rPr>
-              <a:t>什么叫“反转”</a:t>
-            </a:r>
-          </a:p>
-        </p:txBody>
-      </p:sp>
-      <p:sp>
-        <p:nvSpPr>
-          <p:cNvPr id="9" name="TextBox 8"/>
-          <p:cNvSpPr txBox="1"/>
-          <p:nvPr/>
-        </p:nvSpPr>
-        <p:spPr>
-          <a:xfrm>
-            <a:off x="777240" y="2103120"/>
-            <a:ext cx="3108960" cy="2743200"/>
-          </a:xfrm>
-          <a:prstGeom prst="rect">
-            <a:avLst/>
-          </a:prstGeom>
-          <a:noFill/>
-        </p:spPr>
-        <p:txBody>
-          <a:bodyPr wrap="square" lIns="0">
-            <a:spAutoFit/>
-          </a:bodyPr>
-          <a:lstStyle/>
-          <a:p>
-            <a:pPr>
-              <a:spcAft>
-                <a:spcPts val="600"/>
-              </a:spcAft>
-            </a:pPr>
-            <a:r>
-              <a:rPr sz="800" b="1">
-                <a:solidFill>
-                  <a:srgbClr val="C55A11"/>
-                </a:solidFill>
-                <a:latin typeface="微软雅黑" panose="020B0503020204020204" charset="-122"/>
-                <a:ea typeface="微软雅黑" panose="020B0503020204020204" charset="-122"/>
-                <a:cs typeface="微软雅黑" panose="020B0503020204020204" charset="-122"/>
-              </a:rPr>
-              <a:t>● </a:t>
-            </a:r>
-            <a:r>
-              <a:rPr sz="1100" b="0">
-                <a:solidFill>
-                  <a:srgbClr val="595959"/>
-                </a:solidFill>
-                <a:latin typeface="微软雅黑" panose="020B0503020204020204" charset="-122"/>
-                <a:ea typeface="微软雅黑" panose="020B0503020204020204" charset="-122"/>
-                <a:cs typeface="微软雅黑" panose="020B0503020204020204" charset="-122"/>
-              </a:rPr>
-              <a:t>论文：人类 MDE &gt; AI</a:t>
-            </a:r>
-          </a:p>
-          <a:p>
-            <a:pPr>
-              <a:spcAft>
-                <a:spcPts val="600"/>
-              </a:spcAft>
-            </a:pPr>
-            <a:r>
-              <a:rPr sz="800" b="1">
-                <a:solidFill>
-                  <a:srgbClr val="C55A11"/>
-                </a:solidFill>
-                <a:latin typeface="微软雅黑" panose="020B0503020204020204" charset="-122"/>
-                <a:ea typeface="微软雅黑" panose="020B0503020204020204" charset="-122"/>
-                <a:cs typeface="微软雅黑" panose="020B0503020204020204" charset="-122"/>
-              </a:rPr>
-              <a:t>● </a:t>
-            </a:r>
-            <a:r>
-              <a:rPr sz="1100" b="0">
-                <a:solidFill>
-                  <a:srgbClr val="595959"/>
-                </a:solidFill>
-                <a:latin typeface="微软雅黑" panose="020B0503020204020204" charset="-122"/>
-                <a:ea typeface="微软雅黑" panose="020B0503020204020204" charset="-122"/>
-                <a:cs typeface="微软雅黑" panose="020B0503020204020204" charset="-122"/>
-              </a:rPr>
-              <a:t>我们：人类 0.0736</a:t>
-            </a:r>
-          </a:p>
-          <a:p>
-            <a:pPr>
-              <a:spcAft>
-                <a:spcPts val="600"/>
-              </a:spcAft>
-            </a:pPr>
-            <a:r>
-              <a:rPr sz="800" b="1">
-                <a:solidFill>
-                  <a:srgbClr val="C55A11"/>
-                </a:solidFill>
-                <a:latin typeface="微软雅黑" panose="020B0503020204020204" charset="-122"/>
-                <a:ea typeface="微软雅黑" panose="020B0503020204020204" charset="-122"/>
-                <a:cs typeface="微软雅黑" panose="020B0503020204020204" charset="-122"/>
-              </a:rPr>
-              <a:t>● </a:t>
-            </a:r>
-            <a:r>
-              <a:rPr sz="1100" b="0">
-                <a:solidFill>
-                  <a:srgbClr val="595959"/>
-                </a:solidFill>
-                <a:latin typeface="微软雅黑" panose="020B0503020204020204" charset="-122"/>
-                <a:ea typeface="微软雅黑" panose="020B0503020204020204" charset="-122"/>
-                <a:cs typeface="微软雅黑" panose="020B0503020204020204" charset="-122"/>
-              </a:rPr>
-              <a:t>　　　AI　 0.0754</a:t>
-            </a:r>
-          </a:p>
-          <a:p>
-            <a:pPr>
-              <a:spcAft>
-                <a:spcPts val="600"/>
-              </a:spcAft>
-            </a:pPr>
-            <a:r>
-              <a:rPr sz="800" b="1">
-                <a:solidFill>
-                  <a:srgbClr val="C55A11"/>
-                </a:solidFill>
-                <a:latin typeface="微软雅黑" panose="020B0503020204020204" charset="-122"/>
-                <a:ea typeface="微软雅黑" panose="020B0503020204020204" charset="-122"/>
-                <a:cs typeface="微软雅黑" panose="020B0503020204020204" charset="-122"/>
-              </a:rPr>
-              <a:t>● </a:t>
-            </a:r>
-            <a:r>
-              <a:rPr sz="1100" b="0">
-                <a:solidFill>
-                  <a:srgbClr val="595959"/>
-                </a:solidFill>
-                <a:latin typeface="微软雅黑" panose="020B0503020204020204" charset="-122"/>
-                <a:ea typeface="微软雅黑" panose="020B0503020204020204" charset="-122"/>
-                <a:cs typeface="微软雅黑" panose="020B0503020204020204" charset="-122"/>
-              </a:rPr>
-              <a:t>差 0.0018，很小</a:t>
-            </a:r>
-          </a:p>
-        </p:txBody>
-      </p:sp>
-      <p:sp>
-        <p:nvSpPr>
-          <p:cNvPr id="10" name="Rounded Rectangle 9"/>
-          <p:cNvSpPr/>
-          <p:nvPr/>
-        </p:nvSpPr>
-        <p:spPr>
-          <a:xfrm>
-            <a:off x="4251960" y="1554480"/>
-            <a:ext cx="3566160" cy="3566160"/>
-          </a:xfrm>
-          <a:prstGeom prst="roundRect">
-            <a:avLst>
-              <a:gd name="adj" fmla="val 8000"/>
-            </a:avLst>
-          </a:prstGeom>
-          <a:solidFill>
-            <a:srgbClr val="DEEBF7"/>
-          </a:solidFill>
-          <a:ln>
-            <a:noFill/>
-          </a:ln>
-          <a:effectLst/>
-        </p:spPr>
-        <p:style>
-          <a:lnRef idx="1">
-            <a:schemeClr val="accent1"/>
-          </a:lnRef>
-          <a:fillRef idx="3">
-            <a:schemeClr val="accent1"/>
-          </a:fillRef>
-          <a:effectRef idx="2">
-            <a:schemeClr val="accent1"/>
-          </a:effectRef>
-          <a:fontRef idx="minor">
-            <a:schemeClr val="lt1"/>
-          </a:fontRef>
-        </p:style>
-        <p:txBody>
-          <a:bodyPr rtlCol="0" anchor="ctr"/>
-          <a:lstStyle/>
-          <a:p>
-            <a:pPr algn="ctr"/>
-            <a:endParaRPr/>
-          </a:p>
-        </p:txBody>
-      </p:sp>
-      <p:sp>
-        <p:nvSpPr>
-          <p:cNvPr id="11" name="TextBox 10"/>
-          <p:cNvSpPr txBox="1"/>
-          <p:nvPr/>
-        </p:nvSpPr>
-        <p:spPr>
-          <a:xfrm>
-            <a:off x="4480560" y="1664208"/>
-            <a:ext cx="3108960" cy="365760"/>
-          </a:xfrm>
-          <a:prstGeom prst="rect">
-            <a:avLst/>
-          </a:prstGeom>
-          <a:noFill/>
-        </p:spPr>
-        <p:txBody>
-          <a:bodyPr wrap="square" lIns="0" rIns="0" anchor="t">
-            <a:spAutoFit/>
-          </a:bodyPr>
-          <a:lstStyle/>
-          <a:p>
-            <a:pPr algn="l"/>
-            <a:r>
-              <a:rPr sz="1400" b="1">
-                <a:solidFill>
-                  <a:srgbClr val="2E75B6"/>
-                </a:solidFill>
-                <a:latin typeface="微软雅黑" panose="020B0503020204020204" charset="-122"/>
-                <a:ea typeface="微软雅黑" panose="020B0503020204020204" charset="-122"/>
-                <a:cs typeface="微软雅黑" panose="020B0503020204020204" charset="-122"/>
-              </a:rPr>
-              <a:t>为什么与论文相悖</a:t>
-            </a:r>
-          </a:p>
-        </p:txBody>
-      </p:sp>
-      <p:sp>
-        <p:nvSpPr>
-          <p:cNvPr id="12" name="TextBox 11"/>
-          <p:cNvSpPr txBox="1"/>
-          <p:nvPr/>
-        </p:nvSpPr>
-        <p:spPr>
-          <a:xfrm>
-            <a:off x="4480560" y="2103120"/>
-            <a:ext cx="3108960" cy="2743200"/>
-          </a:xfrm>
-          <a:prstGeom prst="rect">
-            <a:avLst/>
-          </a:prstGeom>
-          <a:noFill/>
-        </p:spPr>
-        <p:txBody>
-          <a:bodyPr wrap="square" lIns="0">
-            <a:spAutoFit/>
-          </a:bodyPr>
-          <a:lstStyle/>
-          <a:p>
-            <a:pPr>
-              <a:spcAft>
-                <a:spcPts val="600"/>
-              </a:spcAft>
-            </a:pPr>
-            <a:r>
-              <a:rPr sz="800" b="1">
-                <a:solidFill>
-                  <a:srgbClr val="2E75B6"/>
-                </a:solidFill>
-                <a:latin typeface="微软雅黑" panose="020B0503020204020204" charset="-122"/>
-                <a:ea typeface="微软雅黑" panose="020B0503020204020204" charset="-122"/>
-                <a:cs typeface="微软雅黑" panose="020B0503020204020204" charset="-122"/>
-              </a:rPr>
-              <a:t>● </a:t>
-            </a:r>
-            <a:r>
-              <a:rPr sz="1100" b="0">
-                <a:solidFill>
-                  <a:srgbClr val="595959"/>
-                </a:solidFill>
-                <a:latin typeface="微软雅黑" panose="020B0503020204020204" charset="-122"/>
-                <a:ea typeface="微软雅黑" panose="020B0503020204020204" charset="-122"/>
-                <a:cs typeface="微软雅黑" panose="020B0503020204020204" charset="-122"/>
-              </a:rPr>
-              <a:t>方向反了，MDE 从“人类信号”变成“AI 信号”</a:t>
-            </a:r>
-          </a:p>
-          <a:p>
-            <a:pPr>
-              <a:spcAft>
-                <a:spcPts val="600"/>
-              </a:spcAft>
-            </a:pPr>
-            <a:r>
-              <a:rPr sz="800" b="1">
-                <a:solidFill>
-                  <a:srgbClr val="2E75B6"/>
-                </a:solidFill>
-                <a:latin typeface="微软雅黑" panose="020B0503020204020204" charset="-122"/>
-                <a:ea typeface="微软雅黑" panose="020B0503020204020204" charset="-122"/>
-                <a:cs typeface="微软雅黑" panose="020B0503020204020204" charset="-122"/>
-              </a:rPr>
-              <a:t>● </a:t>
-            </a:r>
-            <a:r>
-              <a:rPr sz="1100" b="0">
-                <a:solidFill>
-                  <a:srgbClr val="595959"/>
-                </a:solidFill>
-                <a:latin typeface="微软雅黑" panose="020B0503020204020204" charset="-122"/>
-                <a:ea typeface="微软雅黑" panose="020B0503020204020204" charset="-122"/>
-                <a:cs typeface="微软雅黑" panose="020B0503020204020204" charset="-122"/>
-              </a:rPr>
-              <a:t>按论文方向用：AUROC 0.4096</a:t>
-            </a:r>
-          </a:p>
-          <a:p>
-            <a:pPr>
-              <a:spcAft>
-                <a:spcPts val="600"/>
-              </a:spcAft>
-            </a:pPr>
-            <a:r>
-              <a:rPr sz="800" b="1">
-                <a:solidFill>
-                  <a:srgbClr val="2E75B6"/>
-                </a:solidFill>
-                <a:latin typeface="微软雅黑" panose="020B0503020204020204" charset="-122"/>
-                <a:ea typeface="微软雅黑" panose="020B0503020204020204" charset="-122"/>
-                <a:cs typeface="微软雅黑" panose="020B0503020204020204" charset="-122"/>
-              </a:rPr>
-              <a:t>● </a:t>
-            </a:r>
-            <a:r>
-              <a:rPr sz="1100" b="0">
-                <a:solidFill>
-                  <a:srgbClr val="595959"/>
-                </a:solidFill>
-                <a:latin typeface="微软雅黑" panose="020B0503020204020204" charset="-122"/>
-                <a:ea typeface="微软雅黑" panose="020B0503020204020204" charset="-122"/>
-                <a:cs typeface="微软雅黑" panose="020B0503020204020204" charset="-122"/>
-              </a:rPr>
-              <a:t>反着用：0.5904，也不高</a:t>
-            </a:r>
-          </a:p>
-        </p:txBody>
-      </p:sp>
-      <p:sp>
-        <p:nvSpPr>
-          <p:cNvPr id="13" name="Rounded Rectangle 12"/>
-          <p:cNvSpPr/>
-          <p:nvPr/>
-        </p:nvSpPr>
-        <p:spPr>
-          <a:xfrm>
-            <a:off x="7955279" y="1554480"/>
-            <a:ext cx="3657600" cy="3566160"/>
-          </a:xfrm>
-          <a:prstGeom prst="roundRect">
-            <a:avLst>
-              <a:gd name="adj" fmla="val 8000"/>
-            </a:avLst>
-          </a:prstGeom>
-          <a:solidFill>
-            <a:srgbClr val="F2F2F2"/>
-          </a:solidFill>
-          <a:ln>
-            <a:noFill/>
-          </a:ln>
-          <a:effectLst/>
-        </p:spPr>
-        <p:style>
-          <a:lnRef idx="1">
-            <a:schemeClr val="accent1"/>
-          </a:lnRef>
-          <a:fillRef idx="3">
-            <a:schemeClr val="accent1"/>
-          </a:fillRef>
-          <a:effectRef idx="2">
-            <a:schemeClr val="accent1"/>
-          </a:effectRef>
-          <a:fontRef idx="minor">
-            <a:schemeClr val="lt1"/>
-          </a:fontRef>
-        </p:style>
-        <p:txBody>
-          <a:bodyPr rtlCol="0" anchor="ctr"/>
-          <a:lstStyle/>
-          <a:p>
-            <a:pPr algn="ctr"/>
-            <a:endParaRPr/>
-          </a:p>
-        </p:txBody>
-      </p:sp>
-      <p:sp>
-        <p:nvSpPr>
-          <p:cNvPr id="14" name="TextBox 13"/>
-          <p:cNvSpPr txBox="1"/>
-          <p:nvPr/>
-        </p:nvSpPr>
-        <p:spPr>
-          <a:xfrm>
-            <a:off x="8183879" y="1664208"/>
-            <a:ext cx="3200400" cy="365760"/>
-          </a:xfrm>
-          <a:prstGeom prst="rect">
-            <a:avLst/>
-          </a:prstGeom>
-          <a:noFill/>
-        </p:spPr>
-        <p:txBody>
-          <a:bodyPr wrap="square" lIns="0" rIns="0" anchor="t">
-            <a:spAutoFit/>
-          </a:bodyPr>
-          <a:lstStyle/>
-          <a:p>
-            <a:pPr algn="l"/>
-            <a:r>
-              <a:rPr sz="1400" b="1">
-                <a:solidFill>
-                  <a:srgbClr val="1F3864"/>
-                </a:solidFill>
-                <a:latin typeface="微软雅黑" panose="020B0503020204020204" charset="-122"/>
-                <a:ea typeface="微软雅黑" panose="020B0503020204020204" charset="-122"/>
-                <a:cs typeface="微软雅黑" panose="020B0503020204020204" charset="-122"/>
-              </a:rPr>
-              <a:t>排查过程（五步）</a:t>
-            </a:r>
-          </a:p>
-        </p:txBody>
-      </p:sp>
-      <p:sp>
-        <p:nvSpPr>
-          <p:cNvPr id="15" name="TextBox 14"/>
-          <p:cNvSpPr txBox="1"/>
-          <p:nvPr/>
-        </p:nvSpPr>
-        <p:spPr>
-          <a:xfrm>
-            <a:off x="8183879" y="2103120"/>
-            <a:ext cx="3200400" cy="2743200"/>
-          </a:xfrm>
-          <a:prstGeom prst="rect">
-            <a:avLst/>
-          </a:prstGeom>
-          <a:noFill/>
-        </p:spPr>
-        <p:txBody>
-          <a:bodyPr wrap="square" lIns="0" rIns="0" anchor="t">
-            <a:spAutoFit/>
-          </a:bodyPr>
-          <a:lstStyle/>
-          <a:p>
-            <a:pPr algn="l"/>
-            <a:r>
-              <a:rPr sz="1000" b="0">
-                <a:solidFill>
-                  <a:srgbClr val="595959"/>
-                </a:solidFill>
-                <a:latin typeface="微软雅黑" panose="020B0503020204020204" charset="-122"/>
-                <a:ea typeface="微软雅黑" panose="020B0503020204020204" charset="-122"/>
-                <a:cs typeface="微软雅黑" panose="020B0503020204020204" charset="-122"/>
-              </a:rPr>
-              <a:t>① 差 0.0018，先问是否噪声</a:t>
-            </a:r>
-          </a:p>
-          <a:p>
-            <a:pPr algn="l"/>
-            <a:endParaRPr sz="1000" b="0">
-              <a:solidFill>
-                <a:srgbClr val="595959"/>
-              </a:solidFill>
-              <a:latin typeface="微软雅黑" panose="020B0503020204020204" charset="-122"/>
-              <a:ea typeface="微软雅黑" panose="020B0503020204020204" charset="-122"/>
-              <a:cs typeface="微软雅黑" panose="020B0503020204020204" charset="-122"/>
-            </a:endParaRPr>
-          </a:p>
-          <a:p>
-            <a:pPr algn="l"/>
-            <a:r>
-              <a:rPr sz="1000" b="0">
-                <a:solidFill>
-                  <a:srgbClr val="595959"/>
-                </a:solidFill>
-                <a:latin typeface="微软雅黑" panose="020B0503020204020204" charset="-122"/>
-                <a:ea typeface="微软雅黑" panose="020B0503020204020204" charset="-122"/>
-                <a:cs typeface="微软雅黑" panose="020B0503020204020204" charset="-122"/>
-              </a:rPr>
-              <a:t>② bootstrap：区间不含 0，显著但小</a:t>
-            </a:r>
-          </a:p>
-          <a:p>
-            <a:pPr algn="l"/>
-            <a:endParaRPr sz="1000" b="0">
-              <a:solidFill>
-                <a:srgbClr val="595959"/>
-              </a:solidFill>
-              <a:latin typeface="微软雅黑" panose="020B0503020204020204" charset="-122"/>
-              <a:ea typeface="微软雅黑" panose="020B0503020204020204" charset="-122"/>
-              <a:cs typeface="微软雅黑" panose="020B0503020204020204" charset="-122"/>
-            </a:endParaRPr>
-          </a:p>
-          <a:p>
-            <a:pPr algn="l"/>
-            <a:r>
-              <a:rPr sz="1000" b="0">
-                <a:solidFill>
-                  <a:srgbClr val="595959"/>
-                </a:solidFill>
-                <a:latin typeface="微软雅黑" panose="020B0503020204020204" charset="-122"/>
-                <a:ea typeface="微软雅黑" panose="020B0503020204020204" charset="-122"/>
-                <a:cs typeface="微软雅黑" panose="020B0503020204020204" charset="-122"/>
-              </a:rPr>
-              <a:t>③ 换三个代理都反 → 不是容量</a:t>
-            </a:r>
-          </a:p>
-          <a:p>
-            <a:pPr algn="l"/>
-            <a:endParaRPr sz="1000" b="0">
-              <a:solidFill>
-                <a:srgbClr val="595959"/>
-              </a:solidFill>
-              <a:latin typeface="微软雅黑" panose="020B0503020204020204" charset="-122"/>
-              <a:ea typeface="微软雅黑" panose="020B0503020204020204" charset="-122"/>
-              <a:cs typeface="微软雅黑" panose="020B0503020204020204" charset="-122"/>
-            </a:endParaRPr>
-          </a:p>
-          <a:p>
-            <a:pPr algn="l"/>
-            <a:r>
-              <a:rPr sz="1000" b="0">
-                <a:solidFill>
-                  <a:srgbClr val="595959"/>
-                </a:solidFill>
-                <a:latin typeface="微软雅黑" panose="020B0503020204020204" charset="-122"/>
-                <a:ea typeface="微软雅黑" panose="020B0503020204020204" charset="-122"/>
-                <a:cs typeface="微软雅黑" panose="020B0503020204020204" charset="-122"/>
-              </a:rPr>
-              <a:t>④ 同长度截断 → 不是长度</a:t>
-            </a:r>
-          </a:p>
-          <a:p>
-            <a:pPr algn="l"/>
-            <a:endParaRPr sz="1000" b="0">
-              <a:solidFill>
-                <a:srgbClr val="595959"/>
-              </a:solidFill>
-              <a:latin typeface="微软雅黑" panose="020B0503020204020204" charset="-122"/>
-              <a:ea typeface="微软雅黑" panose="020B0503020204020204" charset="-122"/>
-              <a:cs typeface="微软雅黑" panose="020B0503020204020204" charset="-122"/>
-            </a:endParaRPr>
-          </a:p>
-          <a:p>
-            <a:pPr algn="l"/>
-            <a:r>
-              <a:rPr sz="1000" b="0">
-                <a:solidFill>
-                  <a:srgbClr val="595959"/>
-                </a:solidFill>
-                <a:latin typeface="微软雅黑" panose="020B0503020204020204" charset="-122"/>
-                <a:ea typeface="微软雅黑" panose="020B0503020204020204" charset="-122"/>
-                <a:cs typeface="微软雅黑" panose="020B0503020204020204" charset="-122"/>
-              </a:rPr>
-              <a:t>⑤ 推测：源/代理同家族</a:t>
-            </a:r>
-          </a:p>
-        </p:txBody>
-      </p:sp>
-      <p:sp>
-        <p:nvSpPr>
-          <p:cNvPr id="16" name="Rounded Rectangle 15"/>
-          <p:cNvSpPr/>
-          <p:nvPr/>
-        </p:nvSpPr>
-        <p:spPr>
-          <a:xfrm>
-            <a:off x="548640" y="5349240"/>
-            <a:ext cx="11064240" cy="777240"/>
-          </a:xfrm>
-          <a:prstGeom prst="roundRect">
-            <a:avLst>
-              <a:gd name="adj" fmla="val 8000"/>
-            </a:avLst>
-          </a:prstGeom>
-          <a:solidFill>
-            <a:srgbClr val="1F3864"/>
-          </a:solidFill>
-          <a:ln>
-            <a:noFill/>
-          </a:ln>
-          <a:effectLst/>
-        </p:spPr>
-        <p:style>
-          <a:lnRef idx="1">
-            <a:schemeClr val="accent1"/>
-          </a:lnRef>
-          <a:fillRef idx="3">
-            <a:schemeClr val="accent1"/>
-          </a:fillRef>
-          <a:effectRef idx="2">
-            <a:schemeClr val="accent1"/>
-          </a:effectRef>
-          <a:fontRef idx="minor">
-            <a:schemeClr val="lt1"/>
-          </a:fontRef>
-        </p:style>
-        <p:txBody>
-          <a:bodyPr rtlCol="0" anchor="ctr"/>
-          <a:lstStyle/>
-          <a:p>
-            <a:pPr algn="ctr"/>
-            <a:endParaRPr/>
-          </a:p>
-        </p:txBody>
-      </p:sp>
-      <p:sp>
-        <p:nvSpPr>
-          <p:cNvPr id="17" name="TextBox 16"/>
-          <p:cNvSpPr txBox="1"/>
-          <p:nvPr/>
-        </p:nvSpPr>
-        <p:spPr>
-          <a:xfrm>
-            <a:off x="777240" y="5458968"/>
-            <a:ext cx="10607040" cy="548640"/>
-          </a:xfrm>
-          <a:prstGeom prst="rect">
-            <a:avLst/>
-          </a:prstGeom>
-          <a:noFill/>
-        </p:spPr>
-        <p:txBody>
-          <a:bodyPr wrap="square" lIns="0" rIns="0" anchor="t">
-            <a:spAutoFit/>
-          </a:bodyPr>
-          <a:lstStyle/>
-          <a:p>
-            <a:pPr algn="ctr"/>
-            <a:r>
-              <a:rPr sz="1300" b="1">
-                <a:solidFill>
-                  <a:srgbClr val="FFFFFF"/>
-                </a:solidFill>
-                <a:latin typeface="微软雅黑" panose="020B0503020204020204" charset="-122"/>
-                <a:ea typeface="微软雅黑" panose="020B0503020204020204" charset="-122"/>
-                <a:cs typeface="微软雅黑" panose="020B0503020204020204" charset="-122"/>
-              </a:rPr>
-              <a:t>方向不确定，所以改进不假设方向，改用加权融合。</a:t>
-            </a:r>
-          </a:p>
-        </p:txBody>
-      </p:sp>
-    </p:spTree>
-  </p:cSld>
-  <p:clrMapOvr>
-    <a:masterClrMapping/>
-  </p:clrMapOvr>
-</p:sld>
-</file>
-
-<file path=ppt/slides/slide21.xml><?xml version="1.0" encoding="utf-8"?>
+<file path=ppt/slides/slide22.xml><?xml version="1.0" encoding="utf-8"?>
 <p:sld xmlns:a="http://schemas.openxmlformats.org/drawingml/2006/main" xmlns:r="http://schemas.openxmlformats.org/officeDocument/2006/relationships" xmlns:p="http://schemas.openxmlformats.org/presentationml/2006/main">
   <p:cSld>
     <p:spTree>
@@ -16600,7 +17003,7 @@
 </p:sld>
 </file>
 
-<file path=ppt/slides/slide22.xml><?xml version="1.0" encoding="utf-8"?>
+<file path=ppt/slides/slide23.xml><?xml version="1.0" encoding="utf-8"?>
 <p:sld xmlns:a="http://schemas.openxmlformats.org/drawingml/2006/main" xmlns:r="http://schemas.openxmlformats.org/officeDocument/2006/relationships" xmlns:p="http://schemas.openxmlformats.org/presentationml/2006/main">
   <p:cSld>
     <p:spTree>
@@ -16707,7 +17110,7 @@
         <p:spPr>
           <a:xfrm>
             <a:off x="548640" y="868680"/>
-            <a:ext cx="10972800" cy="365760"/>
+            <a:ext cx="10972800" cy="292388"/>
           </a:xfrm>
           <a:prstGeom prst="rect">
             <a:avLst/>
@@ -16722,15 +17125,37 @@
           <a:p>
             <a:pPr algn="l"/>
             <a:r>
-              <a:rPr sz="1300" b="0">
-                <a:solidFill>
-                  <a:srgbClr val="7F7F7F"/>
-                </a:solidFill>
-                <a:latin typeface="微软雅黑" panose="020B0503020204020204" charset="-122"/>
-                <a:ea typeface="微软雅黑" panose="020B0503020204020204" charset="-122"/>
-                <a:cs typeface="微软雅黑" panose="020B0503020204020204" charset="-122"/>
-              </a:rPr>
-              <a:t>MDE 测的不是抖动，是“抖动随尺度的变化”</a:t>
+              <a:rPr sz="1300" b="0" dirty="0">
+                <a:solidFill>
+                  <a:srgbClr val="FF0000"/>
+                </a:solidFill>
+                <a:latin typeface="微软雅黑" panose="020B0503020204020204" charset="-122"/>
+                <a:ea typeface="微软雅黑" panose="020B0503020204020204" charset="-122"/>
+                <a:cs typeface="微软雅黑" panose="020B0503020204020204" charset="-122"/>
+              </a:rPr>
+              <a:t>MDE </a:t>
+            </a:r>
+            <a:r>
+              <a:rPr sz="1300" b="0" dirty="0" err="1">
+                <a:solidFill>
+                  <a:srgbClr val="FF0000"/>
+                </a:solidFill>
+                <a:latin typeface="微软雅黑" panose="020B0503020204020204" charset="-122"/>
+                <a:ea typeface="微软雅黑" panose="020B0503020204020204" charset="-122"/>
+                <a:cs typeface="微软雅黑" panose="020B0503020204020204" charset="-122"/>
+              </a:rPr>
+              <a:t>测的不是抖动，是“抖动随尺度的变化</a:t>
+            </a:r>
+            <a:r>
+              <a:rPr sz="1300" b="0" dirty="0">
+                <a:solidFill>
+                  <a:srgbClr val="FF0000"/>
+                </a:solidFill>
+                <a:latin typeface="微软雅黑" panose="020B0503020204020204" charset="-122"/>
+                <a:ea typeface="微软雅黑" panose="020B0503020204020204" charset="-122"/>
+                <a:cs typeface="微软雅黑" panose="020B0503020204020204" charset="-122"/>
+              </a:rPr>
+              <a:t>”</a:t>
             </a:r>
           </a:p>
         </p:txBody>
@@ -18002,7 +18427,7 @@
 </p:sld>
 </file>
 
-<file path=ppt/slides/slide23.xml><?xml version="1.0" encoding="utf-8"?>
+<file path=ppt/slides/slide24.xml><?xml version="1.0" encoding="utf-8"?>
 <p:sld xmlns:a="http://schemas.openxmlformats.org/drawingml/2006/main" xmlns:r="http://schemas.openxmlformats.org/officeDocument/2006/relationships" xmlns:p="http://schemas.openxmlformats.org/presentationml/2006/main">
   <p:cSld>
     <p:spTree>
@@ -18096,43 +18521,6 @@
                 <a:cs typeface="微软雅黑" panose="020B0503020204020204" charset="-122"/>
               </a:rPr>
               <a:t>MDE 当分母的问题</a:t>
-            </a:r>
-          </a:p>
-        </p:txBody>
-      </p:sp>
-      <p:sp>
-        <p:nvSpPr>
-          <p:cNvPr id="4" name="TextBox 3"/>
-          <p:cNvSpPr txBox="1"/>
-          <p:nvPr/>
-        </p:nvSpPr>
-        <p:spPr>
-          <a:xfrm>
-            <a:off x="548640" y="868680"/>
-            <a:ext cx="10972800" cy="365760"/>
-          </a:xfrm>
-          <a:prstGeom prst="rect">
-            <a:avLst/>
-          </a:prstGeom>
-          <a:noFill/>
-        </p:spPr>
-        <p:txBody>
-          <a:bodyPr wrap="square" lIns="0" rIns="0" anchor="t">
-            <a:spAutoFit/>
-          </a:bodyPr>
-          <a:lstStyle/>
-          <a:p>
-            <a:pPr algn="l"/>
-            <a:r>
-              <a:rPr sz="1300" b="0">
-                <a:solidFill>
-                  <a:srgbClr val="7F7F7F"/>
-                </a:solidFill>
-                <a:latin typeface="微软雅黑" panose="020B0503020204020204" charset="-122"/>
-                <a:ea typeface="微软雅黑" panose="020B0503020204020204" charset="-122"/>
-                <a:cs typeface="微软雅黑" panose="020B0503020204020204" charset="-122"/>
-              </a:rPr>
-              <a:t>同一个流畅分，除以不同的抖动分，结论会翻转</a:t>
             </a:r>
           </a:p>
         </p:txBody>
@@ -18867,7 +19255,7 @@
 </p:sld>
 </file>
 
-<file path=ppt/slides/slide24.xml><?xml version="1.0" encoding="utf-8"?>
+<file path=ppt/slides/slide25.xml><?xml version="1.0" encoding="utf-8"?>
 <p:sld xmlns:a="http://schemas.openxmlformats.org/drawingml/2006/main" xmlns:r="http://schemas.openxmlformats.org/officeDocument/2006/relationships" xmlns:p="http://schemas.openxmlformats.org/presentationml/2006/main">
   <p:cSld>
     <p:spTree>
@@ -19884,7 +20272,7 @@
 </p:sld>
 </file>
 
-<file path=ppt/slides/slide25.xml><?xml version="1.0" encoding="utf-8"?>
+<file path=ppt/slides/slide26.xml><?xml version="1.0" encoding="utf-8"?>
 <p:sld xmlns:a="http://schemas.openxmlformats.org/drawingml/2006/main" xmlns:r="http://schemas.openxmlformats.org/officeDocument/2006/relationships" xmlns:p="http://schemas.openxmlformats.org/presentationml/2006/main">
   <p:cSld>
     <p:spTree>
@@ -21027,7 +21415,7 @@
 </p:sld>
 </file>
 
-<file path=ppt/slides/slide26.xml><?xml version="1.0" encoding="utf-8"?>
+<file path=ppt/slides/slide27.xml><?xml version="1.0" encoding="utf-8"?>
 <p:sld xmlns:a="http://schemas.openxmlformats.org/drawingml/2006/main" xmlns:r="http://schemas.openxmlformats.org/officeDocument/2006/relationships" xmlns:p="http://schemas.openxmlformats.org/presentationml/2006/main">
   <p:cSld>
     <p:spTree>
@@ -21528,7 +21916,7 @@
 </p:sld>
 </file>
 
-<file path=ppt/slides/slide27.xml><?xml version="1.0" encoding="utf-8"?>
+<file path=ppt/slides/slide28.xml><?xml version="1.0" encoding="utf-8"?>
 <p:sld xmlns:a="http://schemas.openxmlformats.org/drawingml/2006/main" xmlns:r="http://schemas.openxmlformats.org/officeDocument/2006/relationships" xmlns:p="http://schemas.openxmlformats.org/presentationml/2006/main">
   <p:cSld>
     <p:spTree>
@@ -22340,704 +22728,6 @@
 </p:sld>
 </file>
 
-<file path=ppt/slides/slide28.xml><?xml version="1.0" encoding="utf-8"?>
-<p:sld xmlns:a="http://schemas.openxmlformats.org/drawingml/2006/main" xmlns:r="http://schemas.openxmlformats.org/officeDocument/2006/relationships" xmlns:p="http://schemas.openxmlformats.org/presentationml/2006/main">
-  <p:cSld>
-    <p:spTree>
-      <p:nvGrpSpPr>
-        <p:cNvPr id="1" name=""/>
-        <p:cNvGrpSpPr/>
-        <p:nvPr/>
-      </p:nvGrpSpPr>
-      <p:grpSpPr>
-        <a:xfrm>
-          <a:off x="0" y="0"/>
-          <a:ext cx="0" cy="0"/>
-          <a:chOff x="0" y="0"/>
-          <a:chExt cx="0" cy="0"/>
-        </a:xfrm>
-      </p:grpSpPr>
-      <p:sp>
-        <p:nvSpPr>
-          <p:cNvPr id="2" name="Rectangle 1"/>
-          <p:cNvSpPr/>
-          <p:nvPr/>
-        </p:nvSpPr>
-        <p:spPr>
-          <a:xfrm>
-            <a:off x="0" y="0"/>
-            <a:ext cx="12191695" cy="82296"/>
-          </a:xfrm>
-          <a:prstGeom prst="rect">
-            <a:avLst/>
-          </a:prstGeom>
-          <a:solidFill>
-            <a:srgbClr val="1F3864"/>
-          </a:solidFill>
-          <a:ln>
-            <a:noFill/>
-          </a:ln>
-        </p:spPr>
-        <p:style>
-          <a:lnRef idx="1">
-            <a:schemeClr val="accent1"/>
-          </a:lnRef>
-          <a:fillRef idx="3">
-            <a:schemeClr val="accent1"/>
-          </a:fillRef>
-          <a:effectRef idx="2">
-            <a:schemeClr val="accent1"/>
-          </a:effectRef>
-          <a:fontRef idx="minor">
-            <a:schemeClr val="lt1"/>
-          </a:fontRef>
-        </p:style>
-        <p:txBody>
-          <a:bodyPr rtlCol="0" anchor="ctr"/>
-          <a:lstStyle/>
-          <a:p>
-            <a:pPr algn="ctr"/>
-            <a:endParaRPr/>
-          </a:p>
-        </p:txBody>
-      </p:sp>
-      <p:sp>
-        <p:nvSpPr>
-          <p:cNvPr id="3" name="TextBox 2"/>
-          <p:cNvSpPr txBox="1"/>
-          <p:nvPr/>
-        </p:nvSpPr>
-        <p:spPr>
-          <a:xfrm>
-            <a:off x="548640" y="292608"/>
-            <a:ext cx="10972800" cy="548640"/>
-          </a:xfrm>
-          <a:prstGeom prst="rect">
-            <a:avLst/>
-          </a:prstGeom>
-          <a:noFill/>
-        </p:spPr>
-        <p:txBody>
-          <a:bodyPr wrap="square" lIns="0" rIns="0" anchor="t">
-            <a:spAutoFit/>
-          </a:bodyPr>
-          <a:lstStyle/>
-          <a:p>
-            <a:pPr algn="l"/>
-            <a:r>
-              <a:rPr sz="2600" b="1">
-                <a:solidFill>
-                  <a:srgbClr val="1F3864"/>
-                </a:solidFill>
-                <a:latin typeface="微软雅黑" panose="020B0503020204020204" charset="-122"/>
-                <a:ea typeface="微软雅黑" panose="020B0503020204020204" charset="-122"/>
-                <a:cs typeface="微软雅黑" panose="020B0503020204020204" charset="-122"/>
-              </a:rPr>
-              <a:t>局限与伦理</a:t>
-            </a:r>
-          </a:p>
-        </p:txBody>
-      </p:sp>
-      <p:sp>
-        <p:nvSpPr>
-          <p:cNvPr id="4" name="TextBox 3"/>
-          <p:cNvSpPr txBox="1"/>
-          <p:nvPr/>
-        </p:nvSpPr>
-        <p:spPr>
-          <a:xfrm>
-            <a:off x="548640" y="868680"/>
-            <a:ext cx="10972800" cy="365760"/>
-          </a:xfrm>
-          <a:prstGeom prst="rect">
-            <a:avLst/>
-          </a:prstGeom>
-          <a:noFill/>
-        </p:spPr>
-        <p:txBody>
-          <a:bodyPr wrap="square" lIns="0" rIns="0" anchor="t">
-            <a:spAutoFit/>
-          </a:bodyPr>
-          <a:lstStyle/>
-          <a:p>
-            <a:pPr algn="l"/>
-            <a:r>
-              <a:rPr sz="1300" b="0">
-                <a:solidFill>
-                  <a:srgbClr val="7F7F7F"/>
-                </a:solidFill>
-                <a:latin typeface="微软雅黑" panose="020B0503020204020204" charset="-122"/>
-                <a:ea typeface="微软雅黑" panose="020B0503020204020204" charset="-122"/>
-                <a:cs typeface="微软雅黑" panose="020B0503020204020204" charset="-122"/>
-              </a:rPr>
-              <a:t>知道边界，才算真的复现</a:t>
-            </a:r>
-          </a:p>
-        </p:txBody>
-      </p:sp>
-      <p:sp>
-        <p:nvSpPr>
-          <p:cNvPr id="5" name="TextBox 4"/>
-          <p:cNvSpPr txBox="1"/>
-          <p:nvPr/>
-        </p:nvSpPr>
-        <p:spPr>
-          <a:xfrm>
-            <a:off x="548640" y="6473952"/>
-            <a:ext cx="5486400" cy="274320"/>
-          </a:xfrm>
-          <a:prstGeom prst="rect">
-            <a:avLst/>
-          </a:prstGeom>
-          <a:noFill/>
-        </p:spPr>
-        <p:txBody>
-          <a:bodyPr wrap="square" lIns="0" rIns="0" anchor="t">
-            <a:spAutoFit/>
-          </a:bodyPr>
-          <a:lstStyle/>
-          <a:p>
-            <a:pPr algn="l"/>
-            <a:r>
-              <a:rPr sz="900" b="0">
-                <a:solidFill>
-                  <a:srgbClr val="7F7F7F"/>
-                </a:solidFill>
-                <a:latin typeface="微软雅黑" panose="020B0503020204020204" charset="-122"/>
-                <a:ea typeface="微软雅黑" panose="020B0503020204020204" charset="-122"/>
-                <a:cs typeface="微软雅黑" panose="020B0503020204020204" charset="-122"/>
-              </a:rPr>
-              <a:t>Lastde 复现  ·  AI for Software Engineering</a:t>
-            </a:r>
-          </a:p>
-        </p:txBody>
-      </p:sp>
-      <p:sp>
-        <p:nvSpPr>
-          <p:cNvPr id="6" name="TextBox 5"/>
-          <p:cNvSpPr txBox="1"/>
-          <p:nvPr/>
-        </p:nvSpPr>
-        <p:spPr>
-          <a:xfrm>
-            <a:off x="11155680" y="6473952"/>
-            <a:ext cx="548640" cy="274320"/>
-          </a:xfrm>
-          <a:prstGeom prst="rect">
-            <a:avLst/>
-          </a:prstGeom>
-          <a:noFill/>
-        </p:spPr>
-        <p:txBody>
-          <a:bodyPr wrap="square" lIns="0" rIns="0" anchor="t">
-            <a:spAutoFit/>
-          </a:bodyPr>
-          <a:lstStyle/>
-          <a:p>
-            <a:pPr algn="r"/>
-            <a:r>
-              <a:rPr sz="900" b="0">
-                <a:solidFill>
-                  <a:srgbClr val="7F7F7F"/>
-                </a:solidFill>
-                <a:latin typeface="微软雅黑" panose="020B0503020204020204" charset="-122"/>
-                <a:ea typeface="微软雅黑" panose="020B0503020204020204" charset="-122"/>
-                <a:cs typeface="微软雅黑" panose="020B0503020204020204" charset="-122"/>
-              </a:rPr>
-              <a:t>26</a:t>
-            </a:r>
-          </a:p>
-        </p:txBody>
-      </p:sp>
-      <p:sp>
-        <p:nvSpPr>
-          <p:cNvPr id="7" name="Rounded Rectangle 6"/>
-          <p:cNvSpPr/>
-          <p:nvPr/>
-        </p:nvSpPr>
-        <p:spPr>
-          <a:xfrm>
-            <a:off x="548640" y="1508760"/>
-            <a:ext cx="5394960" cy="4480560"/>
-          </a:xfrm>
-          <a:prstGeom prst="roundRect">
-            <a:avLst>
-              <a:gd name="adj" fmla="val 8000"/>
-            </a:avLst>
-          </a:prstGeom>
-          <a:solidFill>
-            <a:srgbClr val="F2F2F2"/>
-          </a:solidFill>
-          <a:ln>
-            <a:noFill/>
-          </a:ln>
-          <a:effectLst/>
-        </p:spPr>
-        <p:style>
-          <a:lnRef idx="1">
-            <a:schemeClr val="accent1"/>
-          </a:lnRef>
-          <a:fillRef idx="3">
-            <a:schemeClr val="accent1"/>
-          </a:fillRef>
-          <a:effectRef idx="2">
-            <a:schemeClr val="accent1"/>
-          </a:effectRef>
-          <a:fontRef idx="minor">
-            <a:schemeClr val="lt1"/>
-          </a:fontRef>
-        </p:style>
-        <p:txBody>
-          <a:bodyPr rtlCol="0" anchor="ctr"/>
-          <a:lstStyle/>
-          <a:p>
-            <a:pPr algn="ctr"/>
-            <a:endParaRPr/>
-          </a:p>
-        </p:txBody>
-      </p:sp>
-      <p:sp>
-        <p:nvSpPr>
-          <p:cNvPr id="8" name="TextBox 7"/>
-          <p:cNvSpPr txBox="1"/>
-          <p:nvPr/>
-        </p:nvSpPr>
-        <p:spPr>
-          <a:xfrm>
-            <a:off x="777240" y="1645920"/>
-            <a:ext cx="4937760" cy="365760"/>
-          </a:xfrm>
-          <a:prstGeom prst="rect">
-            <a:avLst/>
-          </a:prstGeom>
-          <a:noFill/>
-        </p:spPr>
-        <p:txBody>
-          <a:bodyPr wrap="square" lIns="0" rIns="0" anchor="t">
-            <a:spAutoFit/>
-          </a:bodyPr>
-          <a:lstStyle/>
-          <a:p>
-            <a:pPr algn="l"/>
-            <a:r>
-              <a:rPr sz="1500" b="1">
-                <a:solidFill>
-                  <a:srgbClr val="1F3864"/>
-                </a:solidFill>
-                <a:latin typeface="微软雅黑" panose="020B0503020204020204" charset="-122"/>
-                <a:ea typeface="微软雅黑" panose="020B0503020204020204" charset="-122"/>
-                <a:cs typeface="微软雅黑" panose="020B0503020204020204" charset="-122"/>
-              </a:rPr>
-              <a:t>四点局限</a:t>
-            </a:r>
-          </a:p>
-        </p:txBody>
-      </p:sp>
-      <p:sp>
-        <p:nvSpPr>
-          <p:cNvPr id="9" name="TextBox 8"/>
-          <p:cNvSpPr txBox="1"/>
-          <p:nvPr/>
-        </p:nvSpPr>
-        <p:spPr>
-          <a:xfrm>
-            <a:off x="777240" y="2103120"/>
-            <a:ext cx="4937760" cy="3657600"/>
-          </a:xfrm>
-          <a:prstGeom prst="rect">
-            <a:avLst/>
-          </a:prstGeom>
-          <a:noFill/>
-        </p:spPr>
-        <p:txBody>
-          <a:bodyPr wrap="square" lIns="0">
-            <a:spAutoFit/>
-          </a:bodyPr>
-          <a:lstStyle/>
-          <a:p>
-            <a:pPr>
-              <a:spcAft>
-                <a:spcPts val="800"/>
-              </a:spcAft>
-            </a:pPr>
-            <a:r>
-              <a:rPr sz="1000" b="1">
-                <a:solidFill>
-                  <a:srgbClr val="2E75B6"/>
-                </a:solidFill>
-                <a:latin typeface="微软雅黑" panose="020B0503020204020204" charset="-122"/>
-                <a:ea typeface="微软雅黑" panose="020B0503020204020204" charset="-122"/>
-                <a:cs typeface="微软雅黑" panose="020B0503020204020204" charset="-122"/>
-              </a:rPr>
-              <a:t>● </a:t>
-            </a:r>
-            <a:r>
-              <a:rPr sz="1300" b="0">
-                <a:solidFill>
-                  <a:srgbClr val="595959"/>
-                </a:solidFill>
-                <a:latin typeface="微软雅黑" panose="020B0503020204020204" charset="-122"/>
-                <a:ea typeface="微软雅黑" panose="020B0503020204020204" charset="-122"/>
-                <a:cs typeface="微软雅黑" panose="020B0503020204020204" charset="-122"/>
-              </a:rPr>
-              <a:t>代理模型 GPT-2 替代 GPT-J</a:t>
-            </a:r>
-          </a:p>
-          <a:p>
-            <a:pPr>
-              <a:spcAft>
-                <a:spcPts val="800"/>
-              </a:spcAft>
-            </a:pPr>
-            <a:r>
-              <a:rPr sz="1000" b="1">
-                <a:solidFill>
-                  <a:srgbClr val="2E75B6"/>
-                </a:solidFill>
-                <a:latin typeface="微软雅黑" panose="020B0503020204020204" charset="-122"/>
-                <a:ea typeface="微软雅黑" panose="020B0503020204020204" charset="-122"/>
-                <a:cs typeface="微软雅黑" panose="020B0503020204020204" charset="-122"/>
-              </a:rPr>
-              <a:t>● </a:t>
-            </a:r>
-            <a:r>
-              <a:rPr sz="1300" b="0">
-                <a:solidFill>
-                  <a:srgbClr val="595959"/>
-                </a:solidFill>
-                <a:latin typeface="微软雅黑" panose="020B0503020204020204" charset="-122"/>
-                <a:ea typeface="微软雅黑" panose="020B0503020204020204" charset="-122"/>
-                <a:cs typeface="微软雅黑" panose="020B0503020204020204" charset="-122"/>
-              </a:rPr>
-              <a:t>只用了 1 个数据集（XSum）</a:t>
-            </a:r>
-          </a:p>
-          <a:p>
-            <a:pPr>
-              <a:spcAft>
-                <a:spcPts val="800"/>
-              </a:spcAft>
-            </a:pPr>
-            <a:r>
-              <a:rPr sz="1000" b="1">
-                <a:solidFill>
-                  <a:srgbClr val="2E75B6"/>
-                </a:solidFill>
-                <a:latin typeface="微软雅黑" panose="020B0503020204020204" charset="-122"/>
-                <a:ea typeface="微软雅黑" panose="020B0503020204020204" charset="-122"/>
-                <a:cs typeface="微软雅黑" panose="020B0503020204020204" charset="-122"/>
-              </a:rPr>
-              <a:t>● </a:t>
-            </a:r>
-            <a:r>
-              <a:rPr sz="1300" b="0">
-                <a:solidFill>
-                  <a:srgbClr val="595959"/>
-                </a:solidFill>
-                <a:latin typeface="微软雅黑" panose="020B0503020204020204" charset="-122"/>
-                <a:ea typeface="微软雅黑" panose="020B0503020204020204" charset="-122"/>
-                <a:cs typeface="微软雅黑" panose="020B0503020204020204" charset="-122"/>
-              </a:rPr>
-              <a:t>没有实现 Lastde++</a:t>
-            </a:r>
-          </a:p>
-          <a:p>
-            <a:pPr>
-              <a:spcAft>
-                <a:spcPts val="800"/>
-              </a:spcAft>
-            </a:pPr>
-            <a:r>
-              <a:rPr sz="1000" b="1">
-                <a:solidFill>
-                  <a:srgbClr val="2E75B6"/>
-                </a:solidFill>
-                <a:latin typeface="微软雅黑" panose="020B0503020204020204" charset="-122"/>
-                <a:ea typeface="微软雅黑" panose="020B0503020204020204" charset="-122"/>
-                <a:cs typeface="微软雅黑" panose="020B0503020204020204" charset="-122"/>
-              </a:rPr>
-              <a:t>● </a:t>
-            </a:r>
-            <a:r>
-              <a:rPr sz="1300" b="0">
-                <a:solidFill>
-                  <a:srgbClr val="595959"/>
-                </a:solidFill>
-                <a:latin typeface="微软雅黑" panose="020B0503020204020204" charset="-122"/>
-                <a:ea typeface="微软雅黑" panose="020B0503020204020204" charset="-122"/>
-                <a:cs typeface="微软雅黑" panose="020B0503020204020204" charset="-122"/>
-              </a:rPr>
-              <a:t>截断长度与论文不完全一致</a:t>
-            </a:r>
-          </a:p>
-        </p:txBody>
-      </p:sp>
-      <p:sp>
-        <p:nvSpPr>
-          <p:cNvPr id="10" name="Rounded Rectangle 9"/>
-          <p:cNvSpPr/>
-          <p:nvPr/>
-        </p:nvSpPr>
-        <p:spPr>
-          <a:xfrm>
-            <a:off x="6217920" y="1508760"/>
-            <a:ext cx="5394960" cy="4480560"/>
-          </a:xfrm>
-          <a:prstGeom prst="roundRect">
-            <a:avLst>
-              <a:gd name="adj" fmla="val 8000"/>
-            </a:avLst>
-          </a:prstGeom>
-          <a:solidFill>
-            <a:srgbClr val="FBE5D6"/>
-          </a:solidFill>
-          <a:ln>
-            <a:noFill/>
-          </a:ln>
-          <a:effectLst/>
-        </p:spPr>
-        <p:style>
-          <a:lnRef idx="1">
-            <a:schemeClr val="accent1"/>
-          </a:lnRef>
-          <a:fillRef idx="3">
-            <a:schemeClr val="accent1"/>
-          </a:fillRef>
-          <a:effectRef idx="2">
-            <a:schemeClr val="accent1"/>
-          </a:effectRef>
-          <a:fontRef idx="minor">
-            <a:schemeClr val="lt1"/>
-          </a:fontRef>
-        </p:style>
-        <p:txBody>
-          <a:bodyPr rtlCol="0" anchor="ctr"/>
-          <a:lstStyle/>
-          <a:p>
-            <a:pPr algn="ctr"/>
-            <a:endParaRPr/>
-          </a:p>
-        </p:txBody>
-      </p:sp>
-      <p:sp>
-        <p:nvSpPr>
-          <p:cNvPr id="11" name="TextBox 10"/>
-          <p:cNvSpPr txBox="1"/>
-          <p:nvPr/>
-        </p:nvSpPr>
-        <p:spPr>
-          <a:xfrm>
-            <a:off x="6446520" y="1645920"/>
-            <a:ext cx="4937760" cy="365760"/>
-          </a:xfrm>
-          <a:prstGeom prst="rect">
-            <a:avLst/>
-          </a:prstGeom>
-          <a:noFill/>
-        </p:spPr>
-        <p:txBody>
-          <a:bodyPr wrap="square" lIns="0" rIns="0" anchor="t">
-            <a:spAutoFit/>
-          </a:bodyPr>
-          <a:lstStyle/>
-          <a:p>
-            <a:pPr algn="l"/>
-            <a:r>
-              <a:rPr sz="1500" b="1">
-                <a:solidFill>
-                  <a:srgbClr val="C55A11"/>
-                </a:solidFill>
-                <a:latin typeface="微软雅黑" panose="020B0503020204020204" charset="-122"/>
-                <a:ea typeface="微软雅黑" panose="020B0503020204020204" charset="-122"/>
-                <a:cs typeface="微软雅黑" panose="020B0503020204020204" charset="-122"/>
-              </a:rPr>
-              <a:t>伦理与社会责任</a:t>
-            </a:r>
-          </a:p>
-        </p:txBody>
-      </p:sp>
-      <p:sp>
-        <p:nvSpPr>
-          <p:cNvPr id="12" name="TextBox 11"/>
-          <p:cNvSpPr txBox="1"/>
-          <p:nvPr/>
-        </p:nvSpPr>
-        <p:spPr>
-          <a:xfrm>
-            <a:off x="6446520" y="2103120"/>
-            <a:ext cx="4937760" cy="3657600"/>
-          </a:xfrm>
-          <a:prstGeom prst="rect">
-            <a:avLst/>
-          </a:prstGeom>
-          <a:noFill/>
-        </p:spPr>
-        <p:txBody>
-          <a:bodyPr wrap="square" lIns="0">
-            <a:spAutoFit/>
-          </a:bodyPr>
-          <a:lstStyle/>
-          <a:p>
-            <a:pPr>
-              <a:spcAft>
-                <a:spcPts val="800"/>
-              </a:spcAft>
-            </a:pPr>
-            <a:r>
-              <a:rPr sz="1000" b="1" dirty="0">
-                <a:solidFill>
-                  <a:srgbClr val="2E75B6"/>
-                </a:solidFill>
-                <a:latin typeface="微软雅黑" panose="020B0503020204020204" charset="-122"/>
-                <a:ea typeface="微软雅黑" panose="020B0503020204020204" charset="-122"/>
-                <a:cs typeface="微软雅黑" panose="020B0503020204020204" charset="-122"/>
-              </a:rPr>
-              <a:t>● </a:t>
-            </a:r>
-            <a:r>
-              <a:rPr sz="1300" b="0" dirty="0" err="1">
-                <a:solidFill>
-                  <a:srgbClr val="595959"/>
-                </a:solidFill>
-                <a:latin typeface="微软雅黑" panose="020B0503020204020204" charset="-122"/>
-                <a:ea typeface="微软雅黑" panose="020B0503020204020204" charset="-122"/>
-                <a:cs typeface="微软雅黑" panose="020B0503020204020204" charset="-122"/>
-              </a:rPr>
-              <a:t>误判：套话式的人类写作会被判成</a:t>
-            </a:r>
-            <a:r>
-              <a:rPr sz="1300" b="0" dirty="0">
-                <a:solidFill>
-                  <a:srgbClr val="595959"/>
-                </a:solidFill>
-                <a:latin typeface="微软雅黑" panose="020B0503020204020204" charset="-122"/>
-                <a:ea typeface="微软雅黑" panose="020B0503020204020204" charset="-122"/>
-                <a:cs typeface="微软雅黑" panose="020B0503020204020204" charset="-122"/>
-              </a:rPr>
-              <a:t> AI</a:t>
-            </a:r>
-          </a:p>
-          <a:p>
-            <a:pPr>
-              <a:spcAft>
-                <a:spcPts val="800"/>
-              </a:spcAft>
-            </a:pPr>
-            <a:r>
-              <a:rPr sz="1000" b="1" dirty="0">
-                <a:solidFill>
-                  <a:srgbClr val="2E75B6"/>
-                </a:solidFill>
-                <a:latin typeface="微软雅黑" panose="020B0503020204020204" charset="-122"/>
-                <a:ea typeface="微软雅黑" panose="020B0503020204020204" charset="-122"/>
-                <a:cs typeface="微软雅黑" panose="020B0503020204020204" charset="-122"/>
-              </a:rPr>
-              <a:t>● </a:t>
-            </a:r>
-            <a:r>
-              <a:rPr sz="1300" b="0" dirty="0" err="1">
-                <a:solidFill>
-                  <a:srgbClr val="595959"/>
-                </a:solidFill>
-                <a:latin typeface="微软雅黑" panose="020B0503020204020204" charset="-122"/>
-                <a:ea typeface="微软雅黑" panose="020B0503020204020204" charset="-122"/>
-                <a:cs typeface="微软雅黑" panose="020B0503020204020204" charset="-122"/>
-              </a:rPr>
-              <a:t>偏差：语言、领域、非母语作者</a:t>
-            </a:r>
-            <a:endParaRPr sz="1300" b="0" dirty="0">
-              <a:solidFill>
-                <a:srgbClr val="595959"/>
-              </a:solidFill>
-              <a:latin typeface="微软雅黑" panose="020B0503020204020204" charset="-122"/>
-              <a:ea typeface="微软雅黑" panose="020B0503020204020204" charset="-122"/>
-              <a:cs typeface="微软雅黑" panose="020B0503020204020204" charset="-122"/>
-            </a:endParaRPr>
-          </a:p>
-          <a:p>
-            <a:pPr>
-              <a:spcAft>
-                <a:spcPts val="800"/>
-              </a:spcAft>
-            </a:pPr>
-            <a:r>
-              <a:rPr sz="1000" b="1" dirty="0">
-                <a:solidFill>
-                  <a:srgbClr val="2E75B6"/>
-                </a:solidFill>
-                <a:latin typeface="微软雅黑" panose="020B0503020204020204" charset="-122"/>
-                <a:ea typeface="微软雅黑" panose="020B0503020204020204" charset="-122"/>
-                <a:cs typeface="微软雅黑" panose="020B0503020204020204" charset="-122"/>
-              </a:rPr>
-              <a:t>● </a:t>
-            </a:r>
-            <a:r>
-              <a:rPr sz="1300" b="0" dirty="0" err="1">
-                <a:solidFill>
-                  <a:srgbClr val="595959"/>
-                </a:solidFill>
-                <a:latin typeface="微软雅黑" panose="020B0503020204020204" charset="-122"/>
-                <a:ea typeface="微软雅黑" panose="020B0503020204020204" charset="-122"/>
-                <a:cs typeface="微软雅黑" panose="020B0503020204020204" charset="-122"/>
-              </a:rPr>
-              <a:t>军备竞赛：检测与反检测</a:t>
-            </a:r>
-            <a:endParaRPr sz="1300" b="0" dirty="0">
-              <a:solidFill>
-                <a:srgbClr val="595959"/>
-              </a:solidFill>
-              <a:latin typeface="微软雅黑" panose="020B0503020204020204" charset="-122"/>
-              <a:ea typeface="微软雅黑" panose="020B0503020204020204" charset="-122"/>
-              <a:cs typeface="微软雅黑" panose="020B0503020204020204" charset="-122"/>
-            </a:endParaRPr>
-          </a:p>
-          <a:p>
-            <a:pPr>
-              <a:spcAft>
-                <a:spcPts val="800"/>
-              </a:spcAft>
-            </a:pPr>
-            <a:r>
-              <a:rPr sz="1000" b="1" dirty="0">
-                <a:solidFill>
-                  <a:srgbClr val="2E75B6"/>
-                </a:solidFill>
-                <a:latin typeface="微软雅黑" panose="020B0503020204020204" charset="-122"/>
-                <a:ea typeface="微软雅黑" panose="020B0503020204020204" charset="-122"/>
-                <a:cs typeface="微软雅黑" panose="020B0503020204020204" charset="-122"/>
-              </a:rPr>
-              <a:t>● </a:t>
-            </a:r>
-            <a:r>
-              <a:rPr sz="1300" b="0" dirty="0" err="1">
-                <a:solidFill>
-                  <a:srgbClr val="595959"/>
-                </a:solidFill>
-                <a:latin typeface="微软雅黑" panose="020B0503020204020204" charset="-122"/>
-                <a:ea typeface="微软雅黑" panose="020B0503020204020204" charset="-122"/>
-                <a:cs typeface="微软雅黑" panose="020B0503020204020204" charset="-122"/>
-              </a:rPr>
-              <a:t>隐私：检测需要读取文本</a:t>
-            </a:r>
-            <a:endParaRPr sz="1300" b="0" dirty="0">
-              <a:solidFill>
-                <a:srgbClr val="595959"/>
-              </a:solidFill>
-              <a:latin typeface="微软雅黑" panose="020B0503020204020204" charset="-122"/>
-              <a:ea typeface="微软雅黑" panose="020B0503020204020204" charset="-122"/>
-              <a:cs typeface="微软雅黑" panose="020B0503020204020204" charset="-122"/>
-            </a:endParaRPr>
-          </a:p>
-        </p:txBody>
-      </p:sp>
-    </p:spTree>
-  </p:cSld>
-  <p:clrMapOvr>
-    <a:masterClrMapping/>
-  </p:clrMapOvr>
-</p:sld>
-</file>
-
 <file path=ppt/slides/slide29.xml><?xml version="1.0" encoding="utf-8"?>
 <p:sld xmlns:a="http://schemas.openxmlformats.org/drawingml/2006/main" xmlns:r="http://schemas.openxmlformats.org/officeDocument/2006/relationships" xmlns:p="http://schemas.openxmlformats.org/presentationml/2006/main">
   <p:cSld>
@@ -23131,7 +22821,7 @@
                 <a:ea typeface="微软雅黑" panose="020B0503020204020204" charset="-122"/>
                 <a:cs typeface="微软雅黑" panose="020B0503020204020204" charset="-122"/>
               </a:rPr>
-              <a:t>结论</a:t>
+              <a:t>局限与伦理</a:t>
             </a:r>
           </a:p>
         </p:txBody>
@@ -23168,7 +22858,7 @@
                 <a:ea typeface="微软雅黑" panose="020B0503020204020204" charset="-122"/>
                 <a:cs typeface="微软雅黑" panose="020B0503020204020204" charset="-122"/>
               </a:rPr>
-              <a:t>四句话总结</a:t>
+              <a:t>知道边界，才算真的复现</a:t>
             </a:r>
           </a:p>
         </p:txBody>
@@ -23242,204 +22932,21 @@
                 <a:ea typeface="微软雅黑" panose="020B0503020204020204" charset="-122"/>
                 <a:cs typeface="微软雅黑" panose="020B0503020204020204" charset="-122"/>
               </a:rPr>
-              <a:t>27</a:t>
-            </a:r>
-          </a:p>
-        </p:txBody>
-      </p:sp>
-      <p:sp>
-        <p:nvSpPr>
-          <p:cNvPr id="7" name="TextBox 6"/>
-          <p:cNvSpPr txBox="1"/>
-          <p:nvPr/>
-        </p:nvSpPr>
-        <p:spPr>
-          <a:xfrm>
-            <a:off x="822960" y="1600200"/>
-            <a:ext cx="10698480" cy="3566160"/>
-          </a:xfrm>
-          <a:prstGeom prst="rect">
-            <a:avLst/>
-          </a:prstGeom>
-          <a:noFill/>
-        </p:spPr>
-        <p:txBody>
-          <a:bodyPr wrap="square" lIns="0">
-            <a:spAutoFit/>
-          </a:bodyPr>
-          <a:lstStyle/>
-          <a:p>
-            <a:pPr>
-              <a:spcAft>
-                <a:spcPts val="1200"/>
-              </a:spcAft>
-            </a:pPr>
-            <a:r>
-              <a:rPr sz="1200" b="1">
-                <a:solidFill>
-                  <a:srgbClr val="2E75B6"/>
-                </a:solidFill>
-                <a:latin typeface="微软雅黑" panose="020B0503020204020204" charset="-122"/>
-                <a:ea typeface="微软雅黑" panose="020B0503020204020204" charset="-122"/>
-                <a:cs typeface="微软雅黑" panose="020B0503020204020204" charset="-122"/>
-              </a:rPr>
-              <a:t>● </a:t>
-            </a:r>
-            <a:r>
-              <a:rPr sz="1500" b="1">
-                <a:solidFill>
-                  <a:srgbClr val="1F3864"/>
-                </a:solidFill>
-                <a:latin typeface="微软雅黑" panose="020B0503020204020204" charset="-122"/>
-                <a:ea typeface="微软雅黑" panose="020B0503020204020204" charset="-122"/>
-                <a:cs typeface="微软雅黑" panose="020B0503020204020204" charset="-122"/>
-              </a:rPr>
-              <a:t>方法有效：</a:t>
-            </a:r>
-            <a:r>
-              <a:rPr sz="1500" b="0">
-                <a:solidFill>
-                  <a:srgbClr val="595959"/>
-                </a:solidFill>
-                <a:latin typeface="微软雅黑" panose="020B0503020204020204" charset="-122"/>
-                <a:ea typeface="微软雅黑" panose="020B0503020204020204" charset="-122"/>
-                <a:cs typeface="微软雅黑" panose="020B0503020204020204" charset="-122"/>
-              </a:rPr>
-              <a:t>Lastde 把概率曲线当时间序列，用局部熵补充全局似然。</a:t>
-            </a:r>
-          </a:p>
-          <a:p>
-            <a:pPr>
-              <a:spcAft>
-                <a:spcPts val="1200"/>
-              </a:spcAft>
-            </a:pPr>
-            <a:r>
-              <a:rPr sz="1200" b="1">
-                <a:solidFill>
-                  <a:srgbClr val="2E75B6"/>
-                </a:solidFill>
-                <a:latin typeface="微软雅黑" panose="020B0503020204020204" charset="-122"/>
-                <a:ea typeface="微软雅黑" panose="020B0503020204020204" charset="-122"/>
-                <a:cs typeface="微软雅黑" panose="020B0503020204020204" charset="-122"/>
-              </a:rPr>
-              <a:t>● </a:t>
-            </a:r>
-            <a:r>
-              <a:rPr sz="1500" b="1">
-                <a:solidFill>
-                  <a:srgbClr val="1F3864"/>
-                </a:solidFill>
-                <a:latin typeface="微软雅黑" panose="020B0503020204020204" charset="-122"/>
-                <a:ea typeface="微软雅黑" panose="020B0503020204020204" charset="-122"/>
-                <a:cs typeface="微软雅黑" panose="020B0503020204020204" charset="-122"/>
-              </a:rPr>
-              <a:t>复现成立：</a:t>
-            </a:r>
-            <a:r>
-              <a:rPr sz="1500" b="0">
-                <a:solidFill>
-                  <a:srgbClr val="595959"/>
-                </a:solidFill>
-                <a:latin typeface="微软雅黑" panose="020B0503020204020204" charset="-122"/>
-                <a:ea typeface="微软雅黑" panose="020B0503020204020204" charset="-122"/>
-                <a:cs typeface="微软雅黑" panose="020B0503020204020204" charset="-122"/>
-              </a:rPr>
-              <a:t>作者数据上，Lastde 的 AUROC 高于 Likelihood 基线（0.894 vs 0.854）。</a:t>
-            </a:r>
-          </a:p>
-          <a:p>
-            <a:pPr>
-              <a:spcAft>
-                <a:spcPts val="1200"/>
-              </a:spcAft>
-            </a:pPr>
-            <a:r>
-              <a:rPr sz="1200" b="1">
-                <a:solidFill>
-                  <a:srgbClr val="2E75B6"/>
-                </a:solidFill>
-                <a:latin typeface="微软雅黑" panose="020B0503020204020204" charset="-122"/>
-                <a:ea typeface="微软雅黑" panose="020B0503020204020204" charset="-122"/>
-                <a:cs typeface="微软雅黑" panose="020B0503020204020204" charset="-122"/>
-              </a:rPr>
-              <a:t>● </a:t>
-            </a:r>
-            <a:r>
-              <a:rPr sz="1500" b="1">
-                <a:solidFill>
-                  <a:srgbClr val="1F3864"/>
-                </a:solidFill>
-                <a:latin typeface="微软雅黑" panose="020B0503020204020204" charset="-122"/>
-                <a:ea typeface="微软雅黑" panose="020B0503020204020204" charset="-122"/>
-                <a:cs typeface="微软雅黑" panose="020B0503020204020204" charset="-122"/>
-              </a:rPr>
-              <a:t>改进有效：</a:t>
-            </a:r>
-            <a:r>
-              <a:rPr sz="1500" b="0">
-                <a:solidFill>
-                  <a:srgbClr val="595959"/>
-                </a:solidFill>
-                <a:latin typeface="微软雅黑" panose="020B0503020204020204" charset="-122"/>
-                <a:ea typeface="微软雅黑" panose="020B0503020204020204" charset="-122"/>
-                <a:cs typeface="微软雅黑" panose="020B0503020204020204" charset="-122"/>
-              </a:rPr>
-              <a:t>MDE 不可靠，改用加权 z 融合，同一测试集 0.8835 → 0.8955（+1.2 pp）。</a:t>
-            </a:r>
-          </a:p>
-          <a:p>
-            <a:pPr>
-              <a:spcAft>
-                <a:spcPts val="1200"/>
-              </a:spcAft>
-            </a:pPr>
-            <a:r>
-              <a:rPr sz="1200" b="1">
-                <a:solidFill>
-                  <a:srgbClr val="2E75B6"/>
-                </a:solidFill>
-                <a:latin typeface="微软雅黑" panose="020B0503020204020204" charset="-122"/>
-                <a:ea typeface="微软雅黑" panose="020B0503020204020204" charset="-122"/>
-                <a:cs typeface="微软雅黑" panose="020B0503020204020204" charset="-122"/>
-              </a:rPr>
-              <a:t>● </a:t>
-            </a:r>
-            <a:r>
-              <a:rPr sz="1500" b="1">
-                <a:solidFill>
-                  <a:srgbClr val="1F3864"/>
-                </a:solidFill>
-                <a:latin typeface="微软雅黑" panose="020B0503020204020204" charset="-122"/>
-                <a:ea typeface="微软雅黑" panose="020B0503020204020204" charset="-122"/>
-                <a:cs typeface="微软雅黑" panose="020B0503020204020204" charset="-122"/>
-              </a:rPr>
-              <a:t>边界清楚：</a:t>
-            </a:r>
-            <a:r>
-              <a:rPr sz="1500" b="0">
-                <a:solidFill>
-                  <a:srgbClr val="595959"/>
-                </a:solidFill>
-                <a:latin typeface="微软雅黑" panose="020B0503020204020204" charset="-122"/>
-                <a:ea typeface="微软雅黑" panose="020B0503020204020204" charset="-122"/>
-                <a:cs typeface="微软雅黑" panose="020B0503020204020204" charset="-122"/>
-              </a:rPr>
-              <a:t>短文本仍弱；长度校准只对混合长度部署有效，对等长基准无效。</a:t>
-            </a:r>
-          </a:p>
-        </p:txBody>
-      </p:sp>
-      <p:sp>
-        <p:nvSpPr>
-          <p:cNvPr id="8" name="Rounded Rectangle 7"/>
+              <a:t>26</a:t>
+            </a:r>
+          </a:p>
+        </p:txBody>
+      </p:sp>
+      <p:sp>
+        <p:nvSpPr>
+          <p:cNvPr id="7" name="Rounded Rectangle 6"/>
           <p:cNvSpPr/>
           <p:nvPr/>
         </p:nvSpPr>
         <p:spPr>
           <a:xfrm>
-            <a:off x="822960" y="5074920"/>
-            <a:ext cx="10607040" cy="914400"/>
+            <a:off x="548640" y="1508760"/>
+            <a:ext cx="5394960" cy="4480560"/>
           </a:xfrm>
           <a:prstGeom prst="roundRect">
             <a:avLst>
@@ -23447,7 +22954,7 @@
             </a:avLst>
           </a:prstGeom>
           <a:solidFill>
-            <a:srgbClr val="1F3864"/>
+            <a:srgbClr val="F2F2F2"/>
           </a:solidFill>
           <a:ln>
             <a:noFill/>
@@ -23479,14 +22986,14 @@
       </p:sp>
       <p:sp>
         <p:nvSpPr>
-          <p:cNvPr id="9" name="TextBox 8"/>
+          <p:cNvPr id="8" name="TextBox 7"/>
           <p:cNvSpPr txBox="1"/>
           <p:nvPr/>
         </p:nvSpPr>
         <p:spPr>
           <a:xfrm>
-            <a:off x="1005840" y="5184648"/>
-            <a:ext cx="10241280" cy="685800"/>
+            <a:off x="777240" y="1645920"/>
+            <a:ext cx="4937760" cy="365760"/>
           </a:xfrm>
           <a:prstGeom prst="rect">
             <a:avLst/>
@@ -23499,18 +23006,415 @@
           </a:bodyPr>
           <a:lstStyle/>
           <a:p>
+            <a:pPr algn="l"/>
+            <a:r>
+              <a:rPr sz="1500" b="1">
+                <a:solidFill>
+                  <a:srgbClr val="1F3864"/>
+                </a:solidFill>
+                <a:latin typeface="微软雅黑" panose="020B0503020204020204" charset="-122"/>
+                <a:ea typeface="微软雅黑" panose="020B0503020204020204" charset="-122"/>
+                <a:cs typeface="微软雅黑" panose="020B0503020204020204" charset="-122"/>
+              </a:rPr>
+              <a:t>四点局限</a:t>
+            </a:r>
+          </a:p>
+        </p:txBody>
+      </p:sp>
+      <p:sp>
+        <p:nvSpPr>
+          <p:cNvPr id="9" name="TextBox 8"/>
+          <p:cNvSpPr txBox="1"/>
+          <p:nvPr/>
+        </p:nvSpPr>
+        <p:spPr>
+          <a:xfrm>
+            <a:off x="777240" y="2103120"/>
+            <a:ext cx="4937760" cy="3657600"/>
+          </a:xfrm>
+          <a:prstGeom prst="rect">
+            <a:avLst/>
+          </a:prstGeom>
+          <a:noFill/>
+        </p:spPr>
+        <p:txBody>
+          <a:bodyPr wrap="square" lIns="0">
+            <a:spAutoFit/>
+          </a:bodyPr>
+          <a:lstStyle/>
+          <a:p>
+            <a:pPr>
+              <a:spcAft>
+                <a:spcPts val="800"/>
+              </a:spcAft>
+            </a:pPr>
+            <a:r>
+              <a:rPr sz="1000" b="1">
+                <a:solidFill>
+                  <a:srgbClr val="2E75B6"/>
+                </a:solidFill>
+                <a:latin typeface="微软雅黑" panose="020B0503020204020204" charset="-122"/>
+                <a:ea typeface="微软雅黑" panose="020B0503020204020204" charset="-122"/>
+                <a:cs typeface="微软雅黑" panose="020B0503020204020204" charset="-122"/>
+              </a:rPr>
+              <a:t>● </a:t>
+            </a:r>
+            <a:r>
+              <a:rPr sz="1300" b="0">
+                <a:solidFill>
+                  <a:srgbClr val="595959"/>
+                </a:solidFill>
+                <a:latin typeface="微软雅黑" panose="020B0503020204020204" charset="-122"/>
+                <a:ea typeface="微软雅黑" panose="020B0503020204020204" charset="-122"/>
+                <a:cs typeface="微软雅黑" panose="020B0503020204020204" charset="-122"/>
+              </a:rPr>
+              <a:t>代理模型 GPT-2 替代 GPT-J</a:t>
+            </a:r>
+          </a:p>
+          <a:p>
+            <a:pPr>
+              <a:spcAft>
+                <a:spcPts val="800"/>
+              </a:spcAft>
+            </a:pPr>
+            <a:r>
+              <a:rPr sz="1000" b="1">
+                <a:solidFill>
+                  <a:srgbClr val="2E75B6"/>
+                </a:solidFill>
+                <a:latin typeface="微软雅黑" panose="020B0503020204020204" charset="-122"/>
+                <a:ea typeface="微软雅黑" panose="020B0503020204020204" charset="-122"/>
+                <a:cs typeface="微软雅黑" panose="020B0503020204020204" charset="-122"/>
+              </a:rPr>
+              <a:t>● </a:t>
+            </a:r>
+            <a:r>
+              <a:rPr sz="1300" b="0">
+                <a:solidFill>
+                  <a:srgbClr val="595959"/>
+                </a:solidFill>
+                <a:latin typeface="微软雅黑" panose="020B0503020204020204" charset="-122"/>
+                <a:ea typeface="微软雅黑" panose="020B0503020204020204" charset="-122"/>
+                <a:cs typeface="微软雅黑" panose="020B0503020204020204" charset="-122"/>
+              </a:rPr>
+              <a:t>只用了 1 个数据集（XSum）</a:t>
+            </a:r>
+          </a:p>
+          <a:p>
+            <a:pPr>
+              <a:spcAft>
+                <a:spcPts val="800"/>
+              </a:spcAft>
+            </a:pPr>
+            <a:r>
+              <a:rPr sz="1000" b="1">
+                <a:solidFill>
+                  <a:srgbClr val="2E75B6"/>
+                </a:solidFill>
+                <a:latin typeface="微软雅黑" panose="020B0503020204020204" charset="-122"/>
+                <a:ea typeface="微软雅黑" panose="020B0503020204020204" charset="-122"/>
+                <a:cs typeface="微软雅黑" panose="020B0503020204020204" charset="-122"/>
+              </a:rPr>
+              <a:t>● </a:t>
+            </a:r>
+            <a:r>
+              <a:rPr sz="1300" b="0">
+                <a:solidFill>
+                  <a:srgbClr val="595959"/>
+                </a:solidFill>
+                <a:latin typeface="微软雅黑" panose="020B0503020204020204" charset="-122"/>
+                <a:ea typeface="微软雅黑" panose="020B0503020204020204" charset="-122"/>
+                <a:cs typeface="微软雅黑" panose="020B0503020204020204" charset="-122"/>
+              </a:rPr>
+              <a:t>没有实现 Lastde++</a:t>
+            </a:r>
+          </a:p>
+          <a:p>
+            <a:pPr>
+              <a:spcAft>
+                <a:spcPts val="800"/>
+              </a:spcAft>
+            </a:pPr>
+            <a:r>
+              <a:rPr sz="1000" b="1">
+                <a:solidFill>
+                  <a:srgbClr val="2E75B6"/>
+                </a:solidFill>
+                <a:latin typeface="微软雅黑" panose="020B0503020204020204" charset="-122"/>
+                <a:ea typeface="微软雅黑" panose="020B0503020204020204" charset="-122"/>
+                <a:cs typeface="微软雅黑" panose="020B0503020204020204" charset="-122"/>
+              </a:rPr>
+              <a:t>● </a:t>
+            </a:r>
+            <a:r>
+              <a:rPr sz="1300" b="0">
+                <a:solidFill>
+                  <a:srgbClr val="595959"/>
+                </a:solidFill>
+                <a:latin typeface="微软雅黑" panose="020B0503020204020204" charset="-122"/>
+                <a:ea typeface="微软雅黑" panose="020B0503020204020204" charset="-122"/>
+                <a:cs typeface="微软雅黑" panose="020B0503020204020204" charset="-122"/>
+              </a:rPr>
+              <a:t>截断长度与论文不完全一致</a:t>
+            </a:r>
+          </a:p>
+        </p:txBody>
+      </p:sp>
+      <p:sp>
+        <p:nvSpPr>
+          <p:cNvPr id="10" name="Rounded Rectangle 9"/>
+          <p:cNvSpPr/>
+          <p:nvPr/>
+        </p:nvSpPr>
+        <p:spPr>
+          <a:xfrm>
+            <a:off x="6217920" y="1508760"/>
+            <a:ext cx="5394960" cy="4480560"/>
+          </a:xfrm>
+          <a:prstGeom prst="roundRect">
+            <a:avLst>
+              <a:gd name="adj" fmla="val 8000"/>
+            </a:avLst>
+          </a:prstGeom>
+          <a:solidFill>
+            <a:srgbClr val="FBE5D6"/>
+          </a:solidFill>
+          <a:ln>
+            <a:noFill/>
+          </a:ln>
+          <a:effectLst/>
+        </p:spPr>
+        <p:style>
+          <a:lnRef idx="1">
+            <a:schemeClr val="accent1"/>
+          </a:lnRef>
+          <a:fillRef idx="3">
+            <a:schemeClr val="accent1"/>
+          </a:fillRef>
+          <a:effectRef idx="2">
+            <a:schemeClr val="accent1"/>
+          </a:effectRef>
+          <a:fontRef idx="minor">
+            <a:schemeClr val="lt1"/>
+          </a:fontRef>
+        </p:style>
+        <p:txBody>
+          <a:bodyPr rtlCol="0" anchor="ctr"/>
+          <a:lstStyle/>
+          <a:p>
             <a:pPr algn="ctr"/>
-            <a:r>
-              <a:rPr sz="1600" b="1">
-                <a:solidFill>
-                  <a:srgbClr val="FFFFFF"/>
-                </a:solidFill>
-                <a:latin typeface="微软雅黑" panose="020B0503020204020204" charset="-122"/>
-                <a:ea typeface="微软雅黑" panose="020B0503020204020204" charset="-122"/>
-                <a:cs typeface="微软雅黑" panose="020B0503020204020204" charset="-122"/>
-              </a:rPr>
-              <a:t>复现的价值不在于把 95.89 抄成一样，而在于能说清“差在哪、为什么”。</a:t>
-            </a:r>
+            <a:endParaRPr/>
+          </a:p>
+        </p:txBody>
+      </p:sp>
+      <p:sp>
+        <p:nvSpPr>
+          <p:cNvPr id="11" name="TextBox 10"/>
+          <p:cNvSpPr txBox="1"/>
+          <p:nvPr/>
+        </p:nvSpPr>
+        <p:spPr>
+          <a:xfrm>
+            <a:off x="6446520" y="1645920"/>
+            <a:ext cx="4937760" cy="365760"/>
+          </a:xfrm>
+          <a:prstGeom prst="rect">
+            <a:avLst/>
+          </a:prstGeom>
+          <a:noFill/>
+        </p:spPr>
+        <p:txBody>
+          <a:bodyPr wrap="square" lIns="0" rIns="0" anchor="t">
+            <a:spAutoFit/>
+          </a:bodyPr>
+          <a:lstStyle/>
+          <a:p>
+            <a:pPr algn="l"/>
+            <a:r>
+              <a:rPr sz="1500" b="1">
+                <a:solidFill>
+                  <a:srgbClr val="C55A11"/>
+                </a:solidFill>
+                <a:latin typeface="微软雅黑" panose="020B0503020204020204" charset="-122"/>
+                <a:ea typeface="微软雅黑" panose="020B0503020204020204" charset="-122"/>
+                <a:cs typeface="微软雅黑" panose="020B0503020204020204" charset="-122"/>
+              </a:rPr>
+              <a:t>伦理与社会责任</a:t>
+            </a:r>
+          </a:p>
+        </p:txBody>
+      </p:sp>
+      <p:sp>
+        <p:nvSpPr>
+          <p:cNvPr id="12" name="TextBox 11"/>
+          <p:cNvSpPr txBox="1"/>
+          <p:nvPr/>
+        </p:nvSpPr>
+        <p:spPr>
+          <a:xfrm>
+            <a:off x="6446520" y="2103120"/>
+            <a:ext cx="4937760" cy="3657600"/>
+          </a:xfrm>
+          <a:prstGeom prst="rect">
+            <a:avLst/>
+          </a:prstGeom>
+          <a:noFill/>
+        </p:spPr>
+        <p:txBody>
+          <a:bodyPr wrap="square" lIns="0">
+            <a:spAutoFit/>
+          </a:bodyPr>
+          <a:lstStyle/>
+          <a:p>
+            <a:pPr>
+              <a:spcAft>
+                <a:spcPts val="800"/>
+              </a:spcAft>
+            </a:pPr>
+            <a:r>
+              <a:rPr sz="1000" b="1" dirty="0">
+                <a:solidFill>
+                  <a:srgbClr val="2E75B6"/>
+                </a:solidFill>
+                <a:latin typeface="微软雅黑" panose="020B0503020204020204" charset="-122"/>
+                <a:ea typeface="微软雅黑" panose="020B0503020204020204" charset="-122"/>
+                <a:cs typeface="微软雅黑" panose="020B0503020204020204" charset="-122"/>
+              </a:rPr>
+              <a:t>● </a:t>
+            </a:r>
+            <a:r>
+              <a:rPr sz="1300" b="0" dirty="0" err="1">
+                <a:solidFill>
+                  <a:srgbClr val="595959"/>
+                </a:solidFill>
+                <a:latin typeface="微软雅黑" panose="020B0503020204020204" charset="-122"/>
+                <a:ea typeface="微软雅黑" panose="020B0503020204020204" charset="-122"/>
+                <a:cs typeface="微软雅黑" panose="020B0503020204020204" charset="-122"/>
+              </a:rPr>
+              <a:t>误判：套话式的人类写作会被判成</a:t>
+            </a:r>
+            <a:r>
+              <a:rPr sz="1300" b="0" dirty="0">
+                <a:solidFill>
+                  <a:srgbClr val="595959"/>
+                </a:solidFill>
+                <a:latin typeface="微软雅黑" panose="020B0503020204020204" charset="-122"/>
+                <a:ea typeface="微软雅黑" panose="020B0503020204020204" charset="-122"/>
+                <a:cs typeface="微软雅黑" panose="020B0503020204020204" charset="-122"/>
+              </a:rPr>
+              <a:t> AI</a:t>
+            </a:r>
+          </a:p>
+          <a:p>
+            <a:pPr>
+              <a:spcAft>
+                <a:spcPts val="800"/>
+              </a:spcAft>
+            </a:pPr>
+            <a:r>
+              <a:rPr sz="1000" b="1" dirty="0">
+                <a:solidFill>
+                  <a:srgbClr val="2E75B6"/>
+                </a:solidFill>
+                <a:latin typeface="微软雅黑" panose="020B0503020204020204" charset="-122"/>
+                <a:ea typeface="微软雅黑" panose="020B0503020204020204" charset="-122"/>
+                <a:cs typeface="微软雅黑" panose="020B0503020204020204" charset="-122"/>
+              </a:rPr>
+              <a:t>● </a:t>
+            </a:r>
+            <a:r>
+              <a:rPr sz="1300" b="0" dirty="0" err="1">
+                <a:solidFill>
+                  <a:srgbClr val="595959"/>
+                </a:solidFill>
+                <a:latin typeface="微软雅黑" panose="020B0503020204020204" charset="-122"/>
+                <a:ea typeface="微软雅黑" panose="020B0503020204020204" charset="-122"/>
+                <a:cs typeface="微软雅黑" panose="020B0503020204020204" charset="-122"/>
+              </a:rPr>
+              <a:t>偏差：语言、领域、非母语作者</a:t>
+            </a:r>
+            <a:endParaRPr sz="1300" b="0" dirty="0">
+              <a:solidFill>
+                <a:srgbClr val="595959"/>
+              </a:solidFill>
+              <a:latin typeface="微软雅黑" panose="020B0503020204020204" charset="-122"/>
+              <a:ea typeface="微软雅黑" panose="020B0503020204020204" charset="-122"/>
+              <a:cs typeface="微软雅黑" panose="020B0503020204020204" charset="-122"/>
+            </a:endParaRPr>
+          </a:p>
+          <a:p>
+            <a:pPr>
+              <a:spcAft>
+                <a:spcPts val="800"/>
+              </a:spcAft>
+            </a:pPr>
+            <a:r>
+              <a:rPr sz="1000" b="1" dirty="0">
+                <a:solidFill>
+                  <a:srgbClr val="2E75B6"/>
+                </a:solidFill>
+                <a:latin typeface="微软雅黑" panose="020B0503020204020204" charset="-122"/>
+                <a:ea typeface="微软雅黑" panose="020B0503020204020204" charset="-122"/>
+                <a:cs typeface="微软雅黑" panose="020B0503020204020204" charset="-122"/>
+              </a:rPr>
+              <a:t>● </a:t>
+            </a:r>
+            <a:r>
+              <a:rPr sz="1300" b="0" dirty="0" err="1">
+                <a:solidFill>
+                  <a:srgbClr val="595959"/>
+                </a:solidFill>
+                <a:latin typeface="微软雅黑" panose="020B0503020204020204" charset="-122"/>
+                <a:ea typeface="微软雅黑" panose="020B0503020204020204" charset="-122"/>
+                <a:cs typeface="微软雅黑" panose="020B0503020204020204" charset="-122"/>
+              </a:rPr>
+              <a:t>军备竞赛：检测与反检测</a:t>
+            </a:r>
+            <a:endParaRPr sz="1300" b="0" dirty="0">
+              <a:solidFill>
+                <a:srgbClr val="595959"/>
+              </a:solidFill>
+              <a:latin typeface="微软雅黑" panose="020B0503020204020204" charset="-122"/>
+              <a:ea typeface="微软雅黑" panose="020B0503020204020204" charset="-122"/>
+              <a:cs typeface="微软雅黑" panose="020B0503020204020204" charset="-122"/>
+            </a:endParaRPr>
+          </a:p>
+          <a:p>
+            <a:pPr>
+              <a:spcAft>
+                <a:spcPts val="800"/>
+              </a:spcAft>
+            </a:pPr>
+            <a:r>
+              <a:rPr sz="1000" b="1" dirty="0">
+                <a:solidFill>
+                  <a:srgbClr val="2E75B6"/>
+                </a:solidFill>
+                <a:latin typeface="微软雅黑" panose="020B0503020204020204" charset="-122"/>
+                <a:ea typeface="微软雅黑" panose="020B0503020204020204" charset="-122"/>
+                <a:cs typeface="微软雅黑" panose="020B0503020204020204" charset="-122"/>
+              </a:rPr>
+              <a:t>● </a:t>
+            </a:r>
+            <a:r>
+              <a:rPr sz="1300" b="0" dirty="0" err="1">
+                <a:solidFill>
+                  <a:srgbClr val="595959"/>
+                </a:solidFill>
+                <a:latin typeface="微软雅黑" panose="020B0503020204020204" charset="-122"/>
+                <a:ea typeface="微软雅黑" panose="020B0503020204020204" charset="-122"/>
+                <a:cs typeface="微软雅黑" panose="020B0503020204020204" charset="-122"/>
+              </a:rPr>
+              <a:t>隐私：检测需要读取文本</a:t>
+            </a:r>
+            <a:endParaRPr sz="1300" b="0" dirty="0">
+              <a:solidFill>
+                <a:srgbClr val="595959"/>
+              </a:solidFill>
+              <a:latin typeface="微软雅黑" panose="020B0503020204020204" charset="-122"/>
+              <a:ea typeface="微软雅黑" panose="020B0503020204020204" charset="-122"/>
+              <a:cs typeface="微软雅黑" panose="020B0503020204020204" charset="-122"/>
+            </a:endParaRPr>
           </a:p>
         </p:txBody>
       </p:sp>
@@ -24889,6 +24793,490 @@
 </file>
 
 <file path=ppt/slides/slide30.xml><?xml version="1.0" encoding="utf-8"?>
+<p:sld xmlns:a="http://schemas.openxmlformats.org/drawingml/2006/main" xmlns:r="http://schemas.openxmlformats.org/officeDocument/2006/relationships" xmlns:p="http://schemas.openxmlformats.org/presentationml/2006/main">
+  <p:cSld>
+    <p:spTree>
+      <p:nvGrpSpPr>
+        <p:cNvPr id="1" name=""/>
+        <p:cNvGrpSpPr/>
+        <p:nvPr/>
+      </p:nvGrpSpPr>
+      <p:grpSpPr>
+        <a:xfrm>
+          <a:off x="0" y="0"/>
+          <a:ext cx="0" cy="0"/>
+          <a:chOff x="0" y="0"/>
+          <a:chExt cx="0" cy="0"/>
+        </a:xfrm>
+      </p:grpSpPr>
+      <p:sp>
+        <p:nvSpPr>
+          <p:cNvPr id="2" name="Rectangle 1"/>
+          <p:cNvSpPr/>
+          <p:nvPr/>
+        </p:nvSpPr>
+        <p:spPr>
+          <a:xfrm>
+            <a:off x="0" y="0"/>
+            <a:ext cx="12191695" cy="82296"/>
+          </a:xfrm>
+          <a:prstGeom prst="rect">
+            <a:avLst/>
+          </a:prstGeom>
+          <a:solidFill>
+            <a:srgbClr val="1F3864"/>
+          </a:solidFill>
+          <a:ln>
+            <a:noFill/>
+          </a:ln>
+        </p:spPr>
+        <p:style>
+          <a:lnRef idx="1">
+            <a:schemeClr val="accent1"/>
+          </a:lnRef>
+          <a:fillRef idx="3">
+            <a:schemeClr val="accent1"/>
+          </a:fillRef>
+          <a:effectRef idx="2">
+            <a:schemeClr val="accent1"/>
+          </a:effectRef>
+          <a:fontRef idx="minor">
+            <a:schemeClr val="lt1"/>
+          </a:fontRef>
+        </p:style>
+        <p:txBody>
+          <a:bodyPr rtlCol="0" anchor="ctr"/>
+          <a:lstStyle/>
+          <a:p>
+            <a:pPr algn="ctr"/>
+            <a:endParaRPr/>
+          </a:p>
+        </p:txBody>
+      </p:sp>
+      <p:sp>
+        <p:nvSpPr>
+          <p:cNvPr id="3" name="TextBox 2"/>
+          <p:cNvSpPr txBox="1"/>
+          <p:nvPr/>
+        </p:nvSpPr>
+        <p:spPr>
+          <a:xfrm>
+            <a:off x="548640" y="292608"/>
+            <a:ext cx="10972800" cy="548640"/>
+          </a:xfrm>
+          <a:prstGeom prst="rect">
+            <a:avLst/>
+          </a:prstGeom>
+          <a:noFill/>
+        </p:spPr>
+        <p:txBody>
+          <a:bodyPr wrap="square" lIns="0" rIns="0" anchor="t">
+            <a:spAutoFit/>
+          </a:bodyPr>
+          <a:lstStyle/>
+          <a:p>
+            <a:pPr algn="l"/>
+            <a:r>
+              <a:rPr sz="2600" b="1">
+                <a:solidFill>
+                  <a:srgbClr val="1F3864"/>
+                </a:solidFill>
+                <a:latin typeface="微软雅黑" panose="020B0503020204020204" charset="-122"/>
+                <a:ea typeface="微软雅黑" panose="020B0503020204020204" charset="-122"/>
+                <a:cs typeface="微软雅黑" panose="020B0503020204020204" charset="-122"/>
+              </a:rPr>
+              <a:t>结论</a:t>
+            </a:r>
+          </a:p>
+        </p:txBody>
+      </p:sp>
+      <p:sp>
+        <p:nvSpPr>
+          <p:cNvPr id="4" name="TextBox 3"/>
+          <p:cNvSpPr txBox="1"/>
+          <p:nvPr/>
+        </p:nvSpPr>
+        <p:spPr>
+          <a:xfrm>
+            <a:off x="548640" y="868680"/>
+            <a:ext cx="10972800" cy="365760"/>
+          </a:xfrm>
+          <a:prstGeom prst="rect">
+            <a:avLst/>
+          </a:prstGeom>
+          <a:noFill/>
+        </p:spPr>
+        <p:txBody>
+          <a:bodyPr wrap="square" lIns="0" rIns="0" anchor="t">
+            <a:spAutoFit/>
+          </a:bodyPr>
+          <a:lstStyle/>
+          <a:p>
+            <a:pPr algn="l"/>
+            <a:r>
+              <a:rPr sz="1300" b="0">
+                <a:solidFill>
+                  <a:srgbClr val="7F7F7F"/>
+                </a:solidFill>
+                <a:latin typeface="微软雅黑" panose="020B0503020204020204" charset="-122"/>
+                <a:ea typeface="微软雅黑" panose="020B0503020204020204" charset="-122"/>
+                <a:cs typeface="微软雅黑" panose="020B0503020204020204" charset="-122"/>
+              </a:rPr>
+              <a:t>四句话总结</a:t>
+            </a:r>
+          </a:p>
+        </p:txBody>
+      </p:sp>
+      <p:sp>
+        <p:nvSpPr>
+          <p:cNvPr id="5" name="TextBox 4"/>
+          <p:cNvSpPr txBox="1"/>
+          <p:nvPr/>
+        </p:nvSpPr>
+        <p:spPr>
+          <a:xfrm>
+            <a:off x="548640" y="6473952"/>
+            <a:ext cx="5486400" cy="274320"/>
+          </a:xfrm>
+          <a:prstGeom prst="rect">
+            <a:avLst/>
+          </a:prstGeom>
+          <a:noFill/>
+        </p:spPr>
+        <p:txBody>
+          <a:bodyPr wrap="square" lIns="0" rIns="0" anchor="t">
+            <a:spAutoFit/>
+          </a:bodyPr>
+          <a:lstStyle/>
+          <a:p>
+            <a:pPr algn="l"/>
+            <a:r>
+              <a:rPr sz="900" b="0">
+                <a:solidFill>
+                  <a:srgbClr val="7F7F7F"/>
+                </a:solidFill>
+                <a:latin typeface="微软雅黑" panose="020B0503020204020204" charset="-122"/>
+                <a:ea typeface="微软雅黑" panose="020B0503020204020204" charset="-122"/>
+                <a:cs typeface="微软雅黑" panose="020B0503020204020204" charset="-122"/>
+              </a:rPr>
+              <a:t>Lastde 复现  ·  AI for Software Engineering</a:t>
+            </a:r>
+          </a:p>
+        </p:txBody>
+      </p:sp>
+      <p:sp>
+        <p:nvSpPr>
+          <p:cNvPr id="6" name="TextBox 5"/>
+          <p:cNvSpPr txBox="1"/>
+          <p:nvPr/>
+        </p:nvSpPr>
+        <p:spPr>
+          <a:xfrm>
+            <a:off x="11155680" y="6473952"/>
+            <a:ext cx="548640" cy="274320"/>
+          </a:xfrm>
+          <a:prstGeom prst="rect">
+            <a:avLst/>
+          </a:prstGeom>
+          <a:noFill/>
+        </p:spPr>
+        <p:txBody>
+          <a:bodyPr wrap="square" lIns="0" rIns="0" anchor="t">
+            <a:spAutoFit/>
+          </a:bodyPr>
+          <a:lstStyle/>
+          <a:p>
+            <a:pPr algn="r"/>
+            <a:r>
+              <a:rPr sz="900" b="0">
+                <a:solidFill>
+                  <a:srgbClr val="7F7F7F"/>
+                </a:solidFill>
+                <a:latin typeface="微软雅黑" panose="020B0503020204020204" charset="-122"/>
+                <a:ea typeface="微软雅黑" panose="020B0503020204020204" charset="-122"/>
+                <a:cs typeface="微软雅黑" panose="020B0503020204020204" charset="-122"/>
+              </a:rPr>
+              <a:t>27</a:t>
+            </a:r>
+          </a:p>
+        </p:txBody>
+      </p:sp>
+      <p:sp>
+        <p:nvSpPr>
+          <p:cNvPr id="7" name="TextBox 6"/>
+          <p:cNvSpPr txBox="1"/>
+          <p:nvPr/>
+        </p:nvSpPr>
+        <p:spPr>
+          <a:xfrm>
+            <a:off x="822960" y="1600200"/>
+            <a:ext cx="10698480" cy="3566160"/>
+          </a:xfrm>
+          <a:prstGeom prst="rect">
+            <a:avLst/>
+          </a:prstGeom>
+          <a:noFill/>
+        </p:spPr>
+        <p:txBody>
+          <a:bodyPr wrap="square" lIns="0">
+            <a:spAutoFit/>
+          </a:bodyPr>
+          <a:lstStyle/>
+          <a:p>
+            <a:pPr>
+              <a:spcAft>
+                <a:spcPts val="1200"/>
+              </a:spcAft>
+            </a:pPr>
+            <a:r>
+              <a:rPr sz="1200" b="1">
+                <a:solidFill>
+                  <a:srgbClr val="2E75B6"/>
+                </a:solidFill>
+                <a:latin typeface="微软雅黑" panose="020B0503020204020204" charset="-122"/>
+                <a:ea typeface="微软雅黑" panose="020B0503020204020204" charset="-122"/>
+                <a:cs typeface="微软雅黑" panose="020B0503020204020204" charset="-122"/>
+              </a:rPr>
+              <a:t>● </a:t>
+            </a:r>
+            <a:r>
+              <a:rPr sz="1500" b="1">
+                <a:solidFill>
+                  <a:srgbClr val="1F3864"/>
+                </a:solidFill>
+                <a:latin typeface="微软雅黑" panose="020B0503020204020204" charset="-122"/>
+                <a:ea typeface="微软雅黑" panose="020B0503020204020204" charset="-122"/>
+                <a:cs typeface="微软雅黑" panose="020B0503020204020204" charset="-122"/>
+              </a:rPr>
+              <a:t>方法有效：</a:t>
+            </a:r>
+            <a:r>
+              <a:rPr sz="1500" b="0">
+                <a:solidFill>
+                  <a:srgbClr val="595959"/>
+                </a:solidFill>
+                <a:latin typeface="微软雅黑" panose="020B0503020204020204" charset="-122"/>
+                <a:ea typeface="微软雅黑" panose="020B0503020204020204" charset="-122"/>
+                <a:cs typeface="微软雅黑" panose="020B0503020204020204" charset="-122"/>
+              </a:rPr>
+              <a:t>Lastde 把概率曲线当时间序列，用局部熵补充全局似然。</a:t>
+            </a:r>
+          </a:p>
+          <a:p>
+            <a:pPr>
+              <a:spcAft>
+                <a:spcPts val="1200"/>
+              </a:spcAft>
+            </a:pPr>
+            <a:r>
+              <a:rPr sz="1200" b="1">
+                <a:solidFill>
+                  <a:srgbClr val="2E75B6"/>
+                </a:solidFill>
+                <a:latin typeface="微软雅黑" panose="020B0503020204020204" charset="-122"/>
+                <a:ea typeface="微软雅黑" panose="020B0503020204020204" charset="-122"/>
+                <a:cs typeface="微软雅黑" panose="020B0503020204020204" charset="-122"/>
+              </a:rPr>
+              <a:t>● </a:t>
+            </a:r>
+            <a:r>
+              <a:rPr sz="1500" b="1">
+                <a:solidFill>
+                  <a:srgbClr val="1F3864"/>
+                </a:solidFill>
+                <a:latin typeface="微软雅黑" panose="020B0503020204020204" charset="-122"/>
+                <a:ea typeface="微软雅黑" panose="020B0503020204020204" charset="-122"/>
+                <a:cs typeface="微软雅黑" panose="020B0503020204020204" charset="-122"/>
+              </a:rPr>
+              <a:t>复现成立：</a:t>
+            </a:r>
+            <a:r>
+              <a:rPr sz="1500" b="0">
+                <a:solidFill>
+                  <a:srgbClr val="595959"/>
+                </a:solidFill>
+                <a:latin typeface="微软雅黑" panose="020B0503020204020204" charset="-122"/>
+                <a:ea typeface="微软雅黑" panose="020B0503020204020204" charset="-122"/>
+                <a:cs typeface="微软雅黑" panose="020B0503020204020204" charset="-122"/>
+              </a:rPr>
+              <a:t>作者数据上，Lastde 的 AUROC 高于 Likelihood 基线（0.894 vs 0.854）。</a:t>
+            </a:r>
+          </a:p>
+          <a:p>
+            <a:pPr>
+              <a:spcAft>
+                <a:spcPts val="1200"/>
+              </a:spcAft>
+            </a:pPr>
+            <a:r>
+              <a:rPr sz="1200" b="1">
+                <a:solidFill>
+                  <a:srgbClr val="2E75B6"/>
+                </a:solidFill>
+                <a:latin typeface="微软雅黑" panose="020B0503020204020204" charset="-122"/>
+                <a:ea typeface="微软雅黑" panose="020B0503020204020204" charset="-122"/>
+                <a:cs typeface="微软雅黑" panose="020B0503020204020204" charset="-122"/>
+              </a:rPr>
+              <a:t>● </a:t>
+            </a:r>
+            <a:r>
+              <a:rPr sz="1500" b="1">
+                <a:solidFill>
+                  <a:srgbClr val="1F3864"/>
+                </a:solidFill>
+                <a:latin typeface="微软雅黑" panose="020B0503020204020204" charset="-122"/>
+                <a:ea typeface="微软雅黑" panose="020B0503020204020204" charset="-122"/>
+                <a:cs typeface="微软雅黑" panose="020B0503020204020204" charset="-122"/>
+              </a:rPr>
+              <a:t>改进有效：</a:t>
+            </a:r>
+            <a:r>
+              <a:rPr sz="1500" b="0">
+                <a:solidFill>
+                  <a:srgbClr val="595959"/>
+                </a:solidFill>
+                <a:latin typeface="微软雅黑" panose="020B0503020204020204" charset="-122"/>
+                <a:ea typeface="微软雅黑" panose="020B0503020204020204" charset="-122"/>
+                <a:cs typeface="微软雅黑" panose="020B0503020204020204" charset="-122"/>
+              </a:rPr>
+              <a:t>MDE 不可靠，改用加权 z 融合，同一测试集 0.8835 → 0.8955（+1.2 pp）。</a:t>
+            </a:r>
+          </a:p>
+          <a:p>
+            <a:pPr>
+              <a:spcAft>
+                <a:spcPts val="1200"/>
+              </a:spcAft>
+            </a:pPr>
+            <a:r>
+              <a:rPr sz="1200" b="1">
+                <a:solidFill>
+                  <a:srgbClr val="2E75B6"/>
+                </a:solidFill>
+                <a:latin typeface="微软雅黑" panose="020B0503020204020204" charset="-122"/>
+                <a:ea typeface="微软雅黑" panose="020B0503020204020204" charset="-122"/>
+                <a:cs typeface="微软雅黑" panose="020B0503020204020204" charset="-122"/>
+              </a:rPr>
+              <a:t>● </a:t>
+            </a:r>
+            <a:r>
+              <a:rPr sz="1500" b="1">
+                <a:solidFill>
+                  <a:srgbClr val="1F3864"/>
+                </a:solidFill>
+                <a:latin typeface="微软雅黑" panose="020B0503020204020204" charset="-122"/>
+                <a:ea typeface="微软雅黑" panose="020B0503020204020204" charset="-122"/>
+                <a:cs typeface="微软雅黑" panose="020B0503020204020204" charset="-122"/>
+              </a:rPr>
+              <a:t>边界清楚：</a:t>
+            </a:r>
+            <a:r>
+              <a:rPr sz="1500" b="0">
+                <a:solidFill>
+                  <a:srgbClr val="595959"/>
+                </a:solidFill>
+                <a:latin typeface="微软雅黑" panose="020B0503020204020204" charset="-122"/>
+                <a:ea typeface="微软雅黑" panose="020B0503020204020204" charset="-122"/>
+                <a:cs typeface="微软雅黑" panose="020B0503020204020204" charset="-122"/>
+              </a:rPr>
+              <a:t>短文本仍弱；长度校准只对混合长度部署有效，对等长基准无效。</a:t>
+            </a:r>
+          </a:p>
+        </p:txBody>
+      </p:sp>
+      <p:sp>
+        <p:nvSpPr>
+          <p:cNvPr id="8" name="Rounded Rectangle 7"/>
+          <p:cNvSpPr/>
+          <p:nvPr/>
+        </p:nvSpPr>
+        <p:spPr>
+          <a:xfrm>
+            <a:off x="822960" y="5074920"/>
+            <a:ext cx="10607040" cy="914400"/>
+          </a:xfrm>
+          <a:prstGeom prst="roundRect">
+            <a:avLst>
+              <a:gd name="adj" fmla="val 8000"/>
+            </a:avLst>
+          </a:prstGeom>
+          <a:solidFill>
+            <a:srgbClr val="1F3864"/>
+          </a:solidFill>
+          <a:ln>
+            <a:noFill/>
+          </a:ln>
+          <a:effectLst/>
+        </p:spPr>
+        <p:style>
+          <a:lnRef idx="1">
+            <a:schemeClr val="accent1"/>
+          </a:lnRef>
+          <a:fillRef idx="3">
+            <a:schemeClr val="accent1"/>
+          </a:fillRef>
+          <a:effectRef idx="2">
+            <a:schemeClr val="accent1"/>
+          </a:effectRef>
+          <a:fontRef idx="minor">
+            <a:schemeClr val="lt1"/>
+          </a:fontRef>
+        </p:style>
+        <p:txBody>
+          <a:bodyPr rtlCol="0" anchor="ctr"/>
+          <a:lstStyle/>
+          <a:p>
+            <a:pPr algn="ctr"/>
+            <a:endParaRPr/>
+          </a:p>
+        </p:txBody>
+      </p:sp>
+      <p:sp>
+        <p:nvSpPr>
+          <p:cNvPr id="9" name="TextBox 8"/>
+          <p:cNvSpPr txBox="1"/>
+          <p:nvPr/>
+        </p:nvSpPr>
+        <p:spPr>
+          <a:xfrm>
+            <a:off x="1005840" y="5184648"/>
+            <a:ext cx="10241280" cy="685800"/>
+          </a:xfrm>
+          <a:prstGeom prst="rect">
+            <a:avLst/>
+          </a:prstGeom>
+          <a:noFill/>
+        </p:spPr>
+        <p:txBody>
+          <a:bodyPr wrap="square" lIns="0" rIns="0" anchor="t">
+            <a:spAutoFit/>
+          </a:bodyPr>
+          <a:lstStyle/>
+          <a:p>
+            <a:pPr algn="ctr"/>
+            <a:r>
+              <a:rPr sz="1600" b="1">
+                <a:solidFill>
+                  <a:srgbClr val="FFFFFF"/>
+                </a:solidFill>
+                <a:latin typeface="微软雅黑" panose="020B0503020204020204" charset="-122"/>
+                <a:ea typeface="微软雅黑" panose="020B0503020204020204" charset="-122"/>
+                <a:cs typeface="微软雅黑" panose="020B0503020204020204" charset="-122"/>
+              </a:rPr>
+              <a:t>复现的价值不在于把 95.89 抄成一样，而在于能说清“差在哪、为什么”。</a:t>
+            </a:r>
+          </a:p>
+        </p:txBody>
+      </p:sp>
+    </p:spTree>
+  </p:cSld>
+  <p:clrMapOvr>
+    <a:masterClrMapping/>
+  </p:clrMapOvr>
+</p:sld>
+</file>
+
+<file path=ppt/slides/slide31.xml><?xml version="1.0" encoding="utf-8"?>
 <p:sld xmlns:a="http://schemas.openxmlformats.org/drawingml/2006/main" xmlns:r="http://schemas.openxmlformats.org/officeDocument/2006/relationships" xmlns:p="http://schemas.openxmlformats.org/presentationml/2006/main">
   <p:cSld>
     <p:spTree>
